--- a/figures/Fig10_province_level_v2.pptx
+++ b/figures/Fig10_province_level_v2.pptx
@@ -2272,7 +2272,7 @@
           <p:spPr>
             <a:xfrm>
               <a:off x="182880" y="182880"/>
-              <a:ext cx="10972799" cy="7315200"/>
+              <a:ext cx="10972799" cy="7315199"/>
             </a:xfrm>
             <a:prstGeom prst="rect">
               <a:avLst/>
@@ -2307,7 +2307,7 @@
           <p:spPr>
             <a:xfrm>
               <a:off x="252469" y="252469"/>
-              <a:ext cx="5416810" cy="4018027"/>
+              <a:ext cx="5416810" cy="4025113"/>
             </a:xfrm>
             <a:prstGeom prst="rect">
               <a:avLst/>
@@ -2317,7 +2317,7 @@
                 <a:alpha val="100000"/>
               </a:srgbClr>
             </a:solidFill>
-            <a:ln w="11086" cap="rnd">
+            <a:ln w="12318" cap="rnd">
               <a:solidFill>
                 <a:srgbClr val="FFFFFF">
                   <a:alpha val="100000"/>
@@ -2341,8 +2341,8 @@
           </p:nvSpPr>
           <p:spPr>
             <a:xfrm>
-              <a:off x="5669280" y="252469"/>
-              <a:ext cx="5416810" cy="4018027"/>
+              <a:off x="5669279" y="252469"/>
+              <a:ext cx="5416810" cy="4025113"/>
             </a:xfrm>
             <a:prstGeom prst="rect">
               <a:avLst/>
@@ -2352,7 +2352,7 @@
                 <a:alpha val="100000"/>
               </a:srgbClr>
             </a:solidFill>
-            <a:ln w="11086" cap="rnd">
+            <a:ln w="12318" cap="rnd">
               <a:solidFill>
                 <a:srgbClr val="FFFFFF">
                   <a:alpha val="100000"/>
@@ -2376,8 +2376,8 @@
           </p:nvSpPr>
           <p:spPr>
             <a:xfrm>
-              <a:off x="1742059" y="965592"/>
-              <a:ext cx="1833535" cy="2175478"/>
+              <a:off x="1900092" y="1163840"/>
+              <a:ext cx="1745629" cy="1938267"/>
             </a:xfrm>
             <a:prstGeom prst="rect">
               <a:avLst/>
@@ -2402,21 +2402,21 @@
           </p:nvSpPr>
           <p:spPr>
             <a:xfrm>
-              <a:off x="1742059" y="3141071"/>
-              <a:ext cx="1833535" cy="0"/>
+              <a:off x="1900092" y="3102108"/>
+              <a:ext cx="1745629" cy="0"/>
             </a:xfrm>
             <a:custGeom>
               <a:avLst/>
               <a:pathLst>
-                <a:path w="1833535" h="0">
+                <a:path w="1745629" h="0">
                   <a:moveTo>
                     <a:pt x="0" y="0"/>
                   </a:moveTo>
                   <a:lnTo>
-                    <a:pt x="1833535" y="0"/>
+                    <a:pt x="1745629" y="0"/>
                   </a:lnTo>
                   <a:lnTo>
-                    <a:pt x="1833535" y="0"/>
+                    <a:pt x="1745629" y="0"/>
                   </a:lnTo>
                 </a:path>
               </a:pathLst>
@@ -2445,21 +2445,21 @@
           </p:nvSpPr>
           <p:spPr>
             <a:xfrm>
-              <a:off x="1742059" y="2531022"/>
-              <a:ext cx="1833535" cy="0"/>
+              <a:off x="1900092" y="2558578"/>
+              <a:ext cx="1745629" cy="0"/>
             </a:xfrm>
             <a:custGeom>
               <a:avLst/>
               <a:pathLst>
-                <a:path w="1833535" h="0">
+                <a:path w="1745629" h="0">
                   <a:moveTo>
                     <a:pt x="0" y="0"/>
                   </a:moveTo>
                   <a:lnTo>
-                    <a:pt x="1833535" y="0"/>
+                    <a:pt x="1745629" y="0"/>
                   </a:lnTo>
                   <a:lnTo>
-                    <a:pt x="1833535" y="0"/>
+                    <a:pt x="1745629" y="0"/>
                   </a:lnTo>
                 </a:path>
               </a:pathLst>
@@ -2488,21 +2488,21 @@
           </p:nvSpPr>
           <p:spPr>
             <a:xfrm>
-              <a:off x="1742059" y="1920973"/>
-              <a:ext cx="1833535" cy="0"/>
+              <a:off x="1900092" y="2015048"/>
+              <a:ext cx="1745629" cy="0"/>
             </a:xfrm>
             <a:custGeom>
               <a:avLst/>
               <a:pathLst>
-                <a:path w="1833535" h="0">
+                <a:path w="1745629" h="0">
                   <a:moveTo>
                     <a:pt x="0" y="0"/>
                   </a:moveTo>
                   <a:lnTo>
-                    <a:pt x="1833535" y="0"/>
+                    <a:pt x="1745629" y="0"/>
                   </a:lnTo>
                   <a:lnTo>
-                    <a:pt x="1833535" y="0"/>
+                    <a:pt x="1745629" y="0"/>
                   </a:lnTo>
                 </a:path>
               </a:pathLst>
@@ -2531,21 +2531,21 @@
           </p:nvSpPr>
           <p:spPr>
             <a:xfrm>
-              <a:off x="1742059" y="1310924"/>
-              <a:ext cx="1833535" cy="0"/>
+              <a:off x="1900092" y="1471518"/>
+              <a:ext cx="1745629" cy="0"/>
             </a:xfrm>
             <a:custGeom>
               <a:avLst/>
               <a:pathLst>
-                <a:path w="1833535" h="0">
+                <a:path w="1745629" h="0">
                   <a:moveTo>
                     <a:pt x="0" y="0"/>
                   </a:moveTo>
                   <a:lnTo>
-                    <a:pt x="1833535" y="0"/>
+                    <a:pt x="1745629" y="0"/>
                   </a:lnTo>
                   <a:lnTo>
-                    <a:pt x="1833535" y="0"/>
+                    <a:pt x="1745629" y="0"/>
                   </a:lnTo>
                 </a:path>
               </a:pathLst>
@@ -2574,8 +2574,8 @@
           </p:nvSpPr>
           <p:spPr>
             <a:xfrm>
-              <a:off x="1913953" y="1297445"/>
-              <a:ext cx="343787" cy="1843626"/>
+              <a:off x="2063744" y="1459508"/>
+              <a:ext cx="327305" cy="1642599"/>
             </a:xfrm>
             <a:prstGeom prst="rect">
               <a:avLst/>
@@ -2600,8 +2600,8 @@
           </p:nvSpPr>
           <p:spPr>
             <a:xfrm>
-              <a:off x="2486933" y="1637197"/>
-              <a:ext cx="343787" cy="1503874"/>
+              <a:off x="2609253" y="1762214"/>
+              <a:ext cx="327305" cy="1339893"/>
             </a:xfrm>
             <a:prstGeom prst="rect">
               <a:avLst/>
@@ -2626,8 +2626,8 @@
           </p:nvSpPr>
           <p:spPr>
             <a:xfrm>
-              <a:off x="3059913" y="1513439"/>
-              <a:ext cx="343787" cy="1627631"/>
+              <a:off x="3154763" y="1651951"/>
+              <a:ext cx="327305" cy="1450157"/>
             </a:xfrm>
             <a:prstGeom prst="rect">
               <a:avLst/>
@@ -2652,7 +2652,7 @@
           </p:nvSpPr>
           <p:spPr>
             <a:xfrm>
-              <a:off x="1947818" y="1210170"/>
+              <a:off x="2089368" y="1372233"/>
               <a:ext cx="276057" cy="64648"/>
             </a:xfrm>
             <a:prstGeom prst="rect">
@@ -2695,7 +2695,7 @@
           </p:nvSpPr>
           <p:spPr>
             <a:xfrm>
-              <a:off x="2520798" y="1549922"/>
+              <a:off x="2634878" y="1674939"/>
               <a:ext cx="276057" cy="64648"/>
             </a:xfrm>
             <a:prstGeom prst="rect">
@@ -2738,7 +2738,7 @@
           </p:nvSpPr>
           <p:spPr>
             <a:xfrm>
-              <a:off x="3093778" y="1426164"/>
+              <a:off x="3180387" y="1564676"/>
               <a:ext cx="276057" cy="64648"/>
             </a:xfrm>
             <a:prstGeom prst="rect">
@@ -2781,8 +2781,8 @@
           </p:nvSpPr>
           <p:spPr>
             <a:xfrm>
-              <a:off x="3734523" y="965592"/>
-              <a:ext cx="1833535" cy="2175478"/>
+              <a:off x="3822430" y="1163840"/>
+              <a:ext cx="1745629" cy="1938267"/>
             </a:xfrm>
             <a:prstGeom prst="rect">
               <a:avLst/>
@@ -2807,21 +2807,21 @@
           </p:nvSpPr>
           <p:spPr>
             <a:xfrm>
-              <a:off x="3734523" y="3141071"/>
-              <a:ext cx="1833535" cy="0"/>
+              <a:off x="3822430" y="3102108"/>
+              <a:ext cx="1745629" cy="0"/>
             </a:xfrm>
             <a:custGeom>
               <a:avLst/>
               <a:pathLst>
-                <a:path w="1833535" h="0">
+                <a:path w="1745629" h="0">
                   <a:moveTo>
                     <a:pt x="0" y="0"/>
                   </a:moveTo>
                   <a:lnTo>
-                    <a:pt x="1833535" y="0"/>
+                    <a:pt x="1745629" y="0"/>
                   </a:lnTo>
                   <a:lnTo>
-                    <a:pt x="1833535" y="0"/>
+                    <a:pt x="1745629" y="0"/>
                   </a:lnTo>
                 </a:path>
               </a:pathLst>
@@ -2850,21 +2850,21 @@
           </p:nvSpPr>
           <p:spPr>
             <a:xfrm>
-              <a:off x="3734523" y="2483208"/>
-              <a:ext cx="1833535" cy="0"/>
+              <a:off x="3822430" y="2515977"/>
+              <a:ext cx="1745629" cy="0"/>
             </a:xfrm>
             <a:custGeom>
               <a:avLst/>
               <a:pathLst>
-                <a:path w="1833535" h="0">
+                <a:path w="1745629" h="0">
                   <a:moveTo>
                     <a:pt x="0" y="0"/>
                   </a:moveTo>
                   <a:lnTo>
-                    <a:pt x="1833535" y="0"/>
+                    <a:pt x="1745629" y="0"/>
                   </a:lnTo>
                   <a:lnTo>
-                    <a:pt x="1833535" y="0"/>
+                    <a:pt x="1745629" y="0"/>
                   </a:lnTo>
                 </a:path>
               </a:pathLst>
@@ -2893,21 +2893,21 @@
           </p:nvSpPr>
           <p:spPr>
             <a:xfrm>
-              <a:off x="3734523" y="1825344"/>
-              <a:ext cx="1833535" cy="0"/>
+              <a:off x="3822430" y="1929846"/>
+              <a:ext cx="1745629" cy="0"/>
             </a:xfrm>
             <a:custGeom>
               <a:avLst/>
               <a:pathLst>
-                <a:path w="1833535" h="0">
+                <a:path w="1745629" h="0">
                   <a:moveTo>
                     <a:pt x="0" y="0"/>
                   </a:moveTo>
                   <a:lnTo>
-                    <a:pt x="1833535" y="0"/>
+                    <a:pt x="1745629" y="0"/>
                   </a:lnTo>
                   <a:lnTo>
-                    <a:pt x="1833535" y="0"/>
+                    <a:pt x="1745629" y="0"/>
                   </a:lnTo>
                 </a:path>
               </a:pathLst>
@@ -2936,21 +2936,21 @@
           </p:nvSpPr>
           <p:spPr>
             <a:xfrm>
-              <a:off x="3734523" y="1167481"/>
-              <a:ext cx="1833535" cy="0"/>
+              <a:off x="3822430" y="1343715"/>
+              <a:ext cx="1745629" cy="0"/>
             </a:xfrm>
             <a:custGeom>
               <a:avLst/>
               <a:pathLst>
-                <a:path w="1833535" h="0">
+                <a:path w="1745629" h="0">
                   <a:moveTo>
                     <a:pt x="0" y="0"/>
                   </a:moveTo>
                   <a:lnTo>
-                    <a:pt x="1833535" y="0"/>
+                    <a:pt x="1745629" y="0"/>
                   </a:lnTo>
                   <a:lnTo>
-                    <a:pt x="1833535" y="0"/>
+                    <a:pt x="1745629" y="0"/>
                   </a:lnTo>
                 </a:path>
               </a:pathLst>
@@ -2979,8 +2979,8 @@
           </p:nvSpPr>
           <p:spPr>
             <a:xfrm>
-              <a:off x="3906417" y="1297445"/>
-              <a:ext cx="343787" cy="1843626"/>
+              <a:off x="3986083" y="1459508"/>
+              <a:ext cx="327305" cy="1642599"/>
             </a:xfrm>
             <a:prstGeom prst="rect">
               <a:avLst/>
@@ -3005,8 +3005,8 @@
           </p:nvSpPr>
           <p:spPr>
             <a:xfrm>
-              <a:off x="4479397" y="2734496"/>
-              <a:ext cx="343787" cy="406575"/>
+              <a:off x="4531592" y="2739865"/>
+              <a:ext cx="327305" cy="362243"/>
             </a:xfrm>
             <a:prstGeom prst="rect">
               <a:avLst/>
@@ -3031,8 +3031,8 @@
           </p:nvSpPr>
           <p:spPr>
             <a:xfrm>
-              <a:off x="5052377" y="2641912"/>
-              <a:ext cx="343787" cy="499158"/>
+              <a:off x="5077101" y="2657377"/>
+              <a:ext cx="327305" cy="444731"/>
             </a:xfrm>
             <a:prstGeom prst="rect">
               <a:avLst/>
@@ -3057,21 +3057,21 @@
           </p:nvSpPr>
           <p:spPr>
             <a:xfrm>
-              <a:off x="3734523" y="2812139"/>
-              <a:ext cx="1833535" cy="0"/>
+              <a:off x="3822430" y="2809043"/>
+              <a:ext cx="1745629" cy="0"/>
             </a:xfrm>
             <a:custGeom>
               <a:avLst/>
               <a:pathLst>
-                <a:path w="1833535" h="0">
+                <a:path w="1745629" h="0">
                   <a:moveTo>
                     <a:pt x="0" y="0"/>
                   </a:moveTo>
                   <a:lnTo>
-                    <a:pt x="1833535" y="0"/>
+                    <a:pt x="1745629" y="0"/>
                   </a:lnTo>
                   <a:lnTo>
-                    <a:pt x="1833535" y="0"/>
+                    <a:pt x="1745629" y="0"/>
                   </a:lnTo>
                 </a:path>
               </a:pathLst>
@@ -3100,7 +3100,7 @@
           </p:nvSpPr>
           <p:spPr>
             <a:xfrm>
-              <a:off x="3990483" y="1210170"/>
+              <a:off x="4061907" y="1372233"/>
               <a:ext cx="175656" cy="64648"/>
             </a:xfrm>
             <a:prstGeom prst="rect">
@@ -3143,7 +3143,7 @@
           </p:nvSpPr>
           <p:spPr>
             <a:xfrm>
-              <a:off x="4563463" y="2647221"/>
+              <a:off x="4607416" y="2652590"/>
               <a:ext cx="175656" cy="64648"/>
             </a:xfrm>
             <a:prstGeom prst="rect">
@@ -3186,7 +3186,7 @@
           </p:nvSpPr>
           <p:spPr>
             <a:xfrm>
-              <a:off x="5136443" y="2554637"/>
+              <a:off x="5152925" y="2570102"/>
               <a:ext cx="175656" cy="64648"/>
             </a:xfrm>
             <a:prstGeom prst="rect">
@@ -3229,15 +3229,15 @@
           </p:nvSpPr>
           <p:spPr>
             <a:xfrm>
-              <a:off x="3734523" y="965592"/>
-              <a:ext cx="0" cy="2175478"/>
+              <a:off x="3822430" y="1163840"/>
+              <a:ext cx="0" cy="1938267"/>
             </a:xfrm>
             <a:custGeom>
               <a:avLst/>
               <a:pathLst>
-                <a:path w="0" h="2175478">
+                <a:path w="0" h="1938267">
                   <a:moveTo>
-                    <a:pt x="0" y="2175478"/>
+                    <a:pt x="0" y="1938267"/>
                   </a:moveTo>
                   <a:lnTo>
                     <a:pt x="0" y="0"/>
@@ -3269,8 +3269,8 @@
           </p:nvSpPr>
           <p:spPr>
             <a:xfrm>
-              <a:off x="3632531" y="3108381"/>
-              <a:ext cx="50749" cy="65379"/>
+              <a:off x="3708984" y="3065715"/>
+              <a:ext cx="56509" cy="72786"/>
             </a:xfrm>
             <a:prstGeom prst="rect">
               <a:avLst/>
@@ -3290,7 +3290,7 @@
                 </a:spcAft>
               </a:pPr>
               <a:r>
-                <a:rPr sz="720" i="0" b="0">
+                <a:rPr sz="800" i="0" b="0">
                   <a:solidFill>
                     <a:srgbClr val="262626">
                       <a:alpha val="100000"/>
@@ -3312,8 +3312,8 @@
           </p:nvSpPr>
           <p:spPr>
             <a:xfrm>
-              <a:off x="3632531" y="2450518"/>
-              <a:ext cx="50749" cy="65379"/>
+              <a:off x="3708984" y="2479584"/>
+              <a:ext cx="56509" cy="72786"/>
             </a:xfrm>
             <a:prstGeom prst="rect">
               <a:avLst/>
@@ -3333,7 +3333,7 @@
                 </a:spcAft>
               </a:pPr>
               <a:r>
-                <a:rPr sz="720" i="0" b="0">
+                <a:rPr sz="800" i="0" b="0">
                   <a:solidFill>
                     <a:srgbClr val="262626">
                       <a:alpha val="100000"/>
@@ -3355,8 +3355,8 @@
           </p:nvSpPr>
           <p:spPr>
             <a:xfrm>
-              <a:off x="3632531" y="1792655"/>
-              <a:ext cx="50749" cy="65379"/>
+              <a:off x="3708984" y="1893453"/>
+              <a:ext cx="56509" cy="72786"/>
             </a:xfrm>
             <a:prstGeom prst="rect">
               <a:avLst/>
@@ -3376,7 +3376,7 @@
                 </a:spcAft>
               </a:pPr>
               <a:r>
-                <a:rPr sz="720" i="0" b="0">
+                <a:rPr sz="800" i="0" b="0">
                   <a:solidFill>
                     <a:srgbClr val="262626">
                       <a:alpha val="100000"/>
@@ -3398,8 +3398,8 @@
           </p:nvSpPr>
           <p:spPr>
             <a:xfrm>
-              <a:off x="3632531" y="1134791"/>
-              <a:ext cx="50749" cy="65379"/>
+              <a:off x="3708984" y="1307322"/>
+              <a:ext cx="56509" cy="72786"/>
             </a:xfrm>
             <a:prstGeom prst="rect">
               <a:avLst/>
@@ -3419,7 +3419,7 @@
                 </a:spcAft>
               </a:pPr>
               <a:r>
-                <a:rPr sz="720" i="0" b="0">
+                <a:rPr sz="800" i="0" b="0">
                   <a:solidFill>
                     <a:srgbClr val="262626">
                       <a:alpha val="100000"/>
@@ -3441,18 +3441,18 @@
           </p:nvSpPr>
           <p:spPr>
             <a:xfrm>
-              <a:off x="3706055" y="3141071"/>
-              <a:ext cx="28468" cy="0"/>
+              <a:off x="3790799" y="3102108"/>
+              <a:ext cx="31631" cy="0"/>
             </a:xfrm>
             <a:custGeom>
               <a:avLst/>
               <a:pathLst>
-                <a:path w="28468" h="0">
+                <a:path w="31631" h="0">
                   <a:moveTo>
                     <a:pt x="0" y="0"/>
                   </a:moveTo>
                   <a:lnTo>
-                    <a:pt x="28468" y="0"/>
+                    <a:pt x="31631" y="0"/>
                   </a:lnTo>
                 </a:path>
               </a:pathLst>
@@ -3481,18 +3481,18 @@
           </p:nvSpPr>
           <p:spPr>
             <a:xfrm>
-              <a:off x="3706055" y="2483208"/>
-              <a:ext cx="28468" cy="0"/>
+              <a:off x="3790799" y="2515977"/>
+              <a:ext cx="31631" cy="0"/>
             </a:xfrm>
             <a:custGeom>
               <a:avLst/>
               <a:pathLst>
-                <a:path w="28468" h="0">
+                <a:path w="31631" h="0">
                   <a:moveTo>
                     <a:pt x="0" y="0"/>
                   </a:moveTo>
                   <a:lnTo>
-                    <a:pt x="28468" y="0"/>
+                    <a:pt x="31631" y="0"/>
                   </a:lnTo>
                 </a:path>
               </a:pathLst>
@@ -3521,18 +3521,18 @@
           </p:nvSpPr>
           <p:spPr>
             <a:xfrm>
-              <a:off x="3706055" y="1825344"/>
-              <a:ext cx="28468" cy="0"/>
+              <a:off x="3790799" y="1929846"/>
+              <a:ext cx="31631" cy="0"/>
             </a:xfrm>
             <a:custGeom>
               <a:avLst/>
               <a:pathLst>
-                <a:path w="28468" h="0">
+                <a:path w="31631" h="0">
                   <a:moveTo>
                     <a:pt x="0" y="0"/>
                   </a:moveTo>
                   <a:lnTo>
-                    <a:pt x="28468" y="0"/>
+                    <a:pt x="31631" y="0"/>
                   </a:lnTo>
                 </a:path>
               </a:pathLst>
@@ -3561,18 +3561,18 @@
           </p:nvSpPr>
           <p:spPr>
             <a:xfrm>
-              <a:off x="3706055" y="1167481"/>
-              <a:ext cx="28468" cy="0"/>
+              <a:off x="3790799" y="1343715"/>
+              <a:ext cx="31631" cy="0"/>
             </a:xfrm>
             <a:custGeom>
               <a:avLst/>
               <a:pathLst>
-                <a:path w="28468" h="0">
+                <a:path w="31631" h="0">
                   <a:moveTo>
                     <a:pt x="0" y="0"/>
                   </a:moveTo>
                   <a:lnTo>
-                    <a:pt x="28468" y="0"/>
+                    <a:pt x="31631" y="0"/>
                   </a:lnTo>
                 </a:path>
               </a:pathLst>
@@ -3601,8 +3601,8 @@
           </p:nvSpPr>
           <p:spPr>
             <a:xfrm>
-              <a:off x="1787608" y="826225"/>
-              <a:ext cx="1142908" cy="81838"/>
+              <a:off x="1950702" y="1008897"/>
+              <a:ext cx="1270741" cy="90982"/>
             </a:xfrm>
             <a:prstGeom prst="rect">
               <a:avLst/>
@@ -3622,7 +3622,7 @@
                 </a:spcAft>
               </a:pPr>
               <a:r>
-                <a:rPr sz="900" i="0" b="1">
+                <a:rPr sz="1000" i="0" b="1">
                   <a:solidFill>
                     <a:srgbClr val="1A1A1A">
                       <a:alpha val="100000"/>
@@ -3644,8 +3644,8 @@
           </p:nvSpPr>
           <p:spPr>
             <a:xfrm>
-              <a:off x="3780072" y="826225"/>
-              <a:ext cx="1181221" cy="81838"/>
+              <a:off x="3873040" y="1008897"/>
+              <a:ext cx="1313169" cy="90982"/>
             </a:xfrm>
             <a:prstGeom prst="rect">
               <a:avLst/>
@@ -3665,7 +3665,7 @@
                 </a:spcAft>
               </a:pPr>
               <a:r>
-                <a:rPr sz="900" i="0" b="1">
+                <a:rPr sz="1000" i="0" b="1">
                   <a:solidFill>
                     <a:srgbClr val="1A1A1A">
                       <a:alpha val="100000"/>
@@ -3687,18 +3687,18 @@
           </p:nvSpPr>
           <p:spPr>
             <a:xfrm>
-              <a:off x="1742059" y="3141071"/>
-              <a:ext cx="1833535" cy="0"/>
+              <a:off x="1900092" y="3102108"/>
+              <a:ext cx="1745629" cy="0"/>
             </a:xfrm>
             <a:custGeom>
               <a:avLst/>
               <a:pathLst>
-                <a:path w="1833535" h="0">
+                <a:path w="1745629" h="0">
                   <a:moveTo>
                     <a:pt x="0" y="0"/>
                   </a:moveTo>
                   <a:lnTo>
-                    <a:pt x="1833535" y="0"/>
+                    <a:pt x="1745629" y="0"/>
                   </a:lnTo>
                 </a:path>
               </a:pathLst>
@@ -3727,15 +3727,15 @@
           </p:nvSpPr>
           <p:spPr>
             <a:xfrm>
-              <a:off x="2085847" y="3141071"/>
-              <a:ext cx="0" cy="28468"/>
+              <a:off x="2227397" y="3102108"/>
+              <a:ext cx="0" cy="31631"/>
             </a:xfrm>
             <a:custGeom>
               <a:avLst/>
               <a:pathLst>
-                <a:path w="0" h="28468">
+                <a:path w="0" h="31631">
                   <a:moveTo>
-                    <a:pt x="0" y="28468"/>
+                    <a:pt x="0" y="31631"/>
                   </a:moveTo>
                   <a:lnTo>
                     <a:pt x="0" y="0"/>
@@ -3767,15 +3767,15 @@
           </p:nvSpPr>
           <p:spPr>
             <a:xfrm>
-              <a:off x="2658827" y="3141071"/>
-              <a:ext cx="0" cy="28468"/>
+              <a:off x="2772906" y="3102108"/>
+              <a:ext cx="0" cy="31631"/>
             </a:xfrm>
             <a:custGeom>
               <a:avLst/>
               <a:pathLst>
-                <a:path w="0" h="28468">
+                <a:path w="0" h="31631">
                   <a:moveTo>
-                    <a:pt x="0" y="28468"/>
+                    <a:pt x="0" y="31631"/>
                   </a:moveTo>
                   <a:lnTo>
                     <a:pt x="0" y="0"/>
@@ -3807,15 +3807,15 @@
           </p:nvSpPr>
           <p:spPr>
             <a:xfrm>
-              <a:off x="3231807" y="3141071"/>
-              <a:ext cx="0" cy="28468"/>
+              <a:off x="3318415" y="3102108"/>
+              <a:ext cx="0" cy="31631"/>
             </a:xfrm>
             <a:custGeom>
               <a:avLst/>
               <a:pathLst>
-                <a:path w="0" h="28468">
+                <a:path w="0" h="31631">
                   <a:moveTo>
-                    <a:pt x="0" y="28468"/>
+                    <a:pt x="0" y="31631"/>
                   </a:moveTo>
                   <a:lnTo>
                     <a:pt x="0" y="0"/>
@@ -3847,7 +3847,7 @@
           </p:nvSpPr>
           <p:spPr>
             <a:xfrm rot="-960000">
-              <a:off x="1513115" y="3272806"/>
+              <a:off x="1654665" y="3239537"/>
               <a:ext cx="592988" cy="63642"/>
             </a:xfrm>
             <a:prstGeom prst="rect">
@@ -3890,7 +3890,7 @@
           </p:nvSpPr>
           <p:spPr>
             <a:xfrm rot="-960000">
-              <a:off x="1703119" y="3326630"/>
+              <a:off x="1817199" y="3293360"/>
               <a:ext cx="983528" cy="63642"/>
             </a:xfrm>
             <a:prstGeom prst="rect">
@@ -3933,7 +3933,7 @@
           </p:nvSpPr>
           <p:spPr>
             <a:xfrm rot="-960000">
-              <a:off x="1649314" y="3414719"/>
+              <a:off x="1735922" y="3381449"/>
               <a:ext cx="1622694" cy="63642"/>
             </a:xfrm>
             <a:prstGeom prst="rect">
@@ -3976,18 +3976,18 @@
           </p:nvSpPr>
           <p:spPr>
             <a:xfrm>
-              <a:off x="3734523" y="3141071"/>
-              <a:ext cx="1833535" cy="0"/>
+              <a:off x="3822430" y="3102108"/>
+              <a:ext cx="1745629" cy="0"/>
             </a:xfrm>
             <a:custGeom>
               <a:avLst/>
               <a:pathLst>
-                <a:path w="1833535" h="0">
+                <a:path w="1745629" h="0">
                   <a:moveTo>
                     <a:pt x="0" y="0"/>
                   </a:moveTo>
                   <a:lnTo>
-                    <a:pt x="1833535" y="0"/>
+                    <a:pt x="1745629" y="0"/>
                   </a:lnTo>
                 </a:path>
               </a:pathLst>
@@ -4016,15 +4016,15 @@
           </p:nvSpPr>
           <p:spPr>
             <a:xfrm>
-              <a:off x="4078311" y="3141071"/>
-              <a:ext cx="0" cy="28468"/>
+              <a:off x="4149735" y="3102108"/>
+              <a:ext cx="0" cy="31631"/>
             </a:xfrm>
             <a:custGeom>
               <a:avLst/>
               <a:pathLst>
-                <a:path w="0" h="28468">
+                <a:path w="0" h="31631">
                   <a:moveTo>
-                    <a:pt x="0" y="28468"/>
+                    <a:pt x="0" y="31631"/>
                   </a:moveTo>
                   <a:lnTo>
                     <a:pt x="0" y="0"/>
@@ -4056,15 +4056,15 @@
           </p:nvSpPr>
           <p:spPr>
             <a:xfrm>
-              <a:off x="4651291" y="3141071"/>
-              <a:ext cx="0" cy="28468"/>
+              <a:off x="4695245" y="3102108"/>
+              <a:ext cx="0" cy="31631"/>
             </a:xfrm>
             <a:custGeom>
               <a:avLst/>
               <a:pathLst>
-                <a:path w="0" h="28468">
+                <a:path w="0" h="31631">
                   <a:moveTo>
-                    <a:pt x="0" y="28468"/>
+                    <a:pt x="0" y="31631"/>
                   </a:moveTo>
                   <a:lnTo>
                     <a:pt x="0" y="0"/>
@@ -4096,15 +4096,15 @@
           </p:nvSpPr>
           <p:spPr>
             <a:xfrm>
-              <a:off x="5224271" y="3141071"/>
-              <a:ext cx="0" cy="28468"/>
+              <a:off x="5240754" y="3102108"/>
+              <a:ext cx="0" cy="31631"/>
             </a:xfrm>
             <a:custGeom>
               <a:avLst/>
               <a:pathLst>
-                <a:path w="0" h="28468">
+                <a:path w="0" h="31631">
                   <a:moveTo>
-                    <a:pt x="0" y="28468"/>
+                    <a:pt x="0" y="31631"/>
                   </a:moveTo>
                   <a:lnTo>
                     <a:pt x="0" y="0"/>
@@ -4136,7 +4136,7 @@
           </p:nvSpPr>
           <p:spPr>
             <a:xfrm rot="-960000">
-              <a:off x="3505580" y="3272806"/>
+              <a:off x="3577004" y="3239537"/>
               <a:ext cx="592988" cy="63642"/>
             </a:xfrm>
             <a:prstGeom prst="rect">
@@ -4179,7 +4179,7 @@
           </p:nvSpPr>
           <p:spPr>
             <a:xfrm rot="-960000">
-              <a:off x="3695584" y="3326630"/>
+              <a:off x="3739537" y="3293360"/>
               <a:ext cx="983528" cy="63642"/>
             </a:xfrm>
             <a:prstGeom prst="rect">
@@ -4222,7 +4222,7 @@
           </p:nvSpPr>
           <p:spPr>
             <a:xfrm rot="-960000">
-              <a:off x="3641778" y="3414719"/>
+              <a:off x="3658261" y="3381449"/>
               <a:ext cx="1622694" cy="63642"/>
             </a:xfrm>
             <a:prstGeom prst="rect">
@@ -4265,15 +4265,15 @@
           </p:nvSpPr>
           <p:spPr>
             <a:xfrm>
-              <a:off x="1742059" y="965592"/>
-              <a:ext cx="0" cy="2175478"/>
+              <a:off x="1900092" y="1163840"/>
+              <a:ext cx="0" cy="1938267"/>
             </a:xfrm>
             <a:custGeom>
               <a:avLst/>
               <a:pathLst>
-                <a:path w="0" h="2175478">
+                <a:path w="0" h="1938267">
                   <a:moveTo>
-                    <a:pt x="0" y="2175478"/>
+                    <a:pt x="0" y="1938267"/>
                   </a:moveTo>
                   <a:lnTo>
                     <a:pt x="0" y="0"/>
@@ -4305,8 +4305,8 @@
           </p:nvSpPr>
           <p:spPr>
             <a:xfrm>
-              <a:off x="1640067" y="3108381"/>
-              <a:ext cx="50749" cy="65379"/>
+              <a:off x="1786645" y="3065715"/>
+              <a:ext cx="56509" cy="72786"/>
             </a:xfrm>
             <a:prstGeom prst="rect">
               <a:avLst/>
@@ -4326,7 +4326,7 @@
                 </a:spcAft>
               </a:pPr>
               <a:r>
-                <a:rPr sz="720" i="0" b="0">
+                <a:rPr sz="800" i="0" b="0">
                   <a:solidFill>
                     <a:srgbClr val="262626">
                       <a:alpha val="100000"/>
@@ -4348,8 +4348,8 @@
           </p:nvSpPr>
           <p:spPr>
             <a:xfrm>
-              <a:off x="1538568" y="2498332"/>
-              <a:ext cx="152247" cy="65379"/>
+              <a:off x="1673625" y="2522185"/>
+              <a:ext cx="169529" cy="72786"/>
             </a:xfrm>
             <a:prstGeom prst="rect">
               <a:avLst/>
@@ -4369,7 +4369,7 @@
                 </a:spcAft>
               </a:pPr>
               <a:r>
-                <a:rPr sz="720" i="0" b="0">
+                <a:rPr sz="800" i="0" b="0">
                   <a:solidFill>
                     <a:srgbClr val="262626">
                       <a:alpha val="100000"/>
@@ -4391,8 +4391,8 @@
           </p:nvSpPr>
           <p:spPr>
             <a:xfrm>
-              <a:off x="1538568" y="1888283"/>
-              <a:ext cx="152247" cy="65379"/>
+              <a:off x="1673625" y="1978655"/>
+              <a:ext cx="169529" cy="72786"/>
             </a:xfrm>
             <a:prstGeom prst="rect">
               <a:avLst/>
@@ -4412,7 +4412,7 @@
                 </a:spcAft>
               </a:pPr>
               <a:r>
-                <a:rPr sz="720" i="0" b="0">
+                <a:rPr sz="800" i="0" b="0">
                   <a:solidFill>
                     <a:srgbClr val="262626">
                       <a:alpha val="100000"/>
@@ -4434,8 +4434,8 @@
           </p:nvSpPr>
           <p:spPr>
             <a:xfrm>
-              <a:off x="1538568" y="1278235"/>
-              <a:ext cx="152247" cy="65379"/>
+              <a:off x="1673625" y="1435125"/>
+              <a:ext cx="169529" cy="72786"/>
             </a:xfrm>
             <a:prstGeom prst="rect">
               <a:avLst/>
@@ -4455,7 +4455,7 @@
                 </a:spcAft>
               </a:pPr>
               <a:r>
-                <a:rPr sz="720" i="0" b="0">
+                <a:rPr sz="800" i="0" b="0">
                   <a:solidFill>
                     <a:srgbClr val="262626">
                       <a:alpha val="100000"/>
@@ -4477,18 +4477,18 @@
           </p:nvSpPr>
           <p:spPr>
             <a:xfrm>
-              <a:off x="1713591" y="3141071"/>
-              <a:ext cx="28468" cy="0"/>
+              <a:off x="1868460" y="3102108"/>
+              <a:ext cx="31631" cy="0"/>
             </a:xfrm>
             <a:custGeom>
               <a:avLst/>
               <a:pathLst>
-                <a:path w="28468" h="0">
+                <a:path w="31631" h="0">
                   <a:moveTo>
                     <a:pt x="0" y="0"/>
                   </a:moveTo>
                   <a:lnTo>
-                    <a:pt x="28468" y="0"/>
+                    <a:pt x="31631" y="0"/>
                   </a:lnTo>
                 </a:path>
               </a:pathLst>
@@ -4517,18 +4517,18 @@
           </p:nvSpPr>
           <p:spPr>
             <a:xfrm>
-              <a:off x="1713591" y="2531022"/>
-              <a:ext cx="28468" cy="0"/>
+              <a:off x="1868460" y="2558578"/>
+              <a:ext cx="31631" cy="0"/>
             </a:xfrm>
             <a:custGeom>
               <a:avLst/>
               <a:pathLst>
-                <a:path w="28468" h="0">
+                <a:path w="31631" h="0">
                   <a:moveTo>
                     <a:pt x="0" y="0"/>
                   </a:moveTo>
                   <a:lnTo>
-                    <a:pt x="28468" y="0"/>
+                    <a:pt x="31631" y="0"/>
                   </a:lnTo>
                 </a:path>
               </a:pathLst>
@@ -4557,18 +4557,18 @@
           </p:nvSpPr>
           <p:spPr>
             <a:xfrm>
-              <a:off x="1713591" y="1920973"/>
-              <a:ext cx="28468" cy="0"/>
+              <a:off x="1868460" y="2015048"/>
+              <a:ext cx="31631" cy="0"/>
             </a:xfrm>
             <a:custGeom>
               <a:avLst/>
               <a:pathLst>
-                <a:path w="28468" h="0">
+                <a:path w="31631" h="0">
                   <a:moveTo>
                     <a:pt x="0" y="0"/>
                   </a:moveTo>
                   <a:lnTo>
-                    <a:pt x="28468" y="0"/>
+                    <a:pt x="31631" y="0"/>
                   </a:lnTo>
                 </a:path>
               </a:pathLst>
@@ -4597,18 +4597,18 @@
           </p:nvSpPr>
           <p:spPr>
             <a:xfrm>
-              <a:off x="1713591" y="1310924"/>
-              <a:ext cx="28468" cy="0"/>
+              <a:off x="1868460" y="1471518"/>
+              <a:ext cx="31631" cy="0"/>
             </a:xfrm>
             <a:custGeom>
               <a:avLst/>
               <a:pathLst>
-                <a:path w="28468" h="0">
+                <a:path w="31631" h="0">
                   <a:moveTo>
                     <a:pt x="0" y="0"/>
                   </a:moveTo>
                   <a:lnTo>
-                    <a:pt x="28468" y="0"/>
+                    <a:pt x="31631" y="0"/>
                   </a:lnTo>
                 </a:path>
               </a:pathLst>
@@ -4637,8 +4637,8 @@
           </p:nvSpPr>
           <p:spPr>
             <a:xfrm>
-              <a:off x="1742059" y="615475"/>
-              <a:ext cx="4093494" cy="74432"/>
+              <a:off x="1900092" y="773500"/>
+              <a:ext cx="4596231" cy="83576"/>
             </a:xfrm>
             <a:prstGeom prst="rect">
               <a:avLst/>
@@ -4658,7 +4658,7 @@
                 </a:spcAft>
               </a:pPr>
               <a:r>
-                <a:rPr sz="819" i="0" b="0">
+                <a:rPr sz="919" i="0" b="0">
                   <a:solidFill>
                     <a:srgbClr val="4D4D4D">
                       <a:alpha val="100000"/>
@@ -4680,8 +4680,8 @@
           </p:nvSpPr>
           <p:spPr>
             <a:xfrm>
-              <a:off x="1742059" y="328384"/>
-              <a:ext cx="2675351" cy="90982"/>
+              <a:off x="1900092" y="328384"/>
+              <a:ext cx="2943270" cy="100035"/>
             </a:xfrm>
             <a:prstGeom prst="rect">
               <a:avLst/>
@@ -4701,7 +4701,7 @@
                 </a:spcAft>
               </a:pPr>
               <a:r>
-                <a:rPr sz="1000" i="0" b="1">
+                <a:rPr sz="1100" i="0" b="1">
                   <a:solidFill>
                     <a:srgbClr val="000000">
                       <a:alpha val="100000"/>
@@ -4723,8 +4723,8 @@
           </p:nvSpPr>
           <p:spPr>
             <a:xfrm>
-              <a:off x="337378" y="331787"/>
-              <a:ext cx="84764" cy="109179"/>
+              <a:off x="333858" y="327367"/>
+              <a:ext cx="91805" cy="118231"/>
             </a:xfrm>
             <a:prstGeom prst="rect">
               <a:avLst/>
@@ -4744,7 +4744,7 @@
                 </a:spcAft>
               </a:pPr>
               <a:r>
-                <a:rPr sz="1200" i="0" b="1">
+                <a:rPr sz="1300" i="0" b="1">
                   <a:solidFill>
                     <a:srgbClr val="000000">
                       <a:alpha val="100000"/>
@@ -4766,8 +4766,8 @@
           </p:nvSpPr>
           <p:spPr>
             <a:xfrm>
-              <a:off x="7158870" y="965592"/>
-              <a:ext cx="1884531" cy="2175478"/>
+              <a:off x="7316903" y="1163840"/>
+              <a:ext cx="1802352" cy="1938267"/>
             </a:xfrm>
             <a:prstGeom prst="rect">
               <a:avLst/>
@@ -4792,15 +4792,15 @@
           </p:nvSpPr>
           <p:spPr>
             <a:xfrm>
-              <a:off x="8304897" y="965592"/>
-              <a:ext cx="0" cy="2175478"/>
+              <a:off x="8412955" y="1163840"/>
+              <a:ext cx="0" cy="1938267"/>
             </a:xfrm>
             <a:custGeom>
               <a:avLst/>
               <a:pathLst>
-                <a:path w="0" h="2175478">
+                <a:path w="0" h="1938267">
                   <a:moveTo>
-                    <a:pt x="0" y="2175478"/>
+                    <a:pt x="0" y="1938267"/>
                   </a:moveTo>
                   <a:lnTo>
                     <a:pt x="0" y="0"/>
@@ -4835,18 +4835,18 @@
           </p:nvSpPr>
           <p:spPr>
             <a:xfrm>
-              <a:off x="7868218" y="2930541"/>
-              <a:ext cx="646324" cy="0"/>
+              <a:off x="7995318" y="2914534"/>
+              <a:ext cx="618140" cy="0"/>
             </a:xfrm>
             <a:custGeom>
               <a:avLst/>
               <a:pathLst>
-                <a:path w="646324" h="0">
+                <a:path w="618140" h="0">
                   <a:moveTo>
                     <a:pt x="0" y="0"/>
                   </a:moveTo>
                   <a:lnTo>
-                    <a:pt x="646324" y="0"/>
+                    <a:pt x="618140" y="0"/>
                   </a:lnTo>
                 </a:path>
               </a:pathLst>
@@ -4875,18 +4875,18 @@
           </p:nvSpPr>
           <p:spPr>
             <a:xfrm>
-              <a:off x="7780394" y="2579657"/>
-              <a:ext cx="852610" cy="0"/>
+              <a:off x="7911324" y="2601910"/>
+              <a:ext cx="815430" cy="0"/>
             </a:xfrm>
             <a:custGeom>
               <a:avLst/>
               <a:pathLst>
-                <a:path w="852610" h="0">
+                <a:path w="815430" h="0">
                   <a:moveTo>
                     <a:pt x="0" y="0"/>
                   </a:moveTo>
                   <a:lnTo>
-                    <a:pt x="852610" y="0"/>
+                    <a:pt x="815430" y="0"/>
                   </a:lnTo>
                 </a:path>
               </a:pathLst>
@@ -4915,18 +4915,18 @@
           </p:nvSpPr>
           <p:spPr>
             <a:xfrm>
-              <a:off x="8325349" y="1176122"/>
-              <a:ext cx="570461" cy="0"/>
+              <a:off x="8432514" y="1351414"/>
+              <a:ext cx="545585" cy="0"/>
             </a:xfrm>
             <a:custGeom>
               <a:avLst/>
               <a:pathLst>
-                <a:path w="570461" h="0">
+                <a:path w="545585" h="0">
                   <a:moveTo>
                     <a:pt x="0" y="0"/>
                   </a:moveTo>
                   <a:lnTo>
-                    <a:pt x="570461" y="0"/>
+                    <a:pt x="545585" y="0"/>
                   </a:lnTo>
                 </a:path>
               </a:pathLst>
@@ -4955,18 +4955,18 @@
           </p:nvSpPr>
           <p:spPr>
             <a:xfrm>
-              <a:off x="8031476" y="1877890"/>
-              <a:ext cx="784227" cy="0"/>
+              <a:off x="8151457" y="1976662"/>
+              <a:ext cx="750029" cy="0"/>
             </a:xfrm>
             <a:custGeom>
               <a:avLst/>
               <a:pathLst>
-                <a:path w="784227" h="0">
+                <a:path w="750029" h="0">
                   <a:moveTo>
                     <a:pt x="0" y="0"/>
                   </a:moveTo>
                   <a:lnTo>
-                    <a:pt x="784227" y="0"/>
+                    <a:pt x="750029" y="0"/>
                   </a:lnTo>
                 </a:path>
               </a:pathLst>
@@ -4995,18 +4995,18 @@
           </p:nvSpPr>
           <p:spPr>
             <a:xfrm>
-              <a:off x="8224538" y="1527006"/>
-              <a:ext cx="574103" cy="0"/>
+              <a:off x="8336100" y="1664038"/>
+              <a:ext cx="549068" cy="0"/>
             </a:xfrm>
             <a:custGeom>
               <a:avLst/>
               <a:pathLst>
-                <a:path w="574103" h="0">
+                <a:path w="549068" h="0">
                   <a:moveTo>
                     <a:pt x="0" y="0"/>
                   </a:moveTo>
                   <a:lnTo>
-                    <a:pt x="574103" y="0"/>
+                    <a:pt x="549068" y="0"/>
                   </a:lnTo>
                 </a:path>
               </a:pathLst>
@@ -5035,18 +5035,18 @@
           </p:nvSpPr>
           <p:spPr>
             <a:xfrm>
-              <a:off x="8071937" y="2228773"/>
-              <a:ext cx="446121" cy="0"/>
+              <a:off x="8190153" y="2289286"/>
+              <a:ext cx="426666" cy="0"/>
             </a:xfrm>
             <a:custGeom>
               <a:avLst/>
               <a:pathLst>
-                <a:path w="446121" h="0">
+                <a:path w="426666" h="0">
                   <a:moveTo>
                     <a:pt x="0" y="0"/>
                   </a:moveTo>
                   <a:lnTo>
-                    <a:pt x="446121" y="0"/>
+                    <a:pt x="426666" y="0"/>
                   </a:lnTo>
                 </a:path>
               </a:pathLst>
@@ -5075,8 +5075,8 @@
           </p:nvSpPr>
           <p:spPr>
             <a:xfrm>
-              <a:off x="8160597" y="2899758"/>
-              <a:ext cx="61566" cy="61566"/>
+              <a:off x="8273196" y="2883342"/>
+              <a:ext cx="62384" cy="62384"/>
             </a:xfrm>
             <a:prstGeom prst="ellipse">
               <a:avLst/>
@@ -5086,7 +5086,7 @@
                 <a:alpha val="100000"/>
               </a:srgbClr>
             </a:solidFill>
-            <a:ln w="7363" cap="rnd">
+            <a:ln w="8181" cap="rnd">
               <a:solidFill>
                 <a:srgbClr val="999999">
                   <a:alpha val="100000"/>
@@ -5110,8 +5110,8 @@
           </p:nvSpPr>
           <p:spPr>
             <a:xfrm>
-              <a:off x="8175916" y="2548874"/>
-              <a:ext cx="61566" cy="61566"/>
+              <a:off x="8287847" y="2570718"/>
+              <a:ext cx="62384" cy="62384"/>
             </a:xfrm>
             <a:prstGeom prst="ellipse">
               <a:avLst/>
@@ -5121,7 +5121,7 @@
                 <a:alpha val="100000"/>
               </a:srgbClr>
             </a:solidFill>
-            <a:ln w="7363" cap="rnd">
+            <a:ln w="8181" cap="rnd">
               <a:solidFill>
                 <a:srgbClr val="999999">
                   <a:alpha val="100000"/>
@@ -5145,8 +5145,8 @@
           </p:nvSpPr>
           <p:spPr>
             <a:xfrm>
-              <a:off x="8579796" y="1145339"/>
-              <a:ext cx="61566" cy="61566"/>
+              <a:off x="8674115" y="1320222"/>
+              <a:ext cx="62384" cy="62384"/>
             </a:xfrm>
             <a:prstGeom prst="ellipse">
               <a:avLst/>
@@ -5156,7 +5156,7 @@
                 <a:alpha val="100000"/>
               </a:srgbClr>
             </a:solidFill>
-            <a:ln w="7363" cap="rnd">
+            <a:ln w="8181" cap="rnd">
               <a:solidFill>
                 <a:srgbClr val="D55E00">
                   <a:alpha val="100000"/>
@@ -5180,8 +5180,8 @@
           </p:nvSpPr>
           <p:spPr>
             <a:xfrm>
-              <a:off x="8392806" y="1847107"/>
-              <a:ext cx="61566" cy="61566"/>
+              <a:off x="8495279" y="1945470"/>
+              <a:ext cx="62384" cy="62384"/>
             </a:xfrm>
             <a:prstGeom prst="ellipse">
               <a:avLst/>
@@ -5191,7 +5191,7 @@
                 <a:alpha val="100000"/>
               </a:srgbClr>
             </a:solidFill>
-            <a:ln w="7363" cap="rnd">
+            <a:ln w="8181" cap="rnd">
               <a:solidFill>
                 <a:srgbClr val="999999">
                   <a:alpha val="100000"/>
@@ -5215,8 +5215,8 @@
           </p:nvSpPr>
           <p:spPr>
             <a:xfrm>
-              <a:off x="8480807" y="1496223"/>
-              <a:ext cx="61566" cy="61566"/>
+              <a:off x="8579442" y="1632846"/>
+              <a:ext cx="62384" cy="62384"/>
             </a:xfrm>
             <a:prstGeom prst="ellipse">
               <a:avLst/>
@@ -5226,7 +5226,7 @@
                 <a:alpha val="100000"/>
               </a:srgbClr>
             </a:solidFill>
-            <a:ln w="7363" cap="rnd">
+            <a:ln w="8181" cap="rnd">
               <a:solidFill>
                 <a:srgbClr val="999999">
                   <a:alpha val="100000"/>
@@ -5250,8 +5250,8 @@
           </p:nvSpPr>
           <p:spPr>
             <a:xfrm>
-              <a:off x="8264214" y="2197990"/>
-              <a:ext cx="61566" cy="61566"/>
+              <a:off x="8372294" y="2258094"/>
+              <a:ext cx="62384" cy="62384"/>
             </a:xfrm>
             <a:prstGeom prst="ellipse">
               <a:avLst/>
@@ -5261,7 +5261,7 @@
                 <a:alpha val="100000"/>
               </a:srgbClr>
             </a:solidFill>
-            <a:ln w="7363" cap="rnd">
+            <a:ln w="8181" cap="rnd">
               <a:solidFill>
                 <a:srgbClr val="999999">
                   <a:alpha val="100000"/>
@@ -5285,7 +5285,7 @@
           </p:nvSpPr>
           <p:spPr>
             <a:xfrm>
-              <a:off x="8114113" y="2819633"/>
+              <a:off x="8227121" y="2803626"/>
               <a:ext cx="154533" cy="56875"/>
             </a:xfrm>
             <a:prstGeom prst="rect">
@@ -5328,7 +5328,7 @@
           </p:nvSpPr>
           <p:spPr>
             <a:xfrm>
-              <a:off x="8129433" y="2468750"/>
+              <a:off x="8241772" y="2491002"/>
               <a:ext cx="154533" cy="56875"/>
             </a:xfrm>
             <a:prstGeom prst="rect">
@@ -5371,7 +5371,7 @@
           </p:nvSpPr>
           <p:spPr>
             <a:xfrm>
-              <a:off x="8533313" y="1065215"/>
+              <a:off x="8628040" y="1240507"/>
               <a:ext cx="154533" cy="56875"/>
             </a:xfrm>
             <a:prstGeom prst="rect">
@@ -5414,7 +5414,7 @@
           </p:nvSpPr>
           <p:spPr>
             <a:xfrm>
-              <a:off x="8346323" y="1766982"/>
+              <a:off x="8449204" y="1865755"/>
               <a:ext cx="154533" cy="56875"/>
             </a:xfrm>
             <a:prstGeom prst="rect">
@@ -5457,7 +5457,7 @@
           </p:nvSpPr>
           <p:spPr>
             <a:xfrm>
-              <a:off x="8434323" y="1416098"/>
+              <a:off x="8533368" y="1553131"/>
               <a:ext cx="154533" cy="56875"/>
             </a:xfrm>
             <a:prstGeom prst="rect">
@@ -5500,7 +5500,7 @@
           </p:nvSpPr>
           <p:spPr>
             <a:xfrm>
-              <a:off x="8217730" y="2117866"/>
+              <a:off x="8326220" y="2178378"/>
               <a:ext cx="154533" cy="56875"/>
             </a:xfrm>
             <a:prstGeom prst="rect">
@@ -5543,8 +5543,8 @@
           </p:nvSpPr>
           <p:spPr>
             <a:xfrm>
-              <a:off x="9100338" y="965592"/>
-              <a:ext cx="1884531" cy="2175478"/>
+              <a:off x="9182518" y="1163840"/>
+              <a:ext cx="1802352" cy="1938267"/>
             </a:xfrm>
             <a:prstGeom prst="rect">
               <a:avLst/>
@@ -5569,15 +5569,15 @@
           </p:nvSpPr>
           <p:spPr>
             <a:xfrm>
-              <a:off x="10246365" y="965592"/>
-              <a:ext cx="0" cy="2175478"/>
+              <a:off x="10278570" y="1163840"/>
+              <a:ext cx="0" cy="1938267"/>
             </a:xfrm>
             <a:custGeom>
               <a:avLst/>
               <a:pathLst>
-                <a:path w="0" h="2175478">
+                <a:path w="0" h="1938267">
                   <a:moveTo>
-                    <a:pt x="0" y="2175478"/>
+                    <a:pt x="0" y="1938267"/>
                   </a:moveTo>
                   <a:lnTo>
                     <a:pt x="0" y="0"/>
@@ -5612,18 +5612,18 @@
           </p:nvSpPr>
           <p:spPr>
             <a:xfrm>
-              <a:off x="9399762" y="2930541"/>
-              <a:ext cx="798670" cy="0"/>
+              <a:off x="9468884" y="2914534"/>
+              <a:ext cx="763842" cy="0"/>
             </a:xfrm>
             <a:custGeom>
               <a:avLst/>
               <a:pathLst>
-                <a:path w="798670" h="0">
+                <a:path w="763842" h="0">
                   <a:moveTo>
                     <a:pt x="0" y="0"/>
                   </a:moveTo>
                   <a:lnTo>
-                    <a:pt x="798670" y="0"/>
+                    <a:pt x="763842" y="0"/>
                   </a:lnTo>
                 </a:path>
               </a:pathLst>
@@ -5652,18 +5652,18 @@
           </p:nvSpPr>
           <p:spPr>
             <a:xfrm>
-              <a:off x="9717024" y="1176122"/>
-              <a:ext cx="762610" cy="0"/>
+              <a:off x="9772311" y="1351414"/>
+              <a:ext cx="729355" cy="0"/>
             </a:xfrm>
             <a:custGeom>
               <a:avLst/>
               <a:pathLst>
-                <a:path w="762610" h="0">
+                <a:path w="729355" h="0">
                   <a:moveTo>
                     <a:pt x="0" y="0"/>
                   </a:moveTo>
                   <a:lnTo>
-                    <a:pt x="762610" y="0"/>
+                    <a:pt x="729355" y="0"/>
                   </a:lnTo>
                 </a:path>
               </a:pathLst>
@@ -5692,18 +5692,18 @@
           </p:nvSpPr>
           <p:spPr>
             <a:xfrm>
-              <a:off x="9185999" y="1877890"/>
-              <a:ext cx="837501" cy="0"/>
+              <a:off x="9264443" y="1976662"/>
+              <a:ext cx="800980" cy="0"/>
             </a:xfrm>
             <a:custGeom>
               <a:avLst/>
               <a:pathLst>
-                <a:path w="837501" h="0">
+                <a:path w="800980" h="0">
                   <a:moveTo>
                     <a:pt x="0" y="0"/>
                   </a:moveTo>
                   <a:lnTo>
-                    <a:pt x="837501" y="0"/>
+                    <a:pt x="800980" y="0"/>
                   </a:lnTo>
                 </a:path>
               </a:pathLst>
@@ -5732,18 +5732,18 @@
           </p:nvSpPr>
           <p:spPr>
             <a:xfrm>
-              <a:off x="10073328" y="1527006"/>
-              <a:ext cx="825881" cy="0"/>
+              <a:off x="10113078" y="1664038"/>
+              <a:ext cx="789867" cy="0"/>
             </a:xfrm>
             <a:custGeom>
               <a:avLst/>
               <a:pathLst>
-                <a:path w="825881" h="0">
+                <a:path w="789867" h="0">
                   <a:moveTo>
                     <a:pt x="0" y="0"/>
                   </a:moveTo>
                   <a:lnTo>
-                    <a:pt x="825881" y="0"/>
+                    <a:pt x="789867" y="0"/>
                   </a:lnTo>
                 </a:path>
               </a:pathLst>
@@ -5772,18 +5772,18 @@
           </p:nvSpPr>
           <p:spPr>
             <a:xfrm>
-              <a:off x="9964295" y="2228773"/>
-              <a:ext cx="644994" cy="0"/>
+              <a:off x="10008800" y="2289286"/>
+              <a:ext cx="616868" cy="0"/>
             </a:xfrm>
             <a:custGeom>
               <a:avLst/>
               <a:pathLst>
-                <a:path w="644994" h="0">
+                <a:path w="616868" h="0">
                   <a:moveTo>
                     <a:pt x="0" y="0"/>
                   </a:moveTo>
                   <a:lnTo>
-                    <a:pt x="644994" y="0"/>
+                    <a:pt x="616868" y="0"/>
                   </a:lnTo>
                 </a:path>
               </a:pathLst>
@@ -5812,8 +5812,8 @@
           </p:nvSpPr>
           <p:spPr>
             <a:xfrm>
-              <a:off x="9768314" y="2899758"/>
-              <a:ext cx="61566" cy="61566"/>
+              <a:off x="9819613" y="2883342"/>
+              <a:ext cx="62384" cy="62384"/>
             </a:xfrm>
             <a:prstGeom prst="ellipse">
               <a:avLst/>
@@ -5823,7 +5823,7 @@
                 <a:alpha val="100000"/>
               </a:srgbClr>
             </a:solidFill>
-            <a:ln w="7363" cap="rnd">
+            <a:ln w="8181" cap="rnd">
               <a:solidFill>
                 <a:srgbClr val="D55E00">
                   <a:alpha val="100000"/>
@@ -5847,8 +5847,8 @@
           </p:nvSpPr>
           <p:spPr>
             <a:xfrm>
-              <a:off x="10067546" y="1145339"/>
-              <a:ext cx="61566" cy="61566"/>
+              <a:off x="10105796" y="1320222"/>
+              <a:ext cx="62384" cy="62384"/>
             </a:xfrm>
             <a:prstGeom prst="ellipse">
               <a:avLst/>
@@ -5858,7 +5858,7 @@
                 <a:alpha val="100000"/>
               </a:srgbClr>
             </a:solidFill>
-            <a:ln w="7363" cap="rnd">
+            <a:ln w="8181" cap="rnd">
               <a:solidFill>
                 <a:srgbClr val="999999">
                   <a:alpha val="100000"/>
@@ -5882,8 +5882,8 @@
           </p:nvSpPr>
           <p:spPr>
             <a:xfrm>
-              <a:off x="9573966" y="1847107"/>
-              <a:ext cx="61566" cy="61566"/>
+              <a:off x="9633741" y="1945470"/>
+              <a:ext cx="62384" cy="62384"/>
             </a:xfrm>
             <a:prstGeom prst="ellipse">
               <a:avLst/>
@@ -5893,7 +5893,7 @@
                 <a:alpha val="100000"/>
               </a:srgbClr>
             </a:solidFill>
-            <a:ln w="7363" cap="rnd">
+            <a:ln w="8181" cap="rnd">
               <a:solidFill>
                 <a:srgbClr val="D55E00">
                   <a:alpha val="100000"/>
@@ -5917,8 +5917,8 @@
           </p:nvSpPr>
           <p:spPr>
             <a:xfrm>
-              <a:off x="10455486" y="1496223"/>
-              <a:ext cx="61566" cy="61566"/>
+              <a:off x="10476819" y="1632846"/>
+              <a:ext cx="62384" cy="62384"/>
             </a:xfrm>
             <a:prstGeom prst="ellipse">
               <a:avLst/>
@@ -5928,7 +5928,7 @@
                 <a:alpha val="100000"/>
               </a:srgbClr>
             </a:solidFill>
-            <a:ln w="7363" cap="rnd">
+            <a:ln w="8181" cap="rnd">
               <a:solidFill>
                 <a:srgbClr val="999999">
                   <a:alpha val="100000"/>
@@ -5952,8 +5952,8 @@
           </p:nvSpPr>
           <p:spPr>
             <a:xfrm>
-              <a:off x="10256009" y="2197990"/>
-              <a:ext cx="61566" cy="61566"/>
+              <a:off x="10286042" y="2258094"/>
+              <a:ext cx="62384" cy="62384"/>
             </a:xfrm>
             <a:prstGeom prst="ellipse">
               <a:avLst/>
@@ -5963,7 +5963,7 @@
                 <a:alpha val="100000"/>
               </a:srgbClr>
             </a:solidFill>
-            <a:ln w="7363" cap="rnd">
+            <a:ln w="8181" cap="rnd">
               <a:solidFill>
                 <a:srgbClr val="999999">
                   <a:alpha val="100000"/>
@@ -5987,7 +5987,7 @@
           </p:nvSpPr>
           <p:spPr>
             <a:xfrm>
-              <a:off x="9721830" y="2819633"/>
+              <a:off x="9773538" y="2803626"/>
               <a:ext cx="154533" cy="56875"/>
             </a:xfrm>
             <a:prstGeom prst="rect">
@@ -6030,7 +6030,7 @@
           </p:nvSpPr>
           <p:spPr>
             <a:xfrm>
-              <a:off x="10021062" y="1065215"/>
+              <a:off x="10059722" y="1240507"/>
               <a:ext cx="154533" cy="56875"/>
             </a:xfrm>
             <a:prstGeom prst="rect">
@@ -6073,7 +6073,7 @@
           </p:nvSpPr>
           <p:spPr>
             <a:xfrm>
-              <a:off x="9527483" y="1766982"/>
+              <a:off x="9587666" y="1865755"/>
               <a:ext cx="154533" cy="56875"/>
             </a:xfrm>
             <a:prstGeom prst="rect">
@@ -6116,7 +6116,7 @@
           </p:nvSpPr>
           <p:spPr>
             <a:xfrm>
-              <a:off x="10409002" y="1416098"/>
+              <a:off x="10430745" y="1553131"/>
               <a:ext cx="154533" cy="56875"/>
             </a:xfrm>
             <a:prstGeom prst="rect">
@@ -6159,7 +6159,7 @@
           </p:nvSpPr>
           <p:spPr>
             <a:xfrm>
-              <a:off x="10209526" y="2117866"/>
+              <a:off x="10239967" y="2178378"/>
               <a:ext cx="154533" cy="56875"/>
             </a:xfrm>
             <a:prstGeom prst="rect">
@@ -6202,8 +6202,8 @@
           </p:nvSpPr>
           <p:spPr>
             <a:xfrm>
-              <a:off x="7204419" y="826225"/>
-              <a:ext cx="393740" cy="81838"/>
+              <a:off x="7367513" y="1008897"/>
+              <a:ext cx="437357" cy="90982"/>
             </a:xfrm>
             <a:prstGeom prst="rect">
               <a:avLst/>
@@ -6223,7 +6223,7 @@
                 </a:spcAft>
               </a:pPr>
               <a:r>
-                <a:rPr sz="900" i="0" b="1">
+                <a:rPr sz="1000" i="0" b="1">
                   <a:solidFill>
                     <a:srgbClr val="1A1A1A">
                       <a:alpha val="100000"/>
@@ -6245,8 +6245,8 @@
           </p:nvSpPr>
           <p:spPr>
             <a:xfrm>
-              <a:off x="9145887" y="826225"/>
-              <a:ext cx="1536557" cy="81838"/>
+              <a:off x="9233128" y="1008897"/>
+              <a:ext cx="1708282" cy="90982"/>
             </a:xfrm>
             <a:prstGeom prst="rect">
               <a:avLst/>
@@ -6266,7 +6266,7 @@
                 </a:spcAft>
               </a:pPr>
               <a:r>
-                <a:rPr sz="900" i="0" b="1">
+                <a:rPr sz="1000" i="0" b="1">
                   <a:solidFill>
                     <a:srgbClr val="1A1A1A">
                       <a:alpha val="100000"/>
@@ -6288,18 +6288,18 @@
           </p:nvSpPr>
           <p:spPr>
             <a:xfrm>
-              <a:off x="7158870" y="3141071"/>
-              <a:ext cx="1884531" cy="0"/>
+              <a:off x="7316903" y="3102108"/>
+              <a:ext cx="1802352" cy="0"/>
             </a:xfrm>
             <a:custGeom>
               <a:avLst/>
               <a:pathLst>
-                <a:path w="1884531" h="0">
+                <a:path w="1802352" h="0">
                   <a:moveTo>
                     <a:pt x="0" y="0"/>
                   </a:moveTo>
                   <a:lnTo>
-                    <a:pt x="1884531" y="0"/>
+                    <a:pt x="1802352" y="0"/>
                   </a:lnTo>
                 </a:path>
               </a:pathLst>
@@ -6328,15 +6328,15 @@
           </p:nvSpPr>
           <p:spPr>
             <a:xfrm>
-              <a:off x="7409345" y="3141071"/>
-              <a:ext cx="0" cy="28468"/>
+              <a:off x="7556455" y="3102108"/>
+              <a:ext cx="0" cy="31631"/>
             </a:xfrm>
             <a:custGeom>
               <a:avLst/>
               <a:pathLst>
-                <a:path w="0" h="28468">
+                <a:path w="0" h="31631">
                   <a:moveTo>
-                    <a:pt x="0" y="28468"/>
+                    <a:pt x="0" y="31631"/>
                   </a:moveTo>
                   <a:lnTo>
                     <a:pt x="0" y="0"/>
@@ -6368,15 +6368,15 @@
           </p:nvSpPr>
           <p:spPr>
             <a:xfrm>
-              <a:off x="7844070" y="3141071"/>
-              <a:ext cx="0" cy="28468"/>
+              <a:off x="7972223" y="3102108"/>
+              <a:ext cx="0" cy="31631"/>
             </a:xfrm>
             <a:custGeom>
               <a:avLst/>
               <a:pathLst>
-                <a:path w="0" h="28468">
+                <a:path w="0" h="31631">
                   <a:moveTo>
-                    <a:pt x="0" y="28468"/>
+                    <a:pt x="0" y="31631"/>
                   </a:moveTo>
                   <a:lnTo>
                     <a:pt x="0" y="0"/>
@@ -6408,15 +6408,15 @@
           </p:nvSpPr>
           <p:spPr>
             <a:xfrm>
-              <a:off x="8304897" y="3141071"/>
-              <a:ext cx="0" cy="28468"/>
+              <a:off x="8412955" y="3102108"/>
+              <a:ext cx="0" cy="31631"/>
             </a:xfrm>
             <a:custGeom>
               <a:avLst/>
               <a:pathLst>
-                <a:path w="0" h="28468">
+                <a:path w="0" h="31631">
                   <a:moveTo>
-                    <a:pt x="0" y="28468"/>
+                    <a:pt x="0" y="31631"/>
                   </a:moveTo>
                   <a:lnTo>
                     <a:pt x="0" y="0"/>
@@ -6448,8 +6448,8 @@
           </p:nvSpPr>
           <p:spPr>
             <a:xfrm>
-              <a:off x="7345932" y="3192314"/>
-              <a:ext cx="126827" cy="65379"/>
+              <a:off x="7485818" y="3159044"/>
+              <a:ext cx="141274" cy="72786"/>
             </a:xfrm>
             <a:prstGeom prst="rect">
               <a:avLst/>
@@ -6469,7 +6469,7 @@
                 </a:spcAft>
               </a:pPr>
               <a:r>
-                <a:rPr sz="720" i="0" b="0">
+                <a:rPr sz="800" i="0" b="0">
                   <a:solidFill>
                     <a:srgbClr val="262626">
                       <a:alpha val="100000"/>
@@ -6491,8 +6491,8 @@
           </p:nvSpPr>
           <p:spPr>
             <a:xfrm>
-              <a:off x="7780657" y="3192314"/>
-              <a:ext cx="126827" cy="65379"/>
+              <a:off x="7901586" y="3159044"/>
+              <a:ext cx="141274" cy="72786"/>
             </a:xfrm>
             <a:prstGeom prst="rect">
               <a:avLst/>
@@ -6512,7 +6512,7 @@
                 </a:spcAft>
               </a:pPr>
               <a:r>
-                <a:rPr sz="720" i="0" b="0">
+                <a:rPr sz="800" i="0" b="0">
                   <a:solidFill>
                     <a:srgbClr val="262626">
                       <a:alpha val="100000"/>
@@ -6534,8 +6534,8 @@
           </p:nvSpPr>
           <p:spPr>
             <a:xfrm>
-              <a:off x="8241484" y="3192314"/>
-              <a:ext cx="126827" cy="65379"/>
+              <a:off x="8342317" y="3159044"/>
+              <a:ext cx="141274" cy="72786"/>
             </a:xfrm>
             <a:prstGeom prst="rect">
               <a:avLst/>
@@ -6555,7 +6555,7 @@
                 </a:spcAft>
               </a:pPr>
               <a:r>
-                <a:rPr sz="720" i="0" b="0">
+                <a:rPr sz="800" i="0" b="0">
                   <a:solidFill>
                     <a:srgbClr val="262626">
                       <a:alpha val="100000"/>
@@ -6577,18 +6577,18 @@
           </p:nvSpPr>
           <p:spPr>
             <a:xfrm>
-              <a:off x="9100338" y="3141071"/>
-              <a:ext cx="1884531" cy="0"/>
+              <a:off x="9182518" y="3102108"/>
+              <a:ext cx="1802352" cy="0"/>
             </a:xfrm>
             <a:custGeom>
               <a:avLst/>
               <a:pathLst>
-                <a:path w="1884531" h="0">
+                <a:path w="1802352" h="0">
                   <a:moveTo>
                     <a:pt x="0" y="0"/>
                   </a:moveTo>
                   <a:lnTo>
-                    <a:pt x="1884531" y="0"/>
+                    <a:pt x="1802352" y="0"/>
                   </a:lnTo>
                 </a:path>
               </a:pathLst>
@@ -6617,15 +6617,15 @@
           </p:nvSpPr>
           <p:spPr>
             <a:xfrm>
-              <a:off x="9350813" y="3141071"/>
-              <a:ext cx="0" cy="28468"/>
+              <a:off x="9422070" y="3102108"/>
+              <a:ext cx="0" cy="31631"/>
             </a:xfrm>
             <a:custGeom>
               <a:avLst/>
               <a:pathLst>
-                <a:path w="0" h="28468">
+                <a:path w="0" h="31631">
                   <a:moveTo>
-                    <a:pt x="0" y="28468"/>
+                    <a:pt x="0" y="31631"/>
                   </a:moveTo>
                   <a:lnTo>
                     <a:pt x="0" y="0"/>
@@ -6657,15 +6657,15 @@
           </p:nvSpPr>
           <p:spPr>
             <a:xfrm>
-              <a:off x="9785538" y="3141071"/>
-              <a:ext cx="0" cy="28468"/>
+              <a:off x="9837838" y="3102108"/>
+              <a:ext cx="0" cy="31631"/>
             </a:xfrm>
             <a:custGeom>
               <a:avLst/>
               <a:pathLst>
-                <a:path w="0" h="28468">
+                <a:path w="0" h="31631">
                   <a:moveTo>
-                    <a:pt x="0" y="28468"/>
+                    <a:pt x="0" y="31631"/>
                   </a:moveTo>
                   <a:lnTo>
                     <a:pt x="0" y="0"/>
@@ -6697,15 +6697,15 @@
           </p:nvSpPr>
           <p:spPr>
             <a:xfrm>
-              <a:off x="10246365" y="3141071"/>
-              <a:ext cx="0" cy="28468"/>
+              <a:off x="10278570" y="3102108"/>
+              <a:ext cx="0" cy="31631"/>
             </a:xfrm>
             <a:custGeom>
               <a:avLst/>
               <a:pathLst>
-                <a:path w="0" h="28468">
+                <a:path w="0" h="31631">
                   <a:moveTo>
-                    <a:pt x="0" y="28468"/>
+                    <a:pt x="0" y="31631"/>
                   </a:moveTo>
                   <a:lnTo>
                     <a:pt x="0" y="0"/>
@@ -6737,8 +6737,8 @@
           </p:nvSpPr>
           <p:spPr>
             <a:xfrm>
-              <a:off x="9287400" y="3192314"/>
-              <a:ext cx="126827" cy="65379"/>
+              <a:off x="9351433" y="3159044"/>
+              <a:ext cx="141274" cy="72786"/>
             </a:xfrm>
             <a:prstGeom prst="rect">
               <a:avLst/>
@@ -6758,7 +6758,7 @@
                 </a:spcAft>
               </a:pPr>
               <a:r>
-                <a:rPr sz="720" i="0" b="0">
+                <a:rPr sz="800" i="0" b="0">
                   <a:solidFill>
                     <a:srgbClr val="262626">
                       <a:alpha val="100000"/>
@@ -6780,8 +6780,8 @@
           </p:nvSpPr>
           <p:spPr>
             <a:xfrm>
-              <a:off x="9722125" y="3192314"/>
-              <a:ext cx="126827" cy="65379"/>
+              <a:off x="9767201" y="3159044"/>
+              <a:ext cx="141274" cy="72786"/>
             </a:xfrm>
             <a:prstGeom prst="rect">
               <a:avLst/>
@@ -6801,7 +6801,7 @@
                 </a:spcAft>
               </a:pPr>
               <a:r>
-                <a:rPr sz="720" i="0" b="0">
+                <a:rPr sz="800" i="0" b="0">
                   <a:solidFill>
                     <a:srgbClr val="262626">
                       <a:alpha val="100000"/>
@@ -6823,8 +6823,8 @@
           </p:nvSpPr>
           <p:spPr>
             <a:xfrm>
-              <a:off x="10182952" y="3192314"/>
-              <a:ext cx="126827" cy="65379"/>
+              <a:off x="10207932" y="3159044"/>
+              <a:ext cx="141274" cy="72786"/>
             </a:xfrm>
             <a:prstGeom prst="rect">
               <a:avLst/>
@@ -6844,7 +6844,7 @@
                 </a:spcAft>
               </a:pPr>
               <a:r>
-                <a:rPr sz="720" i="0" b="0">
+                <a:rPr sz="800" i="0" b="0">
                   <a:solidFill>
                     <a:srgbClr val="262626">
                       <a:alpha val="100000"/>
@@ -6866,15 +6866,15 @@
           </p:nvSpPr>
           <p:spPr>
             <a:xfrm>
-              <a:off x="7158870" y="965592"/>
-              <a:ext cx="0" cy="2175478"/>
+              <a:off x="7316903" y="1163840"/>
+              <a:ext cx="0" cy="1938267"/>
             </a:xfrm>
             <a:custGeom>
               <a:avLst/>
               <a:pathLst>
-                <a:path w="0" h="2175478">
+                <a:path w="0" h="1938267">
                   <a:moveTo>
-                    <a:pt x="0" y="2175478"/>
+                    <a:pt x="0" y="1938267"/>
                   </a:moveTo>
                   <a:lnTo>
                     <a:pt x="0" y="0"/>
@@ -6906,8 +6906,8 @@
           </p:nvSpPr>
           <p:spPr>
             <a:xfrm>
-              <a:off x="5851699" y="2897851"/>
-              <a:ext cx="1255928" cy="65379"/>
+              <a:off x="5860934" y="2878141"/>
+              <a:ext cx="1399032" cy="72786"/>
             </a:xfrm>
             <a:prstGeom prst="rect">
               <a:avLst/>
@@ -6927,7 +6927,7 @@
                 </a:spcAft>
               </a:pPr>
               <a:r>
-                <a:rPr sz="720" i="0" b="0">
+                <a:rPr sz="800" i="0" b="0">
                   <a:solidFill>
                     <a:srgbClr val="262626">
                       <a:alpha val="100000"/>
@@ -6949,8 +6949,8 @@
           </p:nvSpPr>
           <p:spPr>
             <a:xfrm>
-              <a:off x="5770500" y="2546967"/>
-              <a:ext cx="1337127" cy="65379"/>
+              <a:off x="5770500" y="2565517"/>
+              <a:ext cx="1489466" cy="72786"/>
             </a:xfrm>
             <a:prstGeom prst="rect">
               <a:avLst/>
@@ -6970,7 +6970,7 @@
                 </a:spcAft>
               </a:pPr>
               <a:r>
-                <a:rPr sz="720" i="0" b="0">
+                <a:rPr sz="800" i="0" b="0">
                   <a:solidFill>
                     <a:srgbClr val="262626">
                       <a:alpha val="100000"/>
@@ -6992,8 +6992,8 @@
           </p:nvSpPr>
           <p:spPr>
             <a:xfrm>
-              <a:off x="6240227" y="2196084"/>
-              <a:ext cx="867399" cy="65379"/>
+              <a:off x="6293902" y="2252893"/>
+              <a:ext cx="966063" cy="72786"/>
             </a:xfrm>
             <a:prstGeom prst="rect">
               <a:avLst/>
@@ -7013,7 +7013,7 @@
                 </a:spcAft>
               </a:pPr>
               <a:r>
-                <a:rPr sz="720" i="0" b="0">
+                <a:rPr sz="800" i="0" b="0">
                   <a:solidFill>
                     <a:srgbClr val="262626">
                       <a:alpha val="100000"/>
@@ -7035,8 +7035,8 @@
           </p:nvSpPr>
           <p:spPr>
             <a:xfrm>
-              <a:off x="6485469" y="1845200"/>
-              <a:ext cx="622157" cy="65379"/>
+              <a:off x="6567125" y="1940269"/>
+              <a:ext cx="692840" cy="72786"/>
             </a:xfrm>
             <a:prstGeom prst="rect">
               <a:avLst/>
@@ -7056,7 +7056,7 @@
                 </a:spcAft>
               </a:pPr>
               <a:r>
-                <a:rPr sz="720" i="0" b="0">
+                <a:rPr sz="800" i="0" b="0">
                   <a:solidFill>
                     <a:srgbClr val="262626">
                       <a:alpha val="100000"/>
@@ -7078,8 +7078,8 @@
           </p:nvSpPr>
           <p:spPr>
             <a:xfrm>
-              <a:off x="6326638" y="1494316"/>
-              <a:ext cx="780989" cy="65379"/>
+              <a:off x="6390189" y="1627645"/>
+              <a:ext cx="869777" cy="72786"/>
             </a:xfrm>
             <a:prstGeom prst="rect">
               <a:avLst/>
@@ -7099,7 +7099,7 @@
                 </a:spcAft>
               </a:pPr>
               <a:r>
-                <a:rPr sz="720" i="0" b="0">
+                <a:rPr sz="800" i="0" b="0">
                   <a:solidFill>
                     <a:srgbClr val="262626">
                       <a:alpha val="100000"/>
@@ -7121,8 +7121,8 @@
           </p:nvSpPr>
           <p:spPr>
             <a:xfrm>
-              <a:off x="6047472" y="1143433"/>
-              <a:ext cx="1060155" cy="65379"/>
+              <a:off x="6079293" y="1315021"/>
+              <a:ext cx="1180673" cy="72786"/>
             </a:xfrm>
             <a:prstGeom prst="rect">
               <a:avLst/>
@@ -7142,7 +7142,7 @@
                 </a:spcAft>
               </a:pPr>
               <a:r>
-                <a:rPr sz="720" i="0" b="0">
+                <a:rPr sz="800" i="0" b="0">
                   <a:solidFill>
                     <a:srgbClr val="262626">
                       <a:alpha val="100000"/>
@@ -7164,18 +7164,18 @@
           </p:nvSpPr>
           <p:spPr>
             <a:xfrm>
-              <a:off x="7130402" y="2930541"/>
-              <a:ext cx="28468" cy="0"/>
+              <a:off x="7285271" y="2914534"/>
+              <a:ext cx="31631" cy="0"/>
             </a:xfrm>
             <a:custGeom>
               <a:avLst/>
               <a:pathLst>
-                <a:path w="28468" h="0">
+                <a:path w="31631" h="0">
                   <a:moveTo>
                     <a:pt x="0" y="0"/>
                   </a:moveTo>
                   <a:lnTo>
-                    <a:pt x="28468" y="0"/>
+                    <a:pt x="31631" y="0"/>
                   </a:lnTo>
                 </a:path>
               </a:pathLst>
@@ -7204,18 +7204,18 @@
           </p:nvSpPr>
           <p:spPr>
             <a:xfrm>
-              <a:off x="7130402" y="2579657"/>
-              <a:ext cx="28468" cy="0"/>
+              <a:off x="7285271" y="2601910"/>
+              <a:ext cx="31631" cy="0"/>
             </a:xfrm>
             <a:custGeom>
               <a:avLst/>
               <a:pathLst>
-                <a:path w="28468" h="0">
+                <a:path w="31631" h="0">
                   <a:moveTo>
                     <a:pt x="0" y="0"/>
                   </a:moveTo>
                   <a:lnTo>
-                    <a:pt x="28468" y="0"/>
+                    <a:pt x="31631" y="0"/>
                   </a:lnTo>
                 </a:path>
               </a:pathLst>
@@ -7244,18 +7244,18 @@
           </p:nvSpPr>
           <p:spPr>
             <a:xfrm>
-              <a:off x="7130402" y="2228773"/>
-              <a:ext cx="28468" cy="0"/>
+              <a:off x="7285271" y="2289286"/>
+              <a:ext cx="31631" cy="0"/>
             </a:xfrm>
             <a:custGeom>
               <a:avLst/>
               <a:pathLst>
-                <a:path w="28468" h="0">
+                <a:path w="31631" h="0">
                   <a:moveTo>
                     <a:pt x="0" y="0"/>
                   </a:moveTo>
                   <a:lnTo>
-                    <a:pt x="28468" y="0"/>
+                    <a:pt x="31631" y="0"/>
                   </a:lnTo>
                 </a:path>
               </a:pathLst>
@@ -7284,18 +7284,18 @@
           </p:nvSpPr>
           <p:spPr>
             <a:xfrm>
-              <a:off x="7130402" y="1877890"/>
-              <a:ext cx="28468" cy="0"/>
+              <a:off x="7285271" y="1976662"/>
+              <a:ext cx="31631" cy="0"/>
             </a:xfrm>
             <a:custGeom>
               <a:avLst/>
               <a:pathLst>
-                <a:path w="28468" h="0">
+                <a:path w="31631" h="0">
                   <a:moveTo>
                     <a:pt x="0" y="0"/>
                   </a:moveTo>
                   <a:lnTo>
-                    <a:pt x="28468" y="0"/>
+                    <a:pt x="31631" y="0"/>
                   </a:lnTo>
                 </a:path>
               </a:pathLst>
@@ -7324,18 +7324,18 @@
           </p:nvSpPr>
           <p:spPr>
             <a:xfrm>
-              <a:off x="7130402" y="1527006"/>
-              <a:ext cx="28468" cy="0"/>
+              <a:off x="7285271" y="1664038"/>
+              <a:ext cx="31631" cy="0"/>
             </a:xfrm>
             <a:custGeom>
               <a:avLst/>
               <a:pathLst>
-                <a:path w="28468" h="0">
+                <a:path w="31631" h="0">
                   <a:moveTo>
                     <a:pt x="0" y="0"/>
                   </a:moveTo>
                   <a:lnTo>
-                    <a:pt x="28468" y="0"/>
+                    <a:pt x="31631" y="0"/>
                   </a:lnTo>
                 </a:path>
               </a:pathLst>
@@ -7364,18 +7364,18 @@
           </p:nvSpPr>
           <p:spPr>
             <a:xfrm>
-              <a:off x="7130402" y="1176122"/>
-              <a:ext cx="28468" cy="0"/>
+              <a:off x="7285271" y="1351414"/>
+              <a:ext cx="31631" cy="0"/>
             </a:xfrm>
             <a:custGeom>
               <a:avLst/>
               <a:pathLst>
-                <a:path w="28468" h="0">
+                <a:path w="31631" h="0">
                   <a:moveTo>
                     <a:pt x="0" y="0"/>
                   </a:moveTo>
                   <a:lnTo>
-                    <a:pt x="28468" y="0"/>
+                    <a:pt x="31631" y="0"/>
                   </a:lnTo>
                 </a:path>
               </a:pathLst>
@@ -7404,8 +7404,8 @@
           </p:nvSpPr>
           <p:spPr>
             <a:xfrm>
-              <a:off x="8103337" y="3747165"/>
-              <a:ext cx="1937064" cy="81838"/>
+              <a:off x="8073815" y="3717059"/>
+              <a:ext cx="2154143" cy="90982"/>
             </a:xfrm>
             <a:prstGeom prst="rect">
               <a:avLst/>
@@ -7425,7 +7425,7 @@
                 </a:spcAft>
               </a:pPr>
               <a:r>
-                <a:rPr sz="900" i="0" b="0">
+                <a:rPr sz="1000" i="0" b="0">
                   <a:solidFill>
                     <a:srgbClr val="0D0D0D">
                       <a:alpha val="100000"/>
@@ -7447,8 +7447,8 @@
           </p:nvSpPr>
           <p:spPr>
             <a:xfrm>
-              <a:off x="8543942" y="3966834"/>
-              <a:ext cx="1055856" cy="227745"/>
+              <a:off x="8573401" y="3961268"/>
+              <a:ext cx="1154970" cy="240398"/>
             </a:xfrm>
             <a:prstGeom prst="rect">
               <a:avLst/>
@@ -7473,7 +7473,7 @@
           </p:nvSpPr>
           <p:spPr>
             <a:xfrm>
-              <a:off x="8600878" y="4023771"/>
+              <a:off x="8636664" y="4024531"/>
               <a:ext cx="113872" cy="113872"/>
             </a:xfrm>
             <a:prstGeom prst="rect">
@@ -7499,7 +7499,7 @@
           </p:nvSpPr>
           <p:spPr>
             <a:xfrm>
-              <a:off x="8612266" y="4080707"/>
+              <a:off x="8648051" y="4081467"/>
               <a:ext cx="91098" cy="0"/>
             </a:xfrm>
             <a:custGeom>
@@ -7539,8 +7539,8 @@
           </p:nvSpPr>
           <p:spPr>
             <a:xfrm>
-              <a:off x="8627032" y="4049924"/>
-              <a:ext cx="61566" cy="61566"/>
+              <a:off x="8662408" y="4050275"/>
+              <a:ext cx="62384" cy="62384"/>
             </a:xfrm>
             <a:prstGeom prst="ellipse">
               <a:avLst/>
@@ -7550,7 +7550,7 @@
                 <a:alpha val="100000"/>
               </a:srgbClr>
             </a:solidFill>
-            <a:ln w="7363" cap="rnd">
+            <a:ln w="8181" cap="rnd">
               <a:solidFill>
                 <a:srgbClr val="999999">
                   <a:alpha val="100000"/>
@@ -7574,7 +7574,7 @@
           </p:nvSpPr>
           <p:spPr>
             <a:xfrm>
-              <a:off x="8992485" y="4023771"/>
+              <a:off x="9061223" y="4024531"/>
               <a:ext cx="113872" cy="113872"/>
             </a:xfrm>
             <a:prstGeom prst="rect">
@@ -7600,7 +7600,7 @@
           </p:nvSpPr>
           <p:spPr>
             <a:xfrm>
-              <a:off x="9003872" y="4080707"/>
+              <a:off x="9072610" y="4081467"/>
               <a:ext cx="91098" cy="0"/>
             </a:xfrm>
             <a:custGeom>
@@ -7640,8 +7640,8 @@
           </p:nvSpPr>
           <p:spPr>
             <a:xfrm>
-              <a:off x="9018638" y="4049924"/>
-              <a:ext cx="61566" cy="61566"/>
+              <a:off x="9086967" y="4050275"/>
+              <a:ext cx="62384" cy="62384"/>
             </a:xfrm>
             <a:prstGeom prst="ellipse">
               <a:avLst/>
@@ -7651,7 +7651,7 @@
                 <a:alpha val="100000"/>
               </a:srgbClr>
             </a:solidFill>
-            <a:ln w="7363" cap="rnd">
+            <a:ln w="8181" cap="rnd">
               <a:solidFill>
                 <a:srgbClr val="D55E00">
                   <a:alpha val="100000"/>
@@ -7675,8 +7675,8 @@
           </p:nvSpPr>
           <p:spPr>
             <a:xfrm>
-              <a:off x="8771688" y="4044314"/>
-              <a:ext cx="163860" cy="72786"/>
+              <a:off x="8813800" y="4040548"/>
+              <a:ext cx="184160" cy="81838"/>
             </a:xfrm>
             <a:prstGeom prst="rect">
               <a:avLst/>
@@ -7696,7 +7696,7 @@
                 </a:spcAft>
               </a:pPr>
               <a:r>
-                <a:rPr sz="800" i="0" b="0">
+                <a:rPr sz="900" i="0" b="0">
                   <a:solidFill>
                     <a:srgbClr val="000000">
                       <a:alpha val="100000"/>
@@ -7718,8 +7718,8 @@
           </p:nvSpPr>
           <p:spPr>
             <a:xfrm>
-              <a:off x="9163294" y="4044314"/>
-              <a:ext cx="379567" cy="72786"/>
+              <a:off x="9238358" y="4040548"/>
+              <a:ext cx="426750" cy="81838"/>
             </a:xfrm>
             <a:prstGeom prst="rect">
               <a:avLst/>
@@ -7739,7 +7739,7 @@
                 </a:spcAft>
               </a:pPr>
               <a:r>
-                <a:rPr sz="800" i="0" b="0">
+                <a:rPr sz="900" i="0" b="0">
                   <a:solidFill>
                     <a:srgbClr val="000000">
                       <a:alpha val="100000"/>
@@ -7761,8 +7761,8 @@
           </p:nvSpPr>
           <p:spPr>
             <a:xfrm>
-              <a:off x="7158870" y="503004"/>
-              <a:ext cx="4600254" cy="74432"/>
+              <a:off x="7316903" y="521126"/>
+              <a:ext cx="3264316" cy="83576"/>
             </a:xfrm>
             <a:prstGeom prst="rect">
               <a:avLst/>
@@ -7782,7 +7782,7 @@
                 </a:spcAft>
               </a:pPr>
               <a:r>
-                <a:rPr sz="819" i="0" b="0">
+                <a:rPr sz="919" i="0" b="0">
                   <a:solidFill>
                     <a:srgbClr val="4D4D4D">
                       <a:alpha val="100000"/>
@@ -7791,7 +7791,7 @@
                   <a:latin typeface="Arial"/>
                   <a:cs typeface="Arial"/>
                 </a:rPr>
-                <a:t>Left: both efforts as predictors. Right: recent effort as an offset, so the response is the discovery rate</a:t>
+                <a:t>Left: both efforts as predictors. Right: recent effort as an offset, </a:t>
               </a:r>
             </a:p>
           </p:txBody>
@@ -7804,8 +7804,8 @@
           </p:nvSpPr>
           <p:spPr>
             <a:xfrm>
-              <a:off x="7158870" y="615475"/>
-              <a:ext cx="3985595" cy="74432"/>
+              <a:off x="7316903" y="647313"/>
+              <a:ext cx="2814066" cy="83576"/>
             </a:xfrm>
             <a:prstGeom prst="rect">
               <a:avLst/>
@@ -7825,7 +7825,7 @@
                 </a:spcAft>
               </a:pPr>
               <a:r>
-                <a:rPr sz="819" i="0" b="0">
+                <a:rPr sz="919" i="0" b="0">
                   <a:solidFill>
                     <a:srgbClr val="4D4D4D">
                       <a:alpha val="100000"/>
@@ -7834,7 +7834,7 @@
                   <a:latin typeface="Arial"/>
                   <a:cs typeface="Arial"/>
                 </a:rPr>
-                <a:t>per unit of effort. Provinces already well covered in 2002-2008 then yield fewer records</a:t>
+                <a:t>so the response is the discovery rate per unit of effort. </a:t>
               </a:r>
             </a:p>
           </p:txBody>
@@ -7847,8 +7847,8 @@
           </p:nvSpPr>
           <p:spPr>
             <a:xfrm>
-              <a:off x="7158870" y="328384"/>
-              <a:ext cx="2357048" cy="90982"/>
+              <a:off x="7316903" y="773500"/>
+              <a:ext cx="3594140" cy="83576"/>
             </a:xfrm>
             <a:prstGeom prst="rect">
               <a:avLst/>
@@ -7868,7 +7868,50 @@
                 </a:spcAft>
               </a:pPr>
               <a:r>
-                <a:rPr sz="1000" i="0" b="1">
+                <a:rPr sz="919" i="0" b="0">
+                  <a:solidFill>
+                    <a:srgbClr val="4D4D4D">
+                      <a:alpha val="100000"/>
+                    </a:srgbClr>
+                  </a:solidFill>
+                  <a:latin typeface="Arial"/>
+                  <a:cs typeface="Arial"/>
+                </a:rPr>
+                <a:t>Provinces already well covered in 2002-2008 then yield fewer records</a:t>
+              </a:r>
+            </a:p>
+          </p:txBody>
+        </p:sp>
+        <p:sp>
+          <p:nvSpPr>
+            <p:cNvPr id="146" name="tx146"/>
+            <p:cNvSpPr/>
+            <p:nvPr/>
+          </p:nvSpPr>
+          <p:spPr>
+            <a:xfrm>
+              <a:off x="7316903" y="328384"/>
+              <a:ext cx="2593146" cy="100035"/>
+            </a:xfrm>
+            <a:prstGeom prst="rect">
+              <a:avLst/>
+            </a:prstGeom>
+            <a:noFill/>
+          </p:spPr>
+          <p:txBody>
+            <a:bodyPr lIns="0" rIns="0" tIns="0" bIns="0" anchorCtr="1" anchor="ctr" wrap="none"/>
+            <a:lstStyle/>
+            <a:p>
+              <a:pPr algn="l" marL="0" marR="0" indent="0">
+                <a:spcBef>
+                  <a:spcPts val="0"/>
+                </a:spcBef>
+                <a:spcAft>
+                  <a:spcPts val="0"/>
+                </a:spcAft>
+              </a:pPr>
+              <a:r>
+                <a:rPr sz="1100" i="0" b="1">
                   <a:solidFill>
                     <a:srgbClr val="000000">
                       <a:alpha val="100000"/>
@@ -7884,14 +7927,14 @@
         </p:sp>
         <p:sp>
           <p:nvSpPr>
-            <p:cNvPr id="146" name="tx146"/>
-            <p:cNvSpPr/>
-            <p:nvPr/>
-          </p:nvSpPr>
-          <p:spPr>
-            <a:xfrm>
-              <a:off x="5750029" y="331787"/>
-              <a:ext cx="93085" cy="109179"/>
+            <p:cNvPr id="147" name="tx147"/>
+            <p:cNvSpPr/>
+            <p:nvPr/>
+          </p:nvSpPr>
+          <p:spPr>
+            <a:xfrm>
+              <a:off x="5746143" y="327367"/>
+              <a:ext cx="100858" cy="118231"/>
             </a:xfrm>
             <a:prstGeom prst="rect">
               <a:avLst/>
@@ -7911,7 +7954,7 @@
                 </a:spcAft>
               </a:pPr>
               <a:r>
-                <a:rPr sz="1200" i="0" b="1">
+                <a:rPr sz="1300" i="0" b="1">
                   <a:solidFill>
                     <a:srgbClr val="000000">
                       <a:alpha val="100000"/>
@@ -7927,14 +7970,14 @@
         </p:sp>
         <p:sp>
           <p:nvSpPr>
-            <p:cNvPr id="147" name="rc147"/>
-            <p:cNvSpPr/>
-            <p:nvPr/>
-          </p:nvSpPr>
-          <p:spPr>
-            <a:xfrm>
-              <a:off x="252469" y="4270496"/>
-              <a:ext cx="5416810" cy="3157994"/>
+            <p:cNvPr id="148" name="rc148"/>
+            <p:cNvSpPr/>
+            <p:nvPr/>
+          </p:nvSpPr>
+          <p:spPr>
+            <a:xfrm>
+              <a:off x="252469" y="4277582"/>
+              <a:ext cx="5416810" cy="3150908"/>
             </a:xfrm>
             <a:prstGeom prst="rect">
               <a:avLst/>
@@ -7944,7 +7987,7 @@
                 <a:alpha val="100000"/>
               </a:srgbClr>
             </a:solidFill>
-            <a:ln w="11086" cap="rnd">
+            <a:ln w="12318" cap="rnd">
               <a:solidFill>
                 <a:srgbClr val="FFFFFF">
                   <a:alpha val="100000"/>
@@ -7962,14 +8005,14 @@
         </p:sp>
         <p:sp>
           <p:nvSpPr>
-            <p:cNvPr id="148" name="rc148"/>
-            <p:cNvSpPr/>
-            <p:nvPr/>
-          </p:nvSpPr>
-          <p:spPr>
-            <a:xfrm>
-              <a:off x="5669280" y="4270496"/>
-              <a:ext cx="5416810" cy="3157994"/>
+            <p:cNvPr id="149" name="rc149"/>
+            <p:cNvSpPr/>
+            <p:nvPr/>
+          </p:nvSpPr>
+          <p:spPr>
+            <a:xfrm>
+              <a:off x="5669279" y="4277582"/>
+              <a:ext cx="5416810" cy="3150908"/>
             </a:xfrm>
             <a:prstGeom prst="rect">
               <a:avLst/>
@@ -7979,7 +8022,7 @@
                 <a:alpha val="100000"/>
               </a:srgbClr>
             </a:solidFill>
-            <a:ln w="11086" cap="rnd">
+            <a:ln w="12318" cap="rnd">
               <a:solidFill>
                 <a:srgbClr val="FFFFFF">
                   <a:alpha val="100000"/>
@@ -7997,14 +8040,14 @@
         </p:sp>
         <p:sp>
           <p:nvSpPr>
-            <p:cNvPr id="149" name="rc149"/>
-            <p:cNvSpPr/>
-            <p:nvPr/>
-          </p:nvSpPr>
-          <p:spPr>
-            <a:xfrm>
-              <a:off x="1742059" y="4674253"/>
-              <a:ext cx="3826000" cy="2066704"/>
+            <p:cNvPr id="150" name="rc150"/>
+            <p:cNvSpPr/>
+            <p:nvPr/>
+          </p:nvSpPr>
+          <p:spPr>
+            <a:xfrm>
+              <a:off x="1900092" y="4843862"/>
+              <a:ext cx="3667967" cy="1841354"/>
             </a:xfrm>
             <a:prstGeom prst="rect">
               <a:avLst/>
@@ -8023,21 +8066,21 @@
         </p:sp>
         <p:sp>
           <p:nvSpPr>
-            <p:cNvPr id="150" name="pl150"/>
-            <p:cNvSpPr/>
-            <p:nvPr/>
-          </p:nvSpPr>
-          <p:spPr>
-            <a:xfrm>
-              <a:off x="2141166" y="4674253"/>
-              <a:ext cx="0" cy="2066704"/>
+            <p:cNvPr id="151" name="pl151"/>
+            <p:cNvSpPr/>
+            <p:nvPr/>
+          </p:nvSpPr>
+          <p:spPr>
+            <a:xfrm>
+              <a:off x="2282714" y="4843862"/>
+              <a:ext cx="0" cy="1841354"/>
             </a:xfrm>
             <a:custGeom>
               <a:avLst/>
               <a:pathLst>
-                <a:path w="0" h="2066704">
+                <a:path w="0" h="1841354">
                   <a:moveTo>
-                    <a:pt x="0" y="2066704"/>
+                    <a:pt x="0" y="1841354"/>
                   </a:moveTo>
                   <a:lnTo>
                     <a:pt x="0" y="0"/>
@@ -8066,21 +8109,21 @@
         </p:sp>
         <p:sp>
           <p:nvSpPr>
-            <p:cNvPr id="151" name="pl151"/>
-            <p:cNvSpPr/>
-            <p:nvPr/>
-          </p:nvSpPr>
-          <p:spPr>
-            <a:xfrm>
-              <a:off x="3312949" y="4674253"/>
-              <a:ext cx="0" cy="2066704"/>
+            <p:cNvPr id="152" name="pl152"/>
+            <p:cNvSpPr/>
+            <p:nvPr/>
+          </p:nvSpPr>
+          <p:spPr>
+            <a:xfrm>
+              <a:off x="3406096" y="4843862"/>
+              <a:ext cx="0" cy="1841354"/>
             </a:xfrm>
             <a:custGeom>
               <a:avLst/>
               <a:pathLst>
-                <a:path w="0" h="2066704">
+                <a:path w="0" h="1841354">
                   <a:moveTo>
-                    <a:pt x="0" y="2066704"/>
+                    <a:pt x="0" y="1841354"/>
                   </a:moveTo>
                   <a:lnTo>
                     <a:pt x="0" y="0"/>
@@ -8109,21 +8152,21 @@
         </p:sp>
         <p:sp>
           <p:nvSpPr>
-            <p:cNvPr id="152" name="pl152"/>
-            <p:cNvSpPr/>
-            <p:nvPr/>
-          </p:nvSpPr>
-          <p:spPr>
-            <a:xfrm>
-              <a:off x="4484732" y="4674253"/>
-              <a:ext cx="0" cy="2066704"/>
+            <p:cNvPr id="153" name="pl153"/>
+            <p:cNvSpPr/>
+            <p:nvPr/>
+          </p:nvSpPr>
+          <p:spPr>
+            <a:xfrm>
+              <a:off x="4529478" y="4843862"/>
+              <a:ext cx="0" cy="1841354"/>
             </a:xfrm>
             <a:custGeom>
               <a:avLst/>
               <a:pathLst>
-                <a:path w="0" h="2066704">
+                <a:path w="0" h="1841354">
                   <a:moveTo>
-                    <a:pt x="0" y="2066704"/>
+                    <a:pt x="0" y="1841354"/>
                   </a:moveTo>
                   <a:lnTo>
                     <a:pt x="0" y="0"/>
@@ -8152,21 +8195,21 @@
         </p:sp>
         <p:sp>
           <p:nvSpPr>
-            <p:cNvPr id="153" name="pl153"/>
-            <p:cNvSpPr/>
-            <p:nvPr/>
-          </p:nvSpPr>
-          <p:spPr>
-            <a:xfrm>
-              <a:off x="2141166" y="4674253"/>
-              <a:ext cx="0" cy="2066704"/>
+            <p:cNvPr id="154" name="pl154"/>
+            <p:cNvSpPr/>
+            <p:nvPr/>
+          </p:nvSpPr>
+          <p:spPr>
+            <a:xfrm>
+              <a:off x="2282714" y="4843862"/>
+              <a:ext cx="0" cy="1841354"/>
             </a:xfrm>
             <a:custGeom>
               <a:avLst/>
               <a:pathLst>
-                <a:path w="0" h="2066704">
+                <a:path w="0" h="1841354">
                   <a:moveTo>
-                    <a:pt x="0" y="2066704"/>
+                    <a:pt x="0" y="1841354"/>
                   </a:moveTo>
                   <a:lnTo>
                     <a:pt x="0" y="0"/>
@@ -8195,14 +8238,14 @@
         </p:sp>
         <p:sp>
           <p:nvSpPr>
-            <p:cNvPr id="154" name="rc154"/>
-            <p:cNvSpPr/>
-            <p:nvPr/>
-          </p:nvSpPr>
-          <p:spPr>
-            <a:xfrm>
-              <a:off x="2406414" y="4774255"/>
-              <a:ext cx="2987736" cy="200003"/>
+            <p:cNvPr id="155" name="rc155"/>
+            <p:cNvSpPr/>
+            <p:nvPr/>
+          </p:nvSpPr>
+          <p:spPr>
+            <a:xfrm>
+              <a:off x="2537005" y="4932960"/>
+              <a:ext cx="2864327" cy="178195"/>
             </a:xfrm>
             <a:prstGeom prst="rect">
               <a:avLst/>
@@ -8221,14 +8264,14 @@
         </p:sp>
         <p:sp>
           <p:nvSpPr>
-            <p:cNvPr id="155" name="rc155"/>
-            <p:cNvSpPr/>
-            <p:nvPr/>
-          </p:nvSpPr>
-          <p:spPr>
-            <a:xfrm>
-              <a:off x="3214430" y="5107595"/>
-              <a:ext cx="1941238" cy="200003"/>
+            <p:cNvPr id="156" name="rc156"/>
+            <p:cNvSpPr/>
+            <p:nvPr/>
+          </p:nvSpPr>
+          <p:spPr>
+            <a:xfrm>
+              <a:off x="3311646" y="5229953"/>
+              <a:ext cx="1861055" cy="178195"/>
             </a:xfrm>
             <a:prstGeom prst="rect">
               <a:avLst/>
@@ -8247,14 +8290,14 @@
         </p:sp>
         <p:sp>
           <p:nvSpPr>
-            <p:cNvPr id="156" name="rc156"/>
-            <p:cNvSpPr/>
-            <p:nvPr/>
-          </p:nvSpPr>
-          <p:spPr>
-            <a:xfrm>
-              <a:off x="2674272" y="5440934"/>
-              <a:ext cx="362292" cy="200003"/>
+            <p:cNvPr id="157" name="rc157"/>
+            <p:cNvSpPr/>
+            <p:nvPr/>
+          </p:nvSpPr>
+          <p:spPr>
+            <a:xfrm>
+              <a:off x="2793800" y="5526945"/>
+              <a:ext cx="347327" cy="178195"/>
             </a:xfrm>
             <a:prstGeom prst="rect">
               <a:avLst/>
@@ -8273,14 +8316,14 @@
         </p:sp>
         <p:sp>
           <p:nvSpPr>
-            <p:cNvPr id="157" name="rc157"/>
-            <p:cNvSpPr/>
-            <p:nvPr/>
-          </p:nvSpPr>
-          <p:spPr>
-            <a:xfrm>
-              <a:off x="2141166" y="5774274"/>
-              <a:ext cx="270549" cy="200003"/>
+            <p:cNvPr id="158" name="rc158"/>
+            <p:cNvSpPr/>
+            <p:nvPr/>
+          </p:nvSpPr>
+          <p:spPr>
+            <a:xfrm>
+              <a:off x="2282714" y="5823938"/>
+              <a:ext cx="259374" cy="178195"/>
             </a:xfrm>
             <a:prstGeom prst="rect">
               <a:avLst/>
@@ -8299,14 +8342,14 @@
         </p:sp>
         <p:sp>
           <p:nvSpPr>
-            <p:cNvPr id="158" name="rc158"/>
-            <p:cNvSpPr/>
-            <p:nvPr/>
-          </p:nvSpPr>
-          <p:spPr>
-            <a:xfrm>
-              <a:off x="2141166" y="6107613"/>
-              <a:ext cx="258127" cy="200003"/>
+            <p:cNvPr id="159" name="rc159"/>
+            <p:cNvSpPr/>
+            <p:nvPr/>
+          </p:nvSpPr>
+          <p:spPr>
+            <a:xfrm>
+              <a:off x="2282714" y="6120931"/>
+              <a:ext cx="247465" cy="178195"/>
             </a:xfrm>
             <a:prstGeom prst="rect">
               <a:avLst/>
@@ -8325,14 +8368,14 @@
         </p:sp>
         <p:sp>
           <p:nvSpPr>
-            <p:cNvPr id="159" name="rc159"/>
-            <p:cNvSpPr/>
-            <p:nvPr/>
-          </p:nvSpPr>
-          <p:spPr>
-            <a:xfrm>
-              <a:off x="2204689" y="6440953"/>
-              <a:ext cx="14522" cy="200003"/>
+            <p:cNvPr id="160" name="rc160"/>
+            <p:cNvSpPr/>
+            <p:nvPr/>
+          </p:nvSpPr>
+          <p:spPr>
+            <a:xfrm>
+              <a:off x="2343613" y="6417923"/>
+              <a:ext cx="13922" cy="178195"/>
             </a:xfrm>
             <a:prstGeom prst="rect">
               <a:avLst/>
@@ -8351,14 +8394,14 @@
         </p:sp>
         <p:sp>
           <p:nvSpPr>
-            <p:cNvPr id="160" name="rc160"/>
-            <p:cNvSpPr/>
-            <p:nvPr/>
-          </p:nvSpPr>
-          <p:spPr>
-            <a:xfrm>
-              <a:off x="2141166" y="4774255"/>
-              <a:ext cx="265247" cy="200003"/>
+            <p:cNvPr id="161" name="rc161"/>
+            <p:cNvSpPr/>
+            <p:nvPr/>
+          </p:nvSpPr>
+          <p:spPr>
+            <a:xfrm>
+              <a:off x="2282714" y="4932960"/>
+              <a:ext cx="254291" cy="178195"/>
             </a:xfrm>
             <a:prstGeom prst="rect">
               <a:avLst/>
@@ -8377,14 +8420,14 @@
         </p:sp>
         <p:sp>
           <p:nvSpPr>
-            <p:cNvPr id="161" name="rc161"/>
-            <p:cNvSpPr/>
-            <p:nvPr/>
-          </p:nvSpPr>
-          <p:spPr>
-            <a:xfrm>
-              <a:off x="2141166" y="5107595"/>
-              <a:ext cx="1073263" cy="200003"/>
+            <p:cNvPr id="162" name="rc162"/>
+            <p:cNvSpPr/>
+            <p:nvPr/>
+          </p:nvSpPr>
+          <p:spPr>
+            <a:xfrm>
+              <a:off x="2282714" y="5229953"/>
+              <a:ext cx="1028932" cy="178195"/>
             </a:xfrm>
             <a:prstGeom prst="rect">
               <a:avLst/>
@@ -8403,14 +8446,14 @@
         </p:sp>
         <p:sp>
           <p:nvSpPr>
-            <p:cNvPr id="162" name="rc162"/>
-            <p:cNvSpPr/>
-            <p:nvPr/>
-          </p:nvSpPr>
-          <p:spPr>
-            <a:xfrm>
-              <a:off x="2141166" y="5440934"/>
-              <a:ext cx="533105" cy="200003"/>
+            <p:cNvPr id="163" name="rc163"/>
+            <p:cNvSpPr/>
+            <p:nvPr/>
+          </p:nvSpPr>
+          <p:spPr>
+            <a:xfrm>
+              <a:off x="2282714" y="5526945"/>
+              <a:ext cx="511086" cy="178195"/>
             </a:xfrm>
             <a:prstGeom prst="rect">
               <a:avLst/>
@@ -8429,14 +8472,14 @@
         </p:sp>
         <p:sp>
           <p:nvSpPr>
-            <p:cNvPr id="163" name="rc163"/>
-            <p:cNvSpPr/>
-            <p:nvPr/>
-          </p:nvSpPr>
-          <p:spPr>
-            <a:xfrm>
-              <a:off x="1915968" y="5774274"/>
-              <a:ext cx="225198" cy="200003"/>
+            <p:cNvPr id="164" name="rc164"/>
+            <p:cNvSpPr/>
+            <p:nvPr/>
+          </p:nvSpPr>
+          <p:spPr>
+            <a:xfrm>
+              <a:off x="2066817" y="5823938"/>
+              <a:ext cx="215896" cy="178195"/>
             </a:xfrm>
             <a:prstGeom prst="rect">
               <a:avLst/>
@@ -8455,14 +8498,14 @@
         </p:sp>
         <p:sp>
           <p:nvSpPr>
-            <p:cNvPr id="164" name="rc164"/>
-            <p:cNvSpPr/>
-            <p:nvPr/>
-          </p:nvSpPr>
-          <p:spPr>
-            <a:xfrm>
-              <a:off x="1981890" y="6107613"/>
-              <a:ext cx="159276" cy="200003"/>
+            <p:cNvPr id="165" name="rc165"/>
+            <p:cNvSpPr/>
+            <p:nvPr/>
+          </p:nvSpPr>
+          <p:spPr>
+            <a:xfrm>
+              <a:off x="2130016" y="6120931"/>
+              <a:ext cx="152697" cy="178195"/>
             </a:xfrm>
             <a:prstGeom prst="rect">
               <a:avLst/>
@@ -8481,14 +8524,14 @@
         </p:sp>
         <p:sp>
           <p:nvSpPr>
-            <p:cNvPr id="165" name="rc165"/>
-            <p:cNvSpPr/>
-            <p:nvPr/>
-          </p:nvSpPr>
-          <p:spPr>
-            <a:xfrm>
-              <a:off x="2141166" y="6440953"/>
-              <a:ext cx="63522" cy="200003"/>
+            <p:cNvPr id="166" name="rc166"/>
+            <p:cNvSpPr/>
+            <p:nvPr/>
+          </p:nvSpPr>
+          <p:spPr>
+            <a:xfrm>
+              <a:off x="2282714" y="6417923"/>
+              <a:ext cx="60898" cy="178195"/>
             </a:xfrm>
             <a:prstGeom prst="rect">
               <a:avLst/>
@@ -8507,21 +8550,21 @@
         </p:sp>
         <p:sp>
           <p:nvSpPr>
-            <p:cNvPr id="166" name="pl166"/>
-            <p:cNvSpPr/>
-            <p:nvPr/>
-          </p:nvSpPr>
-          <p:spPr>
-            <a:xfrm>
-              <a:off x="1742059" y="4674253"/>
-              <a:ext cx="0" cy="2066704"/>
+            <p:cNvPr id="167" name="pl167"/>
+            <p:cNvSpPr/>
+            <p:nvPr/>
+          </p:nvSpPr>
+          <p:spPr>
+            <a:xfrm>
+              <a:off x="1900092" y="4843862"/>
+              <a:ext cx="0" cy="1841354"/>
             </a:xfrm>
             <a:custGeom>
               <a:avLst/>
               <a:pathLst>
-                <a:path w="0" h="2066704">
+                <a:path w="0" h="1841354">
                   <a:moveTo>
-                    <a:pt x="0" y="2066704"/>
+                    <a:pt x="0" y="1841354"/>
                   </a:moveTo>
                   <a:lnTo>
                     <a:pt x="0" y="0"/>
@@ -8547,14 +8590,14 @@
         </p:sp>
         <p:sp>
           <p:nvSpPr>
-            <p:cNvPr id="167" name="tx167"/>
-            <p:cNvSpPr/>
-            <p:nvPr/>
-          </p:nvSpPr>
-          <p:spPr>
-            <a:xfrm>
-              <a:off x="823416" y="6508265"/>
-              <a:ext cx="867399" cy="65379"/>
+            <p:cNvPr id="168" name="tx168"/>
+            <p:cNvSpPr/>
+            <p:nvPr/>
+          </p:nvSpPr>
+          <p:spPr>
+            <a:xfrm>
+              <a:off x="877092" y="6470628"/>
+              <a:ext cx="966063" cy="72786"/>
             </a:xfrm>
             <a:prstGeom prst="rect">
               <a:avLst/>
@@ -8574,7 +8617,7 @@
                 </a:spcAft>
               </a:pPr>
               <a:r>
-                <a:rPr sz="720" i="0" b="0">
+                <a:rPr sz="800" i="0" b="0">
                   <a:solidFill>
                     <a:srgbClr val="262626">
                       <a:alpha val="100000"/>
@@ -8590,14 +8633,14 @@
         </p:sp>
         <p:sp>
           <p:nvSpPr>
-            <p:cNvPr id="168" name="tx168"/>
-            <p:cNvSpPr/>
-            <p:nvPr/>
-          </p:nvSpPr>
-          <p:spPr>
-            <a:xfrm>
-              <a:off x="434888" y="6174925"/>
-              <a:ext cx="1255928" cy="65379"/>
+            <p:cNvPr id="169" name="tx169"/>
+            <p:cNvSpPr/>
+            <p:nvPr/>
+          </p:nvSpPr>
+          <p:spPr>
+            <a:xfrm>
+              <a:off x="444123" y="6173635"/>
+              <a:ext cx="1399032" cy="72786"/>
             </a:xfrm>
             <a:prstGeom prst="rect">
               <a:avLst/>
@@ -8617,7 +8660,7 @@
                 </a:spcAft>
               </a:pPr>
               <a:r>
-                <a:rPr sz="720" i="0" b="0">
+                <a:rPr sz="800" i="0" b="0">
                   <a:solidFill>
                     <a:srgbClr val="262626">
                       <a:alpha val="100000"/>
@@ -8633,14 +8676,14 @@
         </p:sp>
         <p:sp>
           <p:nvSpPr>
-            <p:cNvPr id="169" name="tx169"/>
-            <p:cNvSpPr/>
-            <p:nvPr/>
-          </p:nvSpPr>
-          <p:spPr>
-            <a:xfrm>
-              <a:off x="353689" y="5841586"/>
-              <a:ext cx="1337127" cy="65379"/>
+            <p:cNvPr id="170" name="tx170"/>
+            <p:cNvSpPr/>
+            <p:nvPr/>
+          </p:nvSpPr>
+          <p:spPr>
+            <a:xfrm>
+              <a:off x="353689" y="5876643"/>
+              <a:ext cx="1489466" cy="72786"/>
             </a:xfrm>
             <a:prstGeom prst="rect">
               <a:avLst/>
@@ -8660,7 +8703,7 @@
                 </a:spcAft>
               </a:pPr>
               <a:r>
-                <a:rPr sz="720" i="0" b="0">
+                <a:rPr sz="800" i="0" b="0">
                   <a:solidFill>
                     <a:srgbClr val="262626">
                       <a:alpha val="100000"/>
@@ -8676,14 +8719,14 @@
         </p:sp>
         <p:sp>
           <p:nvSpPr>
-            <p:cNvPr id="170" name="tx170"/>
-            <p:cNvSpPr/>
-            <p:nvPr/>
-          </p:nvSpPr>
-          <p:spPr>
-            <a:xfrm>
-              <a:off x="1068658" y="5508246"/>
-              <a:ext cx="622157" cy="65379"/>
+            <p:cNvPr id="171" name="tx171"/>
+            <p:cNvSpPr/>
+            <p:nvPr/>
+          </p:nvSpPr>
+          <p:spPr>
+            <a:xfrm>
+              <a:off x="1150314" y="5579650"/>
+              <a:ext cx="692840" cy="72786"/>
             </a:xfrm>
             <a:prstGeom prst="rect">
               <a:avLst/>
@@ -8703,7 +8746,7 @@
                 </a:spcAft>
               </a:pPr>
               <a:r>
-                <a:rPr sz="720" i="0" b="0">
+                <a:rPr sz="800" i="0" b="0">
                   <a:solidFill>
                     <a:srgbClr val="262626">
                       <a:alpha val="100000"/>
@@ -8719,14 +8762,14 @@
         </p:sp>
         <p:sp>
           <p:nvSpPr>
-            <p:cNvPr id="171" name="tx171"/>
-            <p:cNvSpPr/>
-            <p:nvPr/>
-          </p:nvSpPr>
-          <p:spPr>
-            <a:xfrm>
-              <a:off x="909827" y="5174907"/>
-              <a:ext cx="780989" cy="65379"/>
+            <p:cNvPr id="172" name="tx172"/>
+            <p:cNvSpPr/>
+            <p:nvPr/>
+          </p:nvSpPr>
+          <p:spPr>
+            <a:xfrm>
+              <a:off x="973378" y="5282657"/>
+              <a:ext cx="869777" cy="72786"/>
             </a:xfrm>
             <a:prstGeom prst="rect">
               <a:avLst/>
@@ -8746,7 +8789,7 @@
                 </a:spcAft>
               </a:pPr>
               <a:r>
-                <a:rPr sz="720" i="0" b="0">
+                <a:rPr sz="800" i="0" b="0">
                   <a:solidFill>
                     <a:srgbClr val="262626">
                       <a:alpha val="100000"/>
@@ -8762,14 +8805,14 @@
         </p:sp>
         <p:sp>
           <p:nvSpPr>
-            <p:cNvPr id="172" name="tx172"/>
-            <p:cNvSpPr/>
-            <p:nvPr/>
-          </p:nvSpPr>
-          <p:spPr>
-            <a:xfrm>
-              <a:off x="630661" y="4841567"/>
-              <a:ext cx="1060155" cy="65379"/>
+            <p:cNvPr id="173" name="tx173"/>
+            <p:cNvSpPr/>
+            <p:nvPr/>
+          </p:nvSpPr>
+          <p:spPr>
+            <a:xfrm>
+              <a:off x="662482" y="4985665"/>
+              <a:ext cx="1180673" cy="72786"/>
             </a:xfrm>
             <a:prstGeom prst="rect">
               <a:avLst/>
@@ -8789,7 +8832,7 @@
                 </a:spcAft>
               </a:pPr>
               <a:r>
-                <a:rPr sz="720" i="0" b="0">
+                <a:rPr sz="800" i="0" b="0">
                   <a:solidFill>
                     <a:srgbClr val="262626">
                       <a:alpha val="100000"/>
@@ -8805,24 +8848,24 @@
         </p:sp>
         <p:sp>
           <p:nvSpPr>
-            <p:cNvPr id="173" name="pl173"/>
-            <p:cNvSpPr/>
-            <p:nvPr/>
-          </p:nvSpPr>
-          <p:spPr>
-            <a:xfrm>
-              <a:off x="1713591" y="6540955"/>
-              <a:ext cx="28468" cy="0"/>
+            <p:cNvPr id="174" name="pl174"/>
+            <p:cNvSpPr/>
+            <p:nvPr/>
+          </p:nvSpPr>
+          <p:spPr>
+            <a:xfrm>
+              <a:off x="1868460" y="6507021"/>
+              <a:ext cx="31631" cy="0"/>
             </a:xfrm>
             <a:custGeom>
               <a:avLst/>
               <a:pathLst>
-                <a:path w="28468" h="0">
+                <a:path w="31631" h="0">
                   <a:moveTo>
                     <a:pt x="0" y="0"/>
                   </a:moveTo>
                   <a:lnTo>
-                    <a:pt x="28468" y="0"/>
+                    <a:pt x="31631" y="0"/>
                   </a:lnTo>
                 </a:path>
               </a:pathLst>
@@ -8845,24 +8888,24 @@
         </p:sp>
         <p:sp>
           <p:nvSpPr>
-            <p:cNvPr id="174" name="pl174"/>
-            <p:cNvSpPr/>
-            <p:nvPr/>
-          </p:nvSpPr>
-          <p:spPr>
-            <a:xfrm>
-              <a:off x="1713591" y="6207615"/>
-              <a:ext cx="28468" cy="0"/>
+            <p:cNvPr id="175" name="pl175"/>
+            <p:cNvSpPr/>
+            <p:nvPr/>
+          </p:nvSpPr>
+          <p:spPr>
+            <a:xfrm>
+              <a:off x="1868460" y="6210028"/>
+              <a:ext cx="31631" cy="0"/>
             </a:xfrm>
             <a:custGeom>
               <a:avLst/>
               <a:pathLst>
-                <a:path w="28468" h="0">
+                <a:path w="31631" h="0">
                   <a:moveTo>
                     <a:pt x="0" y="0"/>
                   </a:moveTo>
                   <a:lnTo>
-                    <a:pt x="28468" y="0"/>
+                    <a:pt x="31631" y="0"/>
                   </a:lnTo>
                 </a:path>
               </a:pathLst>
@@ -8885,24 +8928,24 @@
         </p:sp>
         <p:sp>
           <p:nvSpPr>
-            <p:cNvPr id="175" name="pl175"/>
-            <p:cNvSpPr/>
-            <p:nvPr/>
-          </p:nvSpPr>
-          <p:spPr>
-            <a:xfrm>
-              <a:off x="1713591" y="5874276"/>
-              <a:ext cx="28468" cy="0"/>
+            <p:cNvPr id="176" name="pl176"/>
+            <p:cNvSpPr/>
+            <p:nvPr/>
+          </p:nvSpPr>
+          <p:spPr>
+            <a:xfrm>
+              <a:off x="1868460" y="5913036"/>
+              <a:ext cx="31631" cy="0"/>
             </a:xfrm>
             <a:custGeom>
               <a:avLst/>
               <a:pathLst>
-                <a:path w="28468" h="0">
+                <a:path w="31631" h="0">
                   <a:moveTo>
                     <a:pt x="0" y="0"/>
                   </a:moveTo>
                   <a:lnTo>
-                    <a:pt x="28468" y="0"/>
+                    <a:pt x="31631" y="0"/>
                   </a:lnTo>
                 </a:path>
               </a:pathLst>
@@ -8925,24 +8968,24 @@
         </p:sp>
         <p:sp>
           <p:nvSpPr>
-            <p:cNvPr id="176" name="pl176"/>
-            <p:cNvSpPr/>
-            <p:nvPr/>
-          </p:nvSpPr>
-          <p:spPr>
-            <a:xfrm>
-              <a:off x="1713591" y="5540936"/>
-              <a:ext cx="28468" cy="0"/>
+            <p:cNvPr id="177" name="pl177"/>
+            <p:cNvSpPr/>
+            <p:nvPr/>
+          </p:nvSpPr>
+          <p:spPr>
+            <a:xfrm>
+              <a:off x="1868460" y="5616043"/>
+              <a:ext cx="31631" cy="0"/>
             </a:xfrm>
             <a:custGeom>
               <a:avLst/>
               <a:pathLst>
-                <a:path w="28468" h="0">
+                <a:path w="31631" h="0">
                   <a:moveTo>
                     <a:pt x="0" y="0"/>
                   </a:moveTo>
                   <a:lnTo>
-                    <a:pt x="28468" y="0"/>
+                    <a:pt x="31631" y="0"/>
                   </a:lnTo>
                 </a:path>
               </a:pathLst>
@@ -8965,24 +9008,24 @@
         </p:sp>
         <p:sp>
           <p:nvSpPr>
-            <p:cNvPr id="177" name="pl177"/>
-            <p:cNvSpPr/>
-            <p:nvPr/>
-          </p:nvSpPr>
-          <p:spPr>
-            <a:xfrm>
-              <a:off x="1713591" y="5207597"/>
-              <a:ext cx="28468" cy="0"/>
+            <p:cNvPr id="178" name="pl178"/>
+            <p:cNvSpPr/>
+            <p:nvPr/>
+          </p:nvSpPr>
+          <p:spPr>
+            <a:xfrm>
+              <a:off x="1868460" y="5319050"/>
+              <a:ext cx="31631" cy="0"/>
             </a:xfrm>
             <a:custGeom>
               <a:avLst/>
               <a:pathLst>
-                <a:path w="28468" h="0">
+                <a:path w="31631" h="0">
                   <a:moveTo>
                     <a:pt x="0" y="0"/>
                   </a:moveTo>
                   <a:lnTo>
-                    <a:pt x="28468" y="0"/>
+                    <a:pt x="31631" y="0"/>
                   </a:lnTo>
                 </a:path>
               </a:pathLst>
@@ -9005,24 +9048,24 @@
         </p:sp>
         <p:sp>
           <p:nvSpPr>
-            <p:cNvPr id="178" name="pl178"/>
-            <p:cNvSpPr/>
-            <p:nvPr/>
-          </p:nvSpPr>
-          <p:spPr>
-            <a:xfrm>
-              <a:off x="1713591" y="4874257"/>
-              <a:ext cx="28468" cy="0"/>
+            <p:cNvPr id="179" name="pl179"/>
+            <p:cNvSpPr/>
+            <p:nvPr/>
+          </p:nvSpPr>
+          <p:spPr>
+            <a:xfrm>
+              <a:off x="1868460" y="5022058"/>
+              <a:ext cx="31631" cy="0"/>
             </a:xfrm>
             <a:custGeom>
               <a:avLst/>
               <a:pathLst>
-                <a:path w="28468" h="0">
+                <a:path w="31631" h="0">
                   <a:moveTo>
                     <a:pt x="0" y="0"/>
                   </a:moveTo>
                   <a:lnTo>
-                    <a:pt x="28468" y="0"/>
+                    <a:pt x="31631" y="0"/>
                   </a:lnTo>
                 </a:path>
               </a:pathLst>
@@ -9045,24 +9088,24 @@
         </p:sp>
         <p:sp>
           <p:nvSpPr>
-            <p:cNvPr id="179" name="pl179"/>
-            <p:cNvSpPr/>
-            <p:nvPr/>
-          </p:nvSpPr>
-          <p:spPr>
-            <a:xfrm>
-              <a:off x="1742059" y="6740958"/>
-              <a:ext cx="3826000" cy="0"/>
+            <p:cNvPr id="180" name="pl180"/>
+            <p:cNvSpPr/>
+            <p:nvPr/>
+          </p:nvSpPr>
+          <p:spPr>
+            <a:xfrm>
+              <a:off x="1900092" y="6685217"/>
+              <a:ext cx="3667967" cy="0"/>
             </a:xfrm>
             <a:custGeom>
               <a:avLst/>
               <a:pathLst>
-                <a:path w="3826000" h="0">
+                <a:path w="3667967" h="0">
                   <a:moveTo>
                     <a:pt x="0" y="0"/>
                   </a:moveTo>
                   <a:lnTo>
-                    <a:pt x="3826000" y="0"/>
+                    <a:pt x="3667967" y="0"/>
                   </a:lnTo>
                 </a:path>
               </a:pathLst>
@@ -9085,21 +9128,21 @@
         </p:sp>
         <p:sp>
           <p:nvSpPr>
-            <p:cNvPr id="180" name="pl180"/>
-            <p:cNvSpPr/>
-            <p:nvPr/>
-          </p:nvSpPr>
-          <p:spPr>
-            <a:xfrm>
-              <a:off x="2141166" y="6740958"/>
-              <a:ext cx="0" cy="28468"/>
+            <p:cNvPr id="181" name="pl181"/>
+            <p:cNvSpPr/>
+            <p:nvPr/>
+          </p:nvSpPr>
+          <p:spPr>
+            <a:xfrm>
+              <a:off x="2282714" y="6685217"/>
+              <a:ext cx="0" cy="31631"/>
             </a:xfrm>
             <a:custGeom>
               <a:avLst/>
               <a:pathLst>
-                <a:path w="0" h="28468">
+                <a:path w="0" h="31631">
                   <a:moveTo>
-                    <a:pt x="0" y="28468"/>
+                    <a:pt x="0" y="31631"/>
                   </a:moveTo>
                   <a:lnTo>
                     <a:pt x="0" y="0"/>
@@ -9125,21 +9168,21 @@
         </p:sp>
         <p:sp>
           <p:nvSpPr>
-            <p:cNvPr id="181" name="pl181"/>
-            <p:cNvSpPr/>
-            <p:nvPr/>
-          </p:nvSpPr>
-          <p:spPr>
-            <a:xfrm>
-              <a:off x="3312949" y="6740958"/>
-              <a:ext cx="0" cy="28468"/>
+            <p:cNvPr id="182" name="pl182"/>
+            <p:cNvSpPr/>
+            <p:nvPr/>
+          </p:nvSpPr>
+          <p:spPr>
+            <a:xfrm>
+              <a:off x="3406096" y="6685217"/>
+              <a:ext cx="0" cy="31631"/>
             </a:xfrm>
             <a:custGeom>
               <a:avLst/>
               <a:pathLst>
-                <a:path w="0" h="28468">
+                <a:path w="0" h="31631">
                   <a:moveTo>
-                    <a:pt x="0" y="28468"/>
+                    <a:pt x="0" y="31631"/>
                   </a:moveTo>
                   <a:lnTo>
                     <a:pt x="0" y="0"/>
@@ -9165,21 +9208,21 @@
         </p:sp>
         <p:sp>
           <p:nvSpPr>
-            <p:cNvPr id="182" name="pl182"/>
-            <p:cNvSpPr/>
-            <p:nvPr/>
-          </p:nvSpPr>
-          <p:spPr>
-            <a:xfrm>
-              <a:off x="4484732" y="6740958"/>
-              <a:ext cx="0" cy="28468"/>
+            <p:cNvPr id="183" name="pl183"/>
+            <p:cNvSpPr/>
+            <p:nvPr/>
+          </p:nvSpPr>
+          <p:spPr>
+            <a:xfrm>
+              <a:off x="4529478" y="6685217"/>
+              <a:ext cx="0" cy="31631"/>
             </a:xfrm>
             <a:custGeom>
               <a:avLst/>
               <a:pathLst>
-                <a:path w="0" h="28468">
+                <a:path w="0" h="31631">
                   <a:moveTo>
-                    <a:pt x="0" y="28468"/>
+                    <a:pt x="0" y="31631"/>
                   </a:moveTo>
                   <a:lnTo>
                     <a:pt x="0" y="0"/>
@@ -9205,14 +9248,14 @@
         </p:sp>
         <p:sp>
           <p:nvSpPr>
-            <p:cNvPr id="183" name="tx183"/>
-            <p:cNvSpPr/>
-            <p:nvPr/>
-          </p:nvSpPr>
-          <p:spPr>
-            <a:xfrm>
-              <a:off x="2115792" y="6792201"/>
-              <a:ext cx="50749" cy="65379"/>
+            <p:cNvPr id="184" name="tx184"/>
+            <p:cNvSpPr/>
+            <p:nvPr/>
+          </p:nvSpPr>
+          <p:spPr>
+            <a:xfrm>
+              <a:off x="2254459" y="6742153"/>
+              <a:ext cx="56509" cy="72786"/>
             </a:xfrm>
             <a:prstGeom prst="rect">
               <a:avLst/>
@@ -9232,7 +9275,7 @@
                 </a:spcAft>
               </a:pPr>
               <a:r>
-                <a:rPr sz="720" i="0" b="0">
+                <a:rPr sz="800" i="0" b="0">
                   <a:solidFill>
                     <a:srgbClr val="262626">
                       <a:alpha val="100000"/>
@@ -9248,14 +9291,14 @@
         </p:sp>
         <p:sp>
           <p:nvSpPr>
-            <p:cNvPr id="184" name="tx184"/>
-            <p:cNvSpPr/>
-            <p:nvPr/>
-          </p:nvSpPr>
-          <p:spPr>
-            <a:xfrm>
-              <a:off x="3287574" y="6792201"/>
-              <a:ext cx="50749" cy="65379"/>
+            <p:cNvPr id="185" name="tx185"/>
+            <p:cNvSpPr/>
+            <p:nvPr/>
+          </p:nvSpPr>
+          <p:spPr>
+            <a:xfrm>
+              <a:off x="3377841" y="6742153"/>
+              <a:ext cx="56509" cy="72786"/>
             </a:xfrm>
             <a:prstGeom prst="rect">
               <a:avLst/>
@@ -9275,7 +9318,7 @@
                 </a:spcAft>
               </a:pPr>
               <a:r>
-                <a:rPr sz="720" i="0" b="0">
+                <a:rPr sz="800" i="0" b="0">
                   <a:solidFill>
                     <a:srgbClr val="262626">
                       <a:alpha val="100000"/>
@@ -9291,14 +9334,14 @@
         </p:sp>
         <p:sp>
           <p:nvSpPr>
-            <p:cNvPr id="185" name="tx185"/>
-            <p:cNvSpPr/>
-            <p:nvPr/>
-          </p:nvSpPr>
-          <p:spPr>
-            <a:xfrm>
-              <a:off x="4459357" y="6792201"/>
-              <a:ext cx="50749" cy="65379"/>
+            <p:cNvPr id="186" name="tx186"/>
+            <p:cNvSpPr/>
+            <p:nvPr/>
+          </p:nvSpPr>
+          <p:spPr>
+            <a:xfrm>
+              <a:off x="4501223" y="6742153"/>
+              <a:ext cx="56509" cy="72786"/>
             </a:xfrm>
             <a:prstGeom prst="rect">
               <a:avLst/>
@@ -9318,7 +9361,7 @@
                 </a:spcAft>
               </a:pPr>
               <a:r>
-                <a:rPr sz="720" i="0" b="0">
+                <a:rPr sz="800" i="0" b="0">
                   <a:solidFill>
                     <a:srgbClr val="262626">
                       <a:alpha val="100000"/>
@@ -9334,14 +9377,14 @@
         </p:sp>
         <p:sp>
           <p:nvSpPr>
-            <p:cNvPr id="186" name="tx186"/>
-            <p:cNvSpPr/>
-            <p:nvPr/>
-          </p:nvSpPr>
-          <p:spPr>
-            <a:xfrm>
-              <a:off x="2673633" y="6905160"/>
-              <a:ext cx="1962851" cy="81838"/>
+            <p:cNvPr id="187" name="tx187"/>
+            <p:cNvSpPr/>
+            <p:nvPr/>
+          </p:nvSpPr>
+          <p:spPr>
+            <a:xfrm>
+              <a:off x="2642602" y="6867968"/>
+              <a:ext cx="2182947" cy="90982"/>
             </a:xfrm>
             <a:prstGeom prst="rect">
               <a:avLst/>
@@ -9361,7 +9404,7 @@
                 </a:spcAft>
               </a:pPr>
               <a:r>
-                <a:rPr sz="900" i="0" b="0">
+                <a:rPr sz="1000" i="0" b="0">
                   <a:solidFill>
                     <a:srgbClr val="0D0D0D">
                       <a:alpha val="100000"/>
@@ -9377,14 +9420,14 @@
         </p:sp>
         <p:sp>
           <p:nvSpPr>
-            <p:cNvPr id="187" name="rc187"/>
-            <p:cNvSpPr/>
-            <p:nvPr/>
-          </p:nvSpPr>
-          <p:spPr>
-            <a:xfrm>
-              <a:off x="3008945" y="7124829"/>
-              <a:ext cx="1292228" cy="227745"/>
+            <p:cNvPr id="188" name="rc188"/>
+            <p:cNvSpPr/>
+            <p:nvPr/>
+          </p:nvSpPr>
+          <p:spPr>
+            <a:xfrm>
+              <a:off x="3023636" y="7112177"/>
+              <a:ext cx="1420877" cy="240398"/>
             </a:xfrm>
             <a:prstGeom prst="rect">
               <a:avLst/>
@@ -9403,13 +9446,13 @@
         </p:sp>
         <p:sp>
           <p:nvSpPr>
-            <p:cNvPr id="188" name="rc188"/>
-            <p:cNvSpPr/>
-            <p:nvPr/>
-          </p:nvSpPr>
-          <p:spPr>
-            <a:xfrm>
-              <a:off x="3065881" y="7181766"/>
+            <p:cNvPr id="189" name="rc189"/>
+            <p:cNvSpPr/>
+            <p:nvPr/>
+          </p:nvSpPr>
+          <p:spPr>
+            <a:xfrm>
+              <a:off x="3086899" y="7175439"/>
               <a:ext cx="113872" cy="113872"/>
             </a:xfrm>
             <a:prstGeom prst="rect">
@@ -9429,14 +9472,14 @@
         </p:sp>
         <p:sp>
           <p:nvSpPr>
-            <p:cNvPr id="189" name="rc189"/>
-            <p:cNvSpPr/>
-            <p:nvPr/>
-          </p:nvSpPr>
-          <p:spPr>
-            <a:xfrm>
-              <a:off x="3073245" y="7189129"/>
-              <a:ext cx="99145" cy="99145"/>
+            <p:cNvPr id="190" name="rc190"/>
+            <p:cNvSpPr/>
+            <p:nvPr/>
+          </p:nvSpPr>
+          <p:spPr>
+            <a:xfrm>
+              <a:off x="3095081" y="7183621"/>
+              <a:ext cx="97509" cy="97509"/>
             </a:xfrm>
             <a:prstGeom prst="rect">
               <a:avLst/>
@@ -9455,13 +9498,13 @@
         </p:sp>
         <p:sp>
           <p:nvSpPr>
-            <p:cNvPr id="190" name="rc190"/>
-            <p:cNvSpPr/>
-            <p:nvPr/>
-          </p:nvSpPr>
-          <p:spPr>
-            <a:xfrm>
-              <a:off x="3858726" y="7181766"/>
+            <p:cNvPr id="191" name="rc191"/>
+            <p:cNvSpPr/>
+            <p:nvPr/>
+          </p:nvSpPr>
+          <p:spPr>
+            <a:xfrm>
+              <a:off x="3962714" y="7175439"/>
               <a:ext cx="113872" cy="113872"/>
             </a:xfrm>
             <a:prstGeom prst="rect">
@@ -9481,14 +9524,14 @@
         </p:sp>
         <p:sp>
           <p:nvSpPr>
-            <p:cNvPr id="191" name="rc191"/>
-            <p:cNvSpPr/>
-            <p:nvPr/>
-          </p:nvSpPr>
-          <p:spPr>
-            <a:xfrm>
-              <a:off x="3866090" y="7189129"/>
-              <a:ext cx="99145" cy="99145"/>
+            <p:cNvPr id="192" name="rc192"/>
+            <p:cNvSpPr/>
+            <p:nvPr/>
+          </p:nvSpPr>
+          <p:spPr>
+            <a:xfrm>
+              <a:off x="3970896" y="7183621"/>
+              <a:ext cx="97509" cy="97509"/>
             </a:xfrm>
             <a:prstGeom prst="rect">
               <a:avLst/>
@@ -9507,14 +9550,14 @@
         </p:sp>
         <p:sp>
           <p:nvSpPr>
-            <p:cNvPr id="192" name="tx192"/>
-            <p:cNvSpPr/>
-            <p:nvPr/>
-          </p:nvSpPr>
-          <p:spPr>
-            <a:xfrm>
-              <a:off x="3236691" y="7202309"/>
-              <a:ext cx="565099" cy="72786"/>
+            <p:cNvPr id="193" name="tx193"/>
+            <p:cNvSpPr/>
+            <p:nvPr/>
+          </p:nvSpPr>
+          <p:spPr>
+            <a:xfrm>
+              <a:off x="3264035" y="7191456"/>
+              <a:ext cx="635416" cy="81838"/>
             </a:xfrm>
             <a:prstGeom prst="rect">
               <a:avLst/>
@@ -9534,7 +9577,7 @@
                 </a:spcAft>
               </a:pPr>
               <a:r>
-                <a:rPr sz="800" i="0" b="0">
+                <a:rPr sz="900" i="0" b="0">
                   <a:solidFill>
                     <a:srgbClr val="000000">
                       <a:alpha val="100000"/>
@@ -9550,14 +9593,14 @@
         </p:sp>
         <p:sp>
           <p:nvSpPr>
-            <p:cNvPr id="193" name="tx193"/>
-            <p:cNvSpPr/>
-            <p:nvPr/>
-          </p:nvSpPr>
-          <p:spPr>
-            <a:xfrm>
-              <a:off x="4029536" y="7202309"/>
-              <a:ext cx="214701" cy="72786"/>
+            <p:cNvPr id="194" name="tx194"/>
+            <p:cNvSpPr/>
+            <p:nvPr/>
+          </p:nvSpPr>
+          <p:spPr>
+            <a:xfrm>
+              <a:off x="4139850" y="7191456"/>
+              <a:ext cx="241401" cy="81838"/>
             </a:xfrm>
             <a:prstGeom prst="rect">
               <a:avLst/>
@@ -9577,7 +9620,7 @@
                 </a:spcAft>
               </a:pPr>
               <a:r>
-                <a:rPr sz="800" i="0" b="0">
+                <a:rPr sz="900" i="0" b="0">
                   <a:solidFill>
                     <a:srgbClr val="000000">
                       <a:alpha val="100000"/>
@@ -9593,14 +9636,14 @@
         </p:sp>
         <p:sp>
           <p:nvSpPr>
-            <p:cNvPr id="194" name="tx194"/>
-            <p:cNvSpPr/>
-            <p:nvPr/>
-          </p:nvSpPr>
-          <p:spPr>
-            <a:xfrm>
-              <a:off x="1742059" y="4521031"/>
-              <a:ext cx="3687043" cy="74432"/>
+            <p:cNvPr id="195" name="tx195"/>
+            <p:cNvSpPr/>
+            <p:nvPr/>
+          </p:nvSpPr>
+          <p:spPr>
+            <a:xfrm>
+              <a:off x="1900092" y="4546239"/>
+              <a:ext cx="4139763" cy="83576"/>
             </a:xfrm>
             <a:prstGeom prst="rect">
               <a:avLst/>
@@ -9620,7 +9663,7 @@
                 </a:spcAft>
               </a:pPr>
               <a:r>
-                <a:rPr sz="819" i="0" b="0">
+                <a:rPr sz="919" i="0" b="0">
                   <a:solidFill>
                     <a:srgbClr val="4D4D4D">
                       <a:alpha val="100000"/>
@@ -9636,14 +9679,14 @@
         </p:sp>
         <p:sp>
           <p:nvSpPr>
-            <p:cNvPr id="195" name="tx195"/>
-            <p:cNvSpPr/>
-            <p:nvPr/>
-          </p:nvSpPr>
-          <p:spPr>
-            <a:xfrm>
-              <a:off x="1742059" y="4346411"/>
-              <a:ext cx="1461211" cy="90982"/>
+            <p:cNvPr id="196" name="tx196"/>
+            <p:cNvSpPr/>
+            <p:nvPr/>
+          </p:nvSpPr>
+          <p:spPr>
+            <a:xfrm>
+              <a:off x="1900092" y="4353497"/>
+              <a:ext cx="1607423" cy="100035"/>
             </a:xfrm>
             <a:prstGeom prst="rect">
               <a:avLst/>
@@ -9663,7 +9706,7 @@
                 </a:spcAft>
               </a:pPr>
               <a:r>
-                <a:rPr sz="1000" i="0" b="1">
+                <a:rPr sz="1100" i="0" b="1">
                   <a:solidFill>
                     <a:srgbClr val="000000">
                       <a:alpha val="100000"/>
@@ -9679,14 +9722,14 @@
         </p:sp>
         <p:sp>
           <p:nvSpPr>
-            <p:cNvPr id="196" name="tx196"/>
-            <p:cNvSpPr/>
-            <p:nvPr/>
-          </p:nvSpPr>
-          <p:spPr>
-            <a:xfrm>
-              <a:off x="337378" y="4336914"/>
-              <a:ext cx="84764" cy="109179"/>
+            <p:cNvPr id="197" name="tx197"/>
+            <p:cNvSpPr/>
+            <p:nvPr/>
+          </p:nvSpPr>
+          <p:spPr>
+            <a:xfrm>
+              <a:off x="333858" y="4339367"/>
+              <a:ext cx="91805" cy="118231"/>
             </a:xfrm>
             <a:prstGeom prst="rect">
               <a:avLst/>
@@ -9706,7 +9749,7 @@
                 </a:spcAft>
               </a:pPr>
               <a:r>
-                <a:rPr sz="1200" i="0" b="1">
+                <a:rPr sz="1300" i="0" b="1">
                   <a:solidFill>
                     <a:srgbClr val="000000">
                       <a:alpha val="100000"/>
@@ -9722,14 +9765,14 @@
         </p:sp>
         <p:sp>
           <p:nvSpPr>
-            <p:cNvPr id="197" name="rc197"/>
-            <p:cNvSpPr/>
-            <p:nvPr/>
-          </p:nvSpPr>
-          <p:spPr>
-            <a:xfrm>
-              <a:off x="7158870" y="4674253"/>
-              <a:ext cx="3826000" cy="2066704"/>
+            <p:cNvPr id="198" name="rc198"/>
+            <p:cNvSpPr/>
+            <p:nvPr/>
+          </p:nvSpPr>
+          <p:spPr>
+            <a:xfrm>
+              <a:off x="7316903" y="4843862"/>
+              <a:ext cx="3667967" cy="1841354"/>
             </a:xfrm>
             <a:prstGeom prst="rect">
               <a:avLst/>
@@ -9748,21 +9791,21 @@
         </p:sp>
         <p:sp>
           <p:nvSpPr>
-            <p:cNvPr id="198" name="pl198"/>
-            <p:cNvSpPr/>
-            <p:nvPr/>
-          </p:nvSpPr>
-          <p:spPr>
-            <a:xfrm>
-              <a:off x="7734108" y="4674253"/>
-              <a:ext cx="0" cy="2066704"/>
+            <p:cNvPr id="199" name="pl199"/>
+            <p:cNvSpPr/>
+            <p:nvPr/>
+          </p:nvSpPr>
+          <p:spPr>
+            <a:xfrm>
+              <a:off x="7868380" y="4843862"/>
+              <a:ext cx="0" cy="1841354"/>
             </a:xfrm>
             <a:custGeom>
               <a:avLst/>
               <a:pathLst>
-                <a:path w="0" h="2066704">
+                <a:path w="0" h="1841354">
                   <a:moveTo>
-                    <a:pt x="0" y="2066704"/>
+                    <a:pt x="0" y="1841354"/>
                   </a:moveTo>
                   <a:lnTo>
                     <a:pt x="0" y="0"/>
@@ -9791,21 +9834,21 @@
         </p:sp>
         <p:sp>
           <p:nvSpPr>
-            <p:cNvPr id="199" name="pl199"/>
-            <p:cNvSpPr/>
-            <p:nvPr/>
-          </p:nvSpPr>
-          <p:spPr>
-            <a:xfrm>
-              <a:off x="8804318" y="4674253"/>
-              <a:ext cx="0" cy="2066704"/>
+            <p:cNvPr id="200" name="pl200"/>
+            <p:cNvSpPr/>
+            <p:nvPr/>
+          </p:nvSpPr>
+          <p:spPr>
+            <a:xfrm>
+              <a:off x="8894385" y="4843862"/>
+              <a:ext cx="0" cy="1841354"/>
             </a:xfrm>
             <a:custGeom>
               <a:avLst/>
               <a:pathLst>
-                <a:path w="0" h="2066704">
+                <a:path w="0" h="1841354">
                   <a:moveTo>
-                    <a:pt x="0" y="2066704"/>
+                    <a:pt x="0" y="1841354"/>
                   </a:moveTo>
                   <a:lnTo>
                     <a:pt x="0" y="0"/>
@@ -9834,21 +9877,21 @@
         </p:sp>
         <p:sp>
           <p:nvSpPr>
-            <p:cNvPr id="200" name="pl200"/>
-            <p:cNvSpPr/>
-            <p:nvPr/>
-          </p:nvSpPr>
-          <p:spPr>
-            <a:xfrm>
-              <a:off x="9874527" y="4674253"/>
-              <a:ext cx="0" cy="2066704"/>
+            <p:cNvPr id="201" name="pl201"/>
+            <p:cNvSpPr/>
+            <p:nvPr/>
+          </p:nvSpPr>
+          <p:spPr>
+            <a:xfrm>
+              <a:off x="9920390" y="4843862"/>
+              <a:ext cx="0" cy="1841354"/>
             </a:xfrm>
             <a:custGeom>
               <a:avLst/>
               <a:pathLst>
-                <a:path w="0" h="2066704">
+                <a:path w="0" h="1841354">
                   <a:moveTo>
-                    <a:pt x="0" y="2066704"/>
+                    <a:pt x="0" y="1841354"/>
                   </a:moveTo>
                   <a:lnTo>
                     <a:pt x="0" y="0"/>
@@ -9877,21 +9920,21 @@
         </p:sp>
         <p:sp>
           <p:nvSpPr>
-            <p:cNvPr id="201" name="pl201"/>
-            <p:cNvSpPr/>
-            <p:nvPr/>
-          </p:nvSpPr>
-          <p:spPr>
-            <a:xfrm>
-              <a:off x="10944737" y="4674253"/>
-              <a:ext cx="0" cy="2066704"/>
+            <p:cNvPr id="202" name="pl202"/>
+            <p:cNvSpPr/>
+            <p:nvPr/>
+          </p:nvSpPr>
+          <p:spPr>
+            <a:xfrm>
+              <a:off x="10946395" y="4843862"/>
+              <a:ext cx="0" cy="1841354"/>
             </a:xfrm>
             <a:custGeom>
               <a:avLst/>
               <a:pathLst>
-                <a:path w="0" h="2066704">
+                <a:path w="0" h="1841354">
                   <a:moveTo>
-                    <a:pt x="0" y="2066704"/>
+                    <a:pt x="0" y="1841354"/>
                   </a:moveTo>
                   <a:lnTo>
                     <a:pt x="0" y="0"/>
@@ -9920,21 +9963,21 @@
         </p:sp>
         <p:sp>
           <p:nvSpPr>
-            <p:cNvPr id="202" name="pl202"/>
-            <p:cNvSpPr/>
-            <p:nvPr/>
-          </p:nvSpPr>
-          <p:spPr>
-            <a:xfrm>
-              <a:off x="8804318" y="4674253"/>
-              <a:ext cx="0" cy="2066704"/>
+            <p:cNvPr id="203" name="pl203"/>
+            <p:cNvSpPr/>
+            <p:nvPr/>
+          </p:nvSpPr>
+          <p:spPr>
+            <a:xfrm>
+              <a:off x="8894385" y="4843862"/>
+              <a:ext cx="0" cy="1841354"/>
             </a:xfrm>
             <a:custGeom>
               <a:avLst/>
               <a:pathLst>
-                <a:path w="0" h="2066704">
+                <a:path w="0" h="1841354">
                   <a:moveTo>
-                    <a:pt x="0" y="2066704"/>
+                    <a:pt x="0" y="1841354"/>
                   </a:moveTo>
                   <a:lnTo>
                     <a:pt x="0" y="0"/>
@@ -9963,14 +10006,14 @@
         </p:sp>
         <p:sp>
           <p:nvSpPr>
-            <p:cNvPr id="203" name="rc203"/>
-            <p:cNvSpPr/>
-            <p:nvPr/>
-          </p:nvSpPr>
-          <p:spPr>
-            <a:xfrm>
-              <a:off x="8456188" y="6440953"/>
-              <a:ext cx="348129" cy="200003"/>
+            <p:cNvPr id="204" name="rc204"/>
+            <p:cNvSpPr/>
+            <p:nvPr/>
+          </p:nvSpPr>
+          <p:spPr>
+            <a:xfrm>
+              <a:off x="8560635" y="6417923"/>
+              <a:ext cx="333749" cy="178195"/>
             </a:xfrm>
             <a:prstGeom prst="rect">
               <a:avLst/>
@@ -9989,14 +10032,14 @@
         </p:sp>
         <p:sp>
           <p:nvSpPr>
-            <p:cNvPr id="204" name="rc204"/>
-            <p:cNvSpPr/>
-            <p:nvPr/>
-          </p:nvSpPr>
-          <p:spPr>
-            <a:xfrm>
-              <a:off x="8654093" y="6107613"/>
-              <a:ext cx="150224" cy="200003"/>
+            <p:cNvPr id="205" name="rc205"/>
+            <p:cNvSpPr/>
+            <p:nvPr/>
+          </p:nvSpPr>
+          <p:spPr>
+            <a:xfrm>
+              <a:off x="8750365" y="6120931"/>
+              <a:ext cx="144019" cy="178195"/>
             </a:xfrm>
             <a:prstGeom prst="rect">
               <a:avLst/>
@@ -10015,14 +10058,14 @@
         </p:sp>
         <p:sp>
           <p:nvSpPr>
-            <p:cNvPr id="205" name="rc205"/>
-            <p:cNvSpPr/>
-            <p:nvPr/>
-          </p:nvSpPr>
-          <p:spPr>
-            <a:xfrm>
-              <a:off x="8674054" y="5774274"/>
-              <a:ext cx="130263" cy="200003"/>
+            <p:cNvPr id="206" name="rc206"/>
+            <p:cNvSpPr/>
+            <p:nvPr/>
+          </p:nvSpPr>
+          <p:spPr>
+            <a:xfrm>
+              <a:off x="8769503" y="5823938"/>
+              <a:ext cx="124882" cy="178195"/>
             </a:xfrm>
             <a:prstGeom prst="rect">
               <a:avLst/>
@@ -10041,14 +10084,14 @@
         </p:sp>
         <p:sp>
           <p:nvSpPr>
-            <p:cNvPr id="206" name="rc206"/>
-            <p:cNvSpPr/>
-            <p:nvPr/>
-          </p:nvSpPr>
-          <p:spPr>
-            <a:xfrm>
-              <a:off x="8804318" y="5440934"/>
-              <a:ext cx="203659" cy="200003"/>
+            <p:cNvPr id="207" name="rc207"/>
+            <p:cNvSpPr/>
+            <p:nvPr/>
+          </p:nvSpPr>
+          <p:spPr>
+            <a:xfrm>
+              <a:off x="8894385" y="5526945"/>
+              <a:ext cx="195247" cy="178195"/>
             </a:xfrm>
             <a:prstGeom prst="rect">
               <a:avLst/>
@@ -10067,14 +10110,14 @@
         </p:sp>
         <p:sp>
           <p:nvSpPr>
-            <p:cNvPr id="207" name="rc207"/>
-            <p:cNvSpPr/>
-            <p:nvPr/>
-          </p:nvSpPr>
-          <p:spPr>
-            <a:xfrm>
-              <a:off x="8804318" y="5107595"/>
-              <a:ext cx="632908" cy="200003"/>
+            <p:cNvPr id="208" name="rc208"/>
+            <p:cNvSpPr/>
+            <p:nvPr/>
+          </p:nvSpPr>
+          <p:spPr>
+            <a:xfrm>
+              <a:off x="8894385" y="5229953"/>
+              <a:ext cx="606766" cy="178195"/>
             </a:xfrm>
             <a:prstGeom prst="rect">
               <a:avLst/>
@@ -10093,14 +10136,14 @@
         </p:sp>
         <p:sp>
           <p:nvSpPr>
-            <p:cNvPr id="208" name="rc208"/>
-            <p:cNvSpPr/>
-            <p:nvPr/>
-          </p:nvSpPr>
-          <p:spPr>
-            <a:xfrm>
-              <a:off x="8804318" y="4774255"/>
-              <a:ext cx="832637" cy="200003"/>
+            <p:cNvPr id="209" name="rc209"/>
+            <p:cNvSpPr/>
+            <p:nvPr/>
+          </p:nvSpPr>
+          <p:spPr>
+            <a:xfrm>
+              <a:off x="8894385" y="4932960"/>
+              <a:ext cx="798245" cy="178195"/>
             </a:xfrm>
             <a:prstGeom prst="rect">
               <a:avLst/>
@@ -10119,13 +10162,13 @@
         </p:sp>
         <p:sp>
           <p:nvSpPr>
-            <p:cNvPr id="209" name="tx209"/>
-            <p:cNvSpPr/>
-            <p:nvPr/>
-          </p:nvSpPr>
-          <p:spPr>
-            <a:xfrm>
-              <a:off x="7779545" y="6512517"/>
+            <p:cNvPr id="210" name="tx210"/>
+            <p:cNvSpPr/>
+            <p:nvPr/>
+          </p:nvSpPr>
+          <p:spPr>
+            <a:xfrm>
+              <a:off x="7883992" y="6478583"/>
               <a:ext cx="638342" cy="56875"/>
             </a:xfrm>
             <a:prstGeom prst="rect">
@@ -10162,13 +10205,13 @@
         </p:sp>
         <p:sp>
           <p:nvSpPr>
-            <p:cNvPr id="210" name="tx210"/>
-            <p:cNvSpPr/>
-            <p:nvPr/>
-          </p:nvSpPr>
-          <p:spPr>
-            <a:xfrm>
-              <a:off x="7977450" y="6179177"/>
+            <p:cNvPr id="211" name="tx211"/>
+            <p:cNvSpPr/>
+            <p:nvPr/>
+          </p:nvSpPr>
+          <p:spPr>
+            <a:xfrm>
+              <a:off x="8073722" y="6181591"/>
               <a:ext cx="638342" cy="56875"/>
             </a:xfrm>
             <a:prstGeom prst="rect">
@@ -10205,13 +10248,13 @@
         </p:sp>
         <p:sp>
           <p:nvSpPr>
-            <p:cNvPr id="211" name="tx211"/>
-            <p:cNvSpPr/>
-            <p:nvPr/>
-          </p:nvSpPr>
-          <p:spPr>
-            <a:xfrm>
-              <a:off x="7997411" y="5845838"/>
+            <p:cNvPr id="212" name="tx212"/>
+            <p:cNvSpPr/>
+            <p:nvPr/>
+          </p:nvSpPr>
+          <p:spPr>
+            <a:xfrm>
+              <a:off x="8092859" y="5884598"/>
               <a:ext cx="638342" cy="56875"/>
             </a:xfrm>
             <a:prstGeom prst="rect">
@@ -10248,13 +10291,13 @@
         </p:sp>
         <p:sp>
           <p:nvSpPr>
-            <p:cNvPr id="212" name="tx212"/>
-            <p:cNvSpPr/>
-            <p:nvPr/>
-          </p:nvSpPr>
-          <p:spPr>
-            <a:xfrm>
-              <a:off x="9044692" y="5512498"/>
+            <p:cNvPr id="213" name="tx213"/>
+            <p:cNvSpPr/>
+            <p:nvPr/>
+          </p:nvSpPr>
+          <p:spPr>
+            <a:xfrm>
+              <a:off x="9126348" y="5587605"/>
               <a:ext cx="611916" cy="56875"/>
             </a:xfrm>
             <a:prstGeom prst="rect">
@@ -10291,13 +10334,13 @@
         </p:sp>
         <p:sp>
           <p:nvSpPr>
-            <p:cNvPr id="213" name="tx213"/>
-            <p:cNvSpPr/>
-            <p:nvPr/>
-          </p:nvSpPr>
-          <p:spPr>
-            <a:xfrm>
-              <a:off x="9473941" y="5179159"/>
+            <p:cNvPr id="214" name="tx214"/>
+            <p:cNvSpPr/>
+            <p:nvPr/>
+          </p:nvSpPr>
+          <p:spPr>
+            <a:xfrm>
+              <a:off x="9537866" y="5290613"/>
               <a:ext cx="611916" cy="56875"/>
             </a:xfrm>
             <a:prstGeom prst="rect">
@@ -10334,13 +10377,13 @@
         </p:sp>
         <p:sp>
           <p:nvSpPr>
-            <p:cNvPr id="214" name="tx214"/>
-            <p:cNvSpPr/>
-            <p:nvPr/>
-          </p:nvSpPr>
-          <p:spPr>
-            <a:xfrm>
-              <a:off x="9673670" y="4845819"/>
+            <p:cNvPr id="215" name="tx215"/>
+            <p:cNvSpPr/>
+            <p:nvPr/>
+          </p:nvSpPr>
+          <p:spPr>
+            <a:xfrm>
+              <a:off x="9729345" y="4993620"/>
               <a:ext cx="611916" cy="56875"/>
             </a:xfrm>
             <a:prstGeom prst="rect">
@@ -10377,21 +10420,21 @@
         </p:sp>
         <p:sp>
           <p:nvSpPr>
-            <p:cNvPr id="215" name="pl215"/>
-            <p:cNvSpPr/>
-            <p:nvPr/>
-          </p:nvSpPr>
-          <p:spPr>
-            <a:xfrm>
-              <a:off x="7158870" y="4674253"/>
-              <a:ext cx="0" cy="2066704"/>
+            <p:cNvPr id="216" name="pl216"/>
+            <p:cNvSpPr/>
+            <p:nvPr/>
+          </p:nvSpPr>
+          <p:spPr>
+            <a:xfrm>
+              <a:off x="7316903" y="4843862"/>
+              <a:ext cx="0" cy="1841354"/>
             </a:xfrm>
             <a:custGeom>
               <a:avLst/>
               <a:pathLst>
-                <a:path w="0" h="2066704">
+                <a:path w="0" h="1841354">
                   <a:moveTo>
-                    <a:pt x="0" y="2066704"/>
+                    <a:pt x="0" y="1841354"/>
                   </a:moveTo>
                   <a:lnTo>
                     <a:pt x="0" y="0"/>
@@ -10417,14 +10460,14 @@
         </p:sp>
         <p:sp>
           <p:nvSpPr>
-            <p:cNvPr id="216" name="tx216"/>
-            <p:cNvSpPr/>
-            <p:nvPr/>
-          </p:nvSpPr>
-          <p:spPr>
-            <a:xfrm>
-              <a:off x="5851699" y="6508265"/>
-              <a:ext cx="1255928" cy="65379"/>
+            <p:cNvPr id="217" name="tx217"/>
+            <p:cNvSpPr/>
+            <p:nvPr/>
+          </p:nvSpPr>
+          <p:spPr>
+            <a:xfrm>
+              <a:off x="5860934" y="6470628"/>
+              <a:ext cx="1399032" cy="72786"/>
             </a:xfrm>
             <a:prstGeom prst="rect">
               <a:avLst/>
@@ -10444,7 +10487,7 @@
                 </a:spcAft>
               </a:pPr>
               <a:r>
-                <a:rPr sz="720" i="0" b="0">
+                <a:rPr sz="800" i="0" b="0">
                   <a:solidFill>
                     <a:srgbClr val="262626">
                       <a:alpha val="100000"/>
@@ -10460,14 +10503,14 @@
         </p:sp>
         <p:sp>
           <p:nvSpPr>
-            <p:cNvPr id="217" name="tx217"/>
-            <p:cNvSpPr/>
-            <p:nvPr/>
-          </p:nvSpPr>
-          <p:spPr>
-            <a:xfrm>
-              <a:off x="5770500" y="6174925"/>
-              <a:ext cx="1337127" cy="65379"/>
+            <p:cNvPr id="218" name="tx218"/>
+            <p:cNvSpPr/>
+            <p:nvPr/>
+          </p:nvSpPr>
+          <p:spPr>
+            <a:xfrm>
+              <a:off x="5770500" y="6173635"/>
+              <a:ext cx="1489466" cy="72786"/>
             </a:xfrm>
             <a:prstGeom prst="rect">
               <a:avLst/>
@@ -10487,7 +10530,7 @@
                 </a:spcAft>
               </a:pPr>
               <a:r>
-                <a:rPr sz="720" i="0" b="0">
+                <a:rPr sz="800" i="0" b="0">
                   <a:solidFill>
                     <a:srgbClr val="262626">
                       <a:alpha val="100000"/>
@@ -10503,14 +10546,14 @@
         </p:sp>
         <p:sp>
           <p:nvSpPr>
-            <p:cNvPr id="218" name="tx218"/>
-            <p:cNvSpPr/>
-            <p:nvPr/>
-          </p:nvSpPr>
-          <p:spPr>
-            <a:xfrm>
-              <a:off x="6240227" y="5841586"/>
-              <a:ext cx="867399" cy="65379"/>
+            <p:cNvPr id="219" name="tx219"/>
+            <p:cNvSpPr/>
+            <p:nvPr/>
+          </p:nvSpPr>
+          <p:spPr>
+            <a:xfrm>
+              <a:off x="6293902" y="5876643"/>
+              <a:ext cx="966063" cy="72786"/>
             </a:xfrm>
             <a:prstGeom prst="rect">
               <a:avLst/>
@@ -10530,7 +10573,7 @@
                 </a:spcAft>
               </a:pPr>
               <a:r>
-                <a:rPr sz="720" i="0" b="0">
+                <a:rPr sz="800" i="0" b="0">
                   <a:solidFill>
                     <a:srgbClr val="262626">
                       <a:alpha val="100000"/>
@@ -10546,14 +10589,14 @@
         </p:sp>
         <p:sp>
           <p:nvSpPr>
-            <p:cNvPr id="219" name="tx219"/>
-            <p:cNvSpPr/>
-            <p:nvPr/>
-          </p:nvSpPr>
-          <p:spPr>
-            <a:xfrm>
-              <a:off x="6485469" y="5508246"/>
-              <a:ext cx="622157" cy="65379"/>
+            <p:cNvPr id="220" name="tx220"/>
+            <p:cNvSpPr/>
+            <p:nvPr/>
+          </p:nvSpPr>
+          <p:spPr>
+            <a:xfrm>
+              <a:off x="6567125" y="5579650"/>
+              <a:ext cx="692840" cy="72786"/>
             </a:xfrm>
             <a:prstGeom prst="rect">
               <a:avLst/>
@@ -10573,7 +10616,7 @@
                 </a:spcAft>
               </a:pPr>
               <a:r>
-                <a:rPr sz="720" i="0" b="0">
+                <a:rPr sz="800" i="0" b="0">
                   <a:solidFill>
                     <a:srgbClr val="262626">
                       <a:alpha val="100000"/>
@@ -10589,14 +10632,14 @@
         </p:sp>
         <p:sp>
           <p:nvSpPr>
-            <p:cNvPr id="220" name="tx220"/>
-            <p:cNvSpPr/>
-            <p:nvPr/>
-          </p:nvSpPr>
-          <p:spPr>
-            <a:xfrm>
-              <a:off x="6326638" y="5174907"/>
-              <a:ext cx="780989" cy="65379"/>
+            <p:cNvPr id="221" name="tx221"/>
+            <p:cNvSpPr/>
+            <p:nvPr/>
+          </p:nvSpPr>
+          <p:spPr>
+            <a:xfrm>
+              <a:off x="6390189" y="5282657"/>
+              <a:ext cx="869777" cy="72786"/>
             </a:xfrm>
             <a:prstGeom prst="rect">
               <a:avLst/>
@@ -10616,7 +10659,7 @@
                 </a:spcAft>
               </a:pPr>
               <a:r>
-                <a:rPr sz="720" i="0" b="0">
+                <a:rPr sz="800" i="0" b="0">
                   <a:solidFill>
                     <a:srgbClr val="262626">
                       <a:alpha val="100000"/>
@@ -10632,14 +10675,14 @@
         </p:sp>
         <p:sp>
           <p:nvSpPr>
-            <p:cNvPr id="221" name="tx221"/>
-            <p:cNvSpPr/>
-            <p:nvPr/>
-          </p:nvSpPr>
-          <p:spPr>
-            <a:xfrm>
-              <a:off x="6047472" y="4841567"/>
-              <a:ext cx="1060155" cy="65379"/>
+            <p:cNvPr id="222" name="tx222"/>
+            <p:cNvSpPr/>
+            <p:nvPr/>
+          </p:nvSpPr>
+          <p:spPr>
+            <a:xfrm>
+              <a:off x="6079293" y="4985665"/>
+              <a:ext cx="1180673" cy="72786"/>
             </a:xfrm>
             <a:prstGeom prst="rect">
               <a:avLst/>
@@ -10659,7 +10702,7 @@
                 </a:spcAft>
               </a:pPr>
               <a:r>
-                <a:rPr sz="720" i="0" b="0">
+                <a:rPr sz="800" i="0" b="0">
                   <a:solidFill>
                     <a:srgbClr val="262626">
                       <a:alpha val="100000"/>
@@ -10675,24 +10718,24 @@
         </p:sp>
         <p:sp>
           <p:nvSpPr>
-            <p:cNvPr id="222" name="pl222"/>
-            <p:cNvSpPr/>
-            <p:nvPr/>
-          </p:nvSpPr>
-          <p:spPr>
-            <a:xfrm>
-              <a:off x="7130402" y="6540955"/>
-              <a:ext cx="28468" cy="0"/>
+            <p:cNvPr id="223" name="pl223"/>
+            <p:cNvSpPr/>
+            <p:nvPr/>
+          </p:nvSpPr>
+          <p:spPr>
+            <a:xfrm>
+              <a:off x="7285271" y="6507021"/>
+              <a:ext cx="31631" cy="0"/>
             </a:xfrm>
             <a:custGeom>
               <a:avLst/>
               <a:pathLst>
-                <a:path w="28468" h="0">
+                <a:path w="31631" h="0">
                   <a:moveTo>
                     <a:pt x="0" y="0"/>
                   </a:moveTo>
                   <a:lnTo>
-                    <a:pt x="28468" y="0"/>
+                    <a:pt x="31631" y="0"/>
                   </a:lnTo>
                 </a:path>
               </a:pathLst>
@@ -10715,24 +10758,24 @@
         </p:sp>
         <p:sp>
           <p:nvSpPr>
-            <p:cNvPr id="223" name="pl223"/>
-            <p:cNvSpPr/>
-            <p:nvPr/>
-          </p:nvSpPr>
-          <p:spPr>
-            <a:xfrm>
-              <a:off x="7130402" y="6207615"/>
-              <a:ext cx="28468" cy="0"/>
+            <p:cNvPr id="224" name="pl224"/>
+            <p:cNvSpPr/>
+            <p:nvPr/>
+          </p:nvSpPr>
+          <p:spPr>
+            <a:xfrm>
+              <a:off x="7285271" y="6210028"/>
+              <a:ext cx="31631" cy="0"/>
             </a:xfrm>
             <a:custGeom>
               <a:avLst/>
               <a:pathLst>
-                <a:path w="28468" h="0">
+                <a:path w="31631" h="0">
                   <a:moveTo>
                     <a:pt x="0" y="0"/>
                   </a:moveTo>
                   <a:lnTo>
-                    <a:pt x="28468" y="0"/>
+                    <a:pt x="31631" y="0"/>
                   </a:lnTo>
                 </a:path>
               </a:pathLst>
@@ -10755,24 +10798,24 @@
         </p:sp>
         <p:sp>
           <p:nvSpPr>
-            <p:cNvPr id="224" name="pl224"/>
-            <p:cNvSpPr/>
-            <p:nvPr/>
-          </p:nvSpPr>
-          <p:spPr>
-            <a:xfrm>
-              <a:off x="7130402" y="5874276"/>
-              <a:ext cx="28468" cy="0"/>
+            <p:cNvPr id="225" name="pl225"/>
+            <p:cNvSpPr/>
+            <p:nvPr/>
+          </p:nvSpPr>
+          <p:spPr>
+            <a:xfrm>
+              <a:off x="7285271" y="5913036"/>
+              <a:ext cx="31631" cy="0"/>
             </a:xfrm>
             <a:custGeom>
               <a:avLst/>
               <a:pathLst>
-                <a:path w="28468" h="0">
+                <a:path w="31631" h="0">
                   <a:moveTo>
                     <a:pt x="0" y="0"/>
                   </a:moveTo>
                   <a:lnTo>
-                    <a:pt x="28468" y="0"/>
+                    <a:pt x="31631" y="0"/>
                   </a:lnTo>
                 </a:path>
               </a:pathLst>
@@ -10795,24 +10838,24 @@
         </p:sp>
         <p:sp>
           <p:nvSpPr>
-            <p:cNvPr id="225" name="pl225"/>
-            <p:cNvSpPr/>
-            <p:nvPr/>
-          </p:nvSpPr>
-          <p:spPr>
-            <a:xfrm>
-              <a:off x="7130402" y="5540936"/>
-              <a:ext cx="28468" cy="0"/>
+            <p:cNvPr id="226" name="pl226"/>
+            <p:cNvSpPr/>
+            <p:nvPr/>
+          </p:nvSpPr>
+          <p:spPr>
+            <a:xfrm>
+              <a:off x="7285271" y="5616043"/>
+              <a:ext cx="31631" cy="0"/>
             </a:xfrm>
             <a:custGeom>
               <a:avLst/>
               <a:pathLst>
-                <a:path w="28468" h="0">
+                <a:path w="31631" h="0">
                   <a:moveTo>
                     <a:pt x="0" y="0"/>
                   </a:moveTo>
                   <a:lnTo>
-                    <a:pt x="28468" y="0"/>
+                    <a:pt x="31631" y="0"/>
                   </a:lnTo>
                 </a:path>
               </a:pathLst>
@@ -10835,24 +10878,24 @@
         </p:sp>
         <p:sp>
           <p:nvSpPr>
-            <p:cNvPr id="226" name="pl226"/>
-            <p:cNvSpPr/>
-            <p:nvPr/>
-          </p:nvSpPr>
-          <p:spPr>
-            <a:xfrm>
-              <a:off x="7130402" y="5207597"/>
-              <a:ext cx="28468" cy="0"/>
+            <p:cNvPr id="227" name="pl227"/>
+            <p:cNvSpPr/>
+            <p:nvPr/>
+          </p:nvSpPr>
+          <p:spPr>
+            <a:xfrm>
+              <a:off x="7285271" y="5319050"/>
+              <a:ext cx="31631" cy="0"/>
             </a:xfrm>
             <a:custGeom>
               <a:avLst/>
               <a:pathLst>
-                <a:path w="28468" h="0">
+                <a:path w="31631" h="0">
                   <a:moveTo>
                     <a:pt x="0" y="0"/>
                   </a:moveTo>
                   <a:lnTo>
-                    <a:pt x="28468" y="0"/>
+                    <a:pt x="31631" y="0"/>
                   </a:lnTo>
                 </a:path>
               </a:pathLst>
@@ -10875,24 +10918,24 @@
         </p:sp>
         <p:sp>
           <p:nvSpPr>
-            <p:cNvPr id="227" name="pl227"/>
-            <p:cNvSpPr/>
-            <p:nvPr/>
-          </p:nvSpPr>
-          <p:spPr>
-            <a:xfrm>
-              <a:off x="7130402" y="4874257"/>
-              <a:ext cx="28468" cy="0"/>
+            <p:cNvPr id="228" name="pl228"/>
+            <p:cNvSpPr/>
+            <p:nvPr/>
+          </p:nvSpPr>
+          <p:spPr>
+            <a:xfrm>
+              <a:off x="7285271" y="5022058"/>
+              <a:ext cx="31631" cy="0"/>
             </a:xfrm>
             <a:custGeom>
               <a:avLst/>
               <a:pathLst>
-                <a:path w="28468" h="0">
+                <a:path w="31631" h="0">
                   <a:moveTo>
                     <a:pt x="0" y="0"/>
                   </a:moveTo>
                   <a:lnTo>
-                    <a:pt x="28468" y="0"/>
+                    <a:pt x="31631" y="0"/>
                   </a:lnTo>
                 </a:path>
               </a:pathLst>
@@ -10915,24 +10958,24 @@
         </p:sp>
         <p:sp>
           <p:nvSpPr>
-            <p:cNvPr id="228" name="pl228"/>
-            <p:cNvSpPr/>
-            <p:nvPr/>
-          </p:nvSpPr>
-          <p:spPr>
-            <a:xfrm>
-              <a:off x="7158870" y="6740958"/>
-              <a:ext cx="3826000" cy="0"/>
+            <p:cNvPr id="229" name="pl229"/>
+            <p:cNvSpPr/>
+            <p:nvPr/>
+          </p:nvSpPr>
+          <p:spPr>
+            <a:xfrm>
+              <a:off x="7316903" y="6685217"/>
+              <a:ext cx="3667967" cy="0"/>
             </a:xfrm>
             <a:custGeom>
               <a:avLst/>
               <a:pathLst>
-                <a:path w="3826000" h="0">
+                <a:path w="3667967" h="0">
                   <a:moveTo>
                     <a:pt x="0" y="0"/>
                   </a:moveTo>
                   <a:lnTo>
-                    <a:pt x="3826000" y="0"/>
+                    <a:pt x="3667967" y="0"/>
                   </a:lnTo>
                 </a:path>
               </a:pathLst>
@@ -10955,21 +10998,21 @@
         </p:sp>
         <p:sp>
           <p:nvSpPr>
-            <p:cNvPr id="229" name="pl229"/>
-            <p:cNvSpPr/>
-            <p:nvPr/>
-          </p:nvSpPr>
-          <p:spPr>
-            <a:xfrm>
-              <a:off x="7734108" y="6740958"/>
-              <a:ext cx="0" cy="28468"/>
+            <p:cNvPr id="230" name="pl230"/>
+            <p:cNvSpPr/>
+            <p:nvPr/>
+          </p:nvSpPr>
+          <p:spPr>
+            <a:xfrm>
+              <a:off x="7868380" y="6685217"/>
+              <a:ext cx="0" cy="31631"/>
             </a:xfrm>
             <a:custGeom>
               <a:avLst/>
               <a:pathLst>
-                <a:path w="0" h="28468">
+                <a:path w="0" h="31631">
                   <a:moveTo>
-                    <a:pt x="0" y="28468"/>
+                    <a:pt x="0" y="31631"/>
                   </a:moveTo>
                   <a:lnTo>
                     <a:pt x="0" y="0"/>
@@ -10995,21 +11038,21 @@
         </p:sp>
         <p:sp>
           <p:nvSpPr>
-            <p:cNvPr id="230" name="pl230"/>
-            <p:cNvSpPr/>
-            <p:nvPr/>
-          </p:nvSpPr>
-          <p:spPr>
-            <a:xfrm>
-              <a:off x="8804318" y="6740958"/>
-              <a:ext cx="0" cy="28468"/>
+            <p:cNvPr id="231" name="pl231"/>
+            <p:cNvSpPr/>
+            <p:nvPr/>
+          </p:nvSpPr>
+          <p:spPr>
+            <a:xfrm>
+              <a:off x="8894385" y="6685217"/>
+              <a:ext cx="0" cy="31631"/>
             </a:xfrm>
             <a:custGeom>
               <a:avLst/>
               <a:pathLst>
-                <a:path w="0" h="28468">
+                <a:path w="0" h="31631">
                   <a:moveTo>
-                    <a:pt x="0" y="28468"/>
+                    <a:pt x="0" y="31631"/>
                   </a:moveTo>
                   <a:lnTo>
                     <a:pt x="0" y="0"/>
@@ -11035,21 +11078,21 @@
         </p:sp>
         <p:sp>
           <p:nvSpPr>
-            <p:cNvPr id="231" name="pl231"/>
-            <p:cNvSpPr/>
-            <p:nvPr/>
-          </p:nvSpPr>
-          <p:spPr>
-            <a:xfrm>
-              <a:off x="9874527" y="6740958"/>
-              <a:ext cx="0" cy="28468"/>
+            <p:cNvPr id="232" name="pl232"/>
+            <p:cNvSpPr/>
+            <p:nvPr/>
+          </p:nvSpPr>
+          <p:spPr>
+            <a:xfrm>
+              <a:off x="9920390" y="6685217"/>
+              <a:ext cx="0" cy="31631"/>
             </a:xfrm>
             <a:custGeom>
               <a:avLst/>
               <a:pathLst>
-                <a:path w="0" h="28468">
+                <a:path w="0" h="31631">
                   <a:moveTo>
-                    <a:pt x="0" y="28468"/>
+                    <a:pt x="0" y="31631"/>
                   </a:moveTo>
                   <a:lnTo>
                     <a:pt x="0" y="0"/>
@@ -11075,21 +11118,21 @@
         </p:sp>
         <p:sp>
           <p:nvSpPr>
-            <p:cNvPr id="232" name="pl232"/>
-            <p:cNvSpPr/>
-            <p:nvPr/>
-          </p:nvSpPr>
-          <p:spPr>
-            <a:xfrm>
-              <a:off x="10944737" y="6740958"/>
-              <a:ext cx="0" cy="28468"/>
+            <p:cNvPr id="233" name="pl233"/>
+            <p:cNvSpPr/>
+            <p:nvPr/>
+          </p:nvSpPr>
+          <p:spPr>
+            <a:xfrm>
+              <a:off x="10946395" y="6685217"/>
+              <a:ext cx="0" cy="31631"/>
             </a:xfrm>
             <a:custGeom>
               <a:avLst/>
               <a:pathLst>
-                <a:path w="0" h="28468">
+                <a:path w="0" h="31631">
                   <a:moveTo>
-                    <a:pt x="0" y="28468"/>
+                    <a:pt x="0" y="31631"/>
                   </a:moveTo>
                   <a:lnTo>
                     <a:pt x="0" y="0"/>
@@ -11115,14 +11158,14 @@
         </p:sp>
         <p:sp>
           <p:nvSpPr>
-            <p:cNvPr id="233" name="tx233"/>
-            <p:cNvSpPr/>
-            <p:nvPr/>
-          </p:nvSpPr>
-          <p:spPr>
-            <a:xfrm>
-              <a:off x="7655515" y="6792201"/>
-              <a:ext cx="157185" cy="65379"/>
+            <p:cNvPr id="234" name="tx234"/>
+            <p:cNvSpPr/>
+            <p:nvPr/>
+          </p:nvSpPr>
+          <p:spPr>
+            <a:xfrm>
+              <a:off x="7780826" y="6742153"/>
+              <a:ext cx="175107" cy="72786"/>
             </a:xfrm>
             <a:prstGeom prst="rect">
               <a:avLst/>
@@ -11142,7 +11185,7 @@
                 </a:spcAft>
               </a:pPr>
               <a:r>
-                <a:rPr sz="720" i="0" b="0">
+                <a:rPr sz="800" i="0" b="0">
                   <a:solidFill>
                     <a:srgbClr val="262626">
                       <a:alpha val="100000"/>
@@ -11158,14 +11201,14 @@
         </p:sp>
         <p:sp>
           <p:nvSpPr>
-            <p:cNvPr id="234" name="tx234"/>
-            <p:cNvSpPr/>
-            <p:nvPr/>
-          </p:nvSpPr>
-          <p:spPr>
-            <a:xfrm>
-              <a:off x="8740904" y="6792201"/>
-              <a:ext cx="126827" cy="65379"/>
+            <p:cNvPr id="235" name="tx235"/>
+            <p:cNvSpPr/>
+            <p:nvPr/>
+          </p:nvSpPr>
+          <p:spPr>
+            <a:xfrm>
+              <a:off x="8823748" y="6742153"/>
+              <a:ext cx="141274" cy="72786"/>
             </a:xfrm>
             <a:prstGeom prst="rect">
               <a:avLst/>
@@ -11185,7 +11228,7 @@
                 </a:spcAft>
               </a:pPr>
               <a:r>
-                <a:rPr sz="720" i="0" b="0">
+                <a:rPr sz="800" i="0" b="0">
                   <a:solidFill>
                     <a:srgbClr val="262626">
                       <a:alpha val="100000"/>
@@ -11201,14 +11244,14 @@
         </p:sp>
         <p:sp>
           <p:nvSpPr>
-            <p:cNvPr id="235" name="tx235"/>
-            <p:cNvSpPr/>
-            <p:nvPr/>
-          </p:nvSpPr>
-          <p:spPr>
-            <a:xfrm>
-              <a:off x="9811114" y="6792201"/>
-              <a:ext cx="126827" cy="65379"/>
+            <p:cNvPr id="236" name="tx236"/>
+            <p:cNvSpPr/>
+            <p:nvPr/>
+          </p:nvSpPr>
+          <p:spPr>
+            <a:xfrm>
+              <a:off x="9849753" y="6742153"/>
+              <a:ext cx="141274" cy="72786"/>
             </a:xfrm>
             <a:prstGeom prst="rect">
               <a:avLst/>
@@ -11228,7 +11271,7 @@
                 </a:spcAft>
               </a:pPr>
               <a:r>
-                <a:rPr sz="720" i="0" b="0">
+                <a:rPr sz="800" i="0" b="0">
                   <a:solidFill>
                     <a:srgbClr val="262626">
                       <a:alpha val="100000"/>
@@ -11244,14 +11287,14 @@
         </p:sp>
         <p:sp>
           <p:nvSpPr>
-            <p:cNvPr id="236" name="tx236"/>
-            <p:cNvSpPr/>
-            <p:nvPr/>
-          </p:nvSpPr>
-          <p:spPr>
-            <a:xfrm>
-              <a:off x="10881324" y="6792201"/>
-              <a:ext cx="126827" cy="65379"/>
+            <p:cNvPr id="237" name="tx237"/>
+            <p:cNvSpPr/>
+            <p:nvPr/>
+          </p:nvSpPr>
+          <p:spPr>
+            <a:xfrm>
+              <a:off x="10875757" y="6742153"/>
+              <a:ext cx="141274" cy="72786"/>
             </a:xfrm>
             <a:prstGeom prst="rect">
               <a:avLst/>
@@ -11271,7 +11314,7 @@
                 </a:spcAft>
               </a:pPr>
               <a:r>
-                <a:rPr sz="720" i="0" b="0">
+                <a:rPr sz="800" i="0" b="0">
                   <a:solidFill>
                     <a:srgbClr val="262626">
                       <a:alpha val="100000"/>
@@ -11287,14 +11330,14 @@
         </p:sp>
         <p:sp>
           <p:nvSpPr>
-            <p:cNvPr id="237" name="tx237"/>
-            <p:cNvSpPr/>
-            <p:nvPr/>
-          </p:nvSpPr>
-          <p:spPr>
-            <a:xfrm>
-              <a:off x="8052451" y="6905160"/>
-              <a:ext cx="2038837" cy="81838"/>
+            <p:cNvPr id="238" name="tx238"/>
+            <p:cNvSpPr/>
+            <p:nvPr/>
+          </p:nvSpPr>
+          <p:spPr>
+            <a:xfrm>
+              <a:off x="8017213" y="6867968"/>
+              <a:ext cx="2267346" cy="90982"/>
             </a:xfrm>
             <a:prstGeom prst="rect">
               <a:avLst/>
@@ -11314,7 +11357,7 @@
                 </a:spcAft>
               </a:pPr>
               <a:r>
-                <a:rPr sz="900" i="0" b="0">
+                <a:rPr sz="1000" i="0" b="0">
                   <a:solidFill>
                     <a:srgbClr val="0D0D0D">
                       <a:alpha val="100000"/>
@@ -11330,14 +11373,14 @@
         </p:sp>
         <p:sp>
           <p:nvSpPr>
-            <p:cNvPr id="238" name="tx238"/>
-            <p:cNvSpPr/>
-            <p:nvPr/>
-          </p:nvSpPr>
-          <p:spPr>
-            <a:xfrm>
-              <a:off x="7158870" y="4521031"/>
-              <a:ext cx="3577315" cy="74432"/>
+            <p:cNvPr id="239" name="tx239"/>
+            <p:cNvSpPr/>
+            <p:nvPr/>
+          </p:nvSpPr>
+          <p:spPr>
+            <a:xfrm>
+              <a:off x="7316903" y="4546239"/>
+              <a:ext cx="2433126" cy="83576"/>
             </a:xfrm>
             <a:prstGeom prst="rect">
               <a:avLst/>
@@ -11357,7 +11400,7 @@
                 </a:spcAft>
               </a:pPr>
               <a:r>
-                <a:rPr sz="819" i="0" b="0">
+                <a:rPr sz="919" i="0" b="0">
                   <a:solidFill>
                     <a:srgbClr val="4D4D4D">
                       <a:alpha val="100000"/>
@@ -11366,21 +11409,21 @@
                   <a:latin typeface="Arial"/>
                   <a:cs typeface="Arial"/>
                 </a:rPr>
-                <a:t>Each predictor against the residuals of a model holding all the others constant</a:t>
+                <a:t>Each predictor against the residuals of a model</a:t>
               </a:r>
             </a:p>
           </p:txBody>
         </p:sp>
         <p:sp>
           <p:nvSpPr>
-            <p:cNvPr id="239" name="tx239"/>
-            <p:cNvSpPr/>
-            <p:nvPr/>
-          </p:nvSpPr>
-          <p:spPr>
-            <a:xfrm>
-              <a:off x="7158870" y="4346411"/>
-              <a:ext cx="1073322" cy="90982"/>
+            <p:cNvPr id="240" name="tx240"/>
+            <p:cNvSpPr/>
+            <p:nvPr/>
+          </p:nvSpPr>
+          <p:spPr>
+            <a:xfrm>
+              <a:off x="7316903" y="4672426"/>
+              <a:ext cx="1583375" cy="83576"/>
             </a:xfrm>
             <a:prstGeom prst="rect">
               <a:avLst/>
@@ -11400,7 +11443,50 @@
                 </a:spcAft>
               </a:pPr>
               <a:r>
-                <a:rPr sz="1000" i="0" b="1">
+                <a:rPr sz="919" i="0" b="0">
+                  <a:solidFill>
+                    <a:srgbClr val="4D4D4D">
+                      <a:alpha val="100000"/>
+                    </a:srgbClr>
+                  </a:solidFill>
+                  <a:latin typeface="Arial"/>
+                  <a:cs typeface="Arial"/>
+                </a:rPr>
+                <a:t> holding all the others constant</a:t>
+              </a:r>
+            </a:p>
+          </p:txBody>
+        </p:sp>
+        <p:sp>
+          <p:nvSpPr>
+            <p:cNvPr id="241" name="tx241"/>
+            <p:cNvSpPr/>
+            <p:nvPr/>
+          </p:nvSpPr>
+          <p:spPr>
+            <a:xfrm>
+              <a:off x="7316903" y="4353497"/>
+              <a:ext cx="1180673" cy="100035"/>
+            </a:xfrm>
+            <a:prstGeom prst="rect">
+              <a:avLst/>
+            </a:prstGeom>
+            <a:noFill/>
+          </p:spPr>
+          <p:txBody>
+            <a:bodyPr lIns="0" rIns="0" tIns="0" bIns="0" anchorCtr="1" anchor="ctr" wrap="none"/>
+            <a:lstStyle/>
+            <a:p>
+              <a:pPr algn="l" marL="0" marR="0" indent="0">
+                <a:spcBef>
+                  <a:spcPts val="0"/>
+                </a:spcBef>
+                <a:spcAft>
+                  <a:spcPts val="0"/>
+                </a:spcAft>
+              </a:pPr>
+              <a:r>
+                <a:rPr sz="1100" i="0" b="1">
                   <a:solidFill>
                     <a:srgbClr val="000000">
                       <a:alpha val="100000"/>
@@ -11416,14 +11502,14 @@
         </p:sp>
         <p:sp>
           <p:nvSpPr>
-            <p:cNvPr id="240" name="tx240"/>
-            <p:cNvSpPr/>
-            <p:nvPr/>
-          </p:nvSpPr>
-          <p:spPr>
-            <a:xfrm>
-              <a:off x="5750029" y="4336914"/>
-              <a:ext cx="93085" cy="109179"/>
+            <p:cNvPr id="242" name="tx242"/>
+            <p:cNvSpPr/>
+            <p:nvPr/>
+          </p:nvSpPr>
+          <p:spPr>
+            <a:xfrm>
+              <a:off x="5746143" y="4339367"/>
+              <a:ext cx="100858" cy="118231"/>
             </a:xfrm>
             <a:prstGeom prst="rect">
               <a:avLst/>
@@ -11443,7 +11529,7 @@
                 </a:spcAft>
               </a:pPr>
               <a:r>
-                <a:rPr sz="1200" i="0" b="1">
+                <a:rPr sz="1300" i="0" b="1">
                   <a:solidFill>
                     <a:srgbClr val="000000">
                       <a:alpha val="100000"/>

--- a/figures/Fig10_province_level_v2.pptx
+++ b/figures/Fig10_province_level_v2.pptx
@@ -2445,7 +2445,7 @@
           </p:nvSpPr>
           <p:spPr>
             <a:xfrm>
-              <a:off x="1900092" y="2558578"/>
+              <a:off x="1900092" y="2558318"/>
               <a:ext cx="1745629" cy="0"/>
             </a:xfrm>
             <a:custGeom>
@@ -2488,7 +2488,7 @@
           </p:nvSpPr>
           <p:spPr>
             <a:xfrm>
-              <a:off x="1900092" y="2015048"/>
+              <a:off x="1900092" y="2014527"/>
               <a:ext cx="1745629" cy="0"/>
             </a:xfrm>
             <a:custGeom>
@@ -2531,7 +2531,7 @@
           </p:nvSpPr>
           <p:spPr>
             <a:xfrm>
-              <a:off x="1900092" y="1471518"/>
+              <a:off x="1900092" y="1470737"/>
               <a:ext cx="1745629" cy="0"/>
             </a:xfrm>
             <a:custGeom>
@@ -2600,8 +2600,8 @@
           </p:nvSpPr>
           <p:spPr>
             <a:xfrm>
-              <a:off x="2609253" y="1762214"/>
-              <a:ext cx="327305" cy="1339893"/>
+              <a:off x="2609253" y="1761778"/>
+              <a:ext cx="327305" cy="1340329"/>
             </a:xfrm>
             <a:prstGeom prst="rect">
               <a:avLst/>
@@ -2626,8 +2626,8 @@
           </p:nvSpPr>
           <p:spPr>
             <a:xfrm>
-              <a:off x="3154763" y="1651951"/>
-              <a:ext cx="327305" cy="1450157"/>
+              <a:off x="3154763" y="1653331"/>
+              <a:ext cx="327305" cy="1448776"/>
             </a:xfrm>
             <a:prstGeom prst="rect">
               <a:avLst/>
@@ -2682,7 +2682,7 @@
                   <a:latin typeface="Arial"/>
                   <a:cs typeface="Arial"/>
                 </a:rPr>
-                <a:t>302.21</a:t>
+                <a:t>302.06</a:t>
               </a:r>
             </a:p>
           </p:txBody>
@@ -2695,7 +2695,7 @@
           </p:nvSpPr>
           <p:spPr>
             <a:xfrm>
-              <a:off x="2634878" y="1674939"/>
+              <a:off x="2634878" y="1674503"/>
               <a:ext cx="276057" cy="64648"/>
             </a:xfrm>
             <a:prstGeom prst="rect">
@@ -2725,7 +2725,7 @@
                   <a:latin typeface="Arial"/>
                   <a:cs typeface="Arial"/>
                 </a:rPr>
-                <a:t>246.52</a:t>
+                <a:t>246.48</a:t>
               </a:r>
             </a:p>
           </p:txBody>
@@ -2738,7 +2738,7 @@
           </p:nvSpPr>
           <p:spPr>
             <a:xfrm>
-              <a:off x="3180387" y="1564676"/>
+              <a:off x="3180387" y="1566056"/>
               <a:ext cx="276057" cy="64648"/>
             </a:xfrm>
             <a:prstGeom prst="rect">
@@ -2768,7 +2768,7 @@
                   <a:latin typeface="Arial"/>
                   <a:cs typeface="Arial"/>
                 </a:rPr>
-                <a:t>266.80</a:t>
+                <a:t>266.42</a:t>
               </a:r>
             </a:p>
           </p:txBody>
@@ -2850,7 +2850,7 @@
           </p:nvSpPr>
           <p:spPr>
             <a:xfrm>
-              <a:off x="3822430" y="2515977"/>
+              <a:off x="3822430" y="2514010"/>
               <a:ext cx="1745629" cy="0"/>
             </a:xfrm>
             <a:custGeom>
@@ -2893,7 +2893,7 @@
           </p:nvSpPr>
           <p:spPr>
             <a:xfrm>
-              <a:off x="3822430" y="1929846"/>
+              <a:off x="3822430" y="1925912"/>
               <a:ext cx="1745629" cy="0"/>
             </a:xfrm>
             <a:custGeom>
@@ -2936,7 +2936,7 @@
           </p:nvSpPr>
           <p:spPr>
             <a:xfrm>
-              <a:off x="3822430" y="1343715"/>
+              <a:off x="3822430" y="1337814"/>
               <a:ext cx="1745629" cy="0"/>
             </a:xfrm>
             <a:custGeom>
@@ -3005,8 +3005,8 @@
           </p:nvSpPr>
           <p:spPr>
             <a:xfrm>
-              <a:off x="4531592" y="2739865"/>
-              <a:ext cx="327305" cy="362243"/>
+              <a:off x="4531592" y="2740322"/>
+              <a:ext cx="327305" cy="361785"/>
             </a:xfrm>
             <a:prstGeom prst="rect">
               <a:avLst/>
@@ -3031,8 +3031,8 @@
           </p:nvSpPr>
           <p:spPr>
             <a:xfrm>
-              <a:off x="5077101" y="2657377"/>
-              <a:ext cx="327305" cy="444731"/>
+              <a:off x="5077101" y="2644366"/>
+              <a:ext cx="327305" cy="457741"/>
             </a:xfrm>
             <a:prstGeom prst="rect">
               <a:avLst/>
@@ -3057,7 +3057,7 @@
           </p:nvSpPr>
           <p:spPr>
             <a:xfrm>
-              <a:off x="3822430" y="2809043"/>
+              <a:off x="3822430" y="2808059"/>
               <a:ext cx="1745629" cy="0"/>
             </a:xfrm>
             <a:custGeom>
@@ -3130,7 +3130,7 @@
                   <a:latin typeface="Arial"/>
                   <a:cs typeface="Arial"/>
                 </a:rPr>
-                <a:t>5.60</a:t>
+                <a:t>5.59</a:t>
               </a:r>
             </a:p>
           </p:txBody>
@@ -3143,7 +3143,7 @@
           </p:nvSpPr>
           <p:spPr>
             <a:xfrm>
-              <a:off x="4607416" y="2652590"/>
+              <a:off x="4607416" y="2653047"/>
               <a:ext cx="175656" cy="64648"/>
             </a:xfrm>
             <a:prstGeom prst="rect">
@@ -3173,7 +3173,7 @@
                   <a:latin typeface="Arial"/>
                   <a:cs typeface="Arial"/>
                 </a:rPr>
-                <a:t>1.24</a:t>
+                <a:t>1.23</a:t>
               </a:r>
             </a:p>
           </p:txBody>
@@ -3186,7 +3186,7 @@
           </p:nvSpPr>
           <p:spPr>
             <a:xfrm>
-              <a:off x="5152925" y="2570102"/>
+              <a:off x="5152925" y="2557091"/>
               <a:ext cx="175656" cy="64648"/>
             </a:xfrm>
             <a:prstGeom prst="rect">
@@ -3216,7 +3216,7 @@
                   <a:latin typeface="Arial"/>
                   <a:cs typeface="Arial"/>
                 </a:rPr>
-                <a:t>1.52</a:t>
+                <a:t>1.56</a:t>
               </a:r>
             </a:p>
           </p:txBody>
@@ -3312,7 +3312,7 @@
           </p:nvSpPr>
           <p:spPr>
             <a:xfrm>
-              <a:off x="3708984" y="2479584"/>
+              <a:off x="3708984" y="2477617"/>
               <a:ext cx="56509" cy="72786"/>
             </a:xfrm>
             <a:prstGeom prst="rect">
@@ -3355,7 +3355,7 @@
           </p:nvSpPr>
           <p:spPr>
             <a:xfrm>
-              <a:off x="3708984" y="1893453"/>
+              <a:off x="3708984" y="1889519"/>
               <a:ext cx="56509" cy="72786"/>
             </a:xfrm>
             <a:prstGeom prst="rect">
@@ -3398,7 +3398,7 @@
           </p:nvSpPr>
           <p:spPr>
             <a:xfrm>
-              <a:off x="3708984" y="1307322"/>
+              <a:off x="3708984" y="1301421"/>
               <a:ext cx="56509" cy="72786"/>
             </a:xfrm>
             <a:prstGeom prst="rect">
@@ -3481,7 +3481,7 @@
           </p:nvSpPr>
           <p:spPr>
             <a:xfrm>
-              <a:off x="3790799" y="2515977"/>
+              <a:off x="3790799" y="2514010"/>
               <a:ext cx="31631" cy="0"/>
             </a:xfrm>
             <a:custGeom>
@@ -3521,7 +3521,7 @@
           </p:nvSpPr>
           <p:spPr>
             <a:xfrm>
-              <a:off x="3790799" y="1929846"/>
+              <a:off x="3790799" y="1925912"/>
               <a:ext cx="31631" cy="0"/>
             </a:xfrm>
             <a:custGeom>
@@ -3561,7 +3561,7 @@
           </p:nvSpPr>
           <p:spPr>
             <a:xfrm>
-              <a:off x="3790799" y="1343715"/>
+              <a:off x="3790799" y="1337814"/>
               <a:ext cx="31631" cy="0"/>
             </a:xfrm>
             <a:custGeom>
@@ -4348,7 +4348,7 @@
           </p:nvSpPr>
           <p:spPr>
             <a:xfrm>
-              <a:off x="1673625" y="2522185"/>
+              <a:off x="1673625" y="2521925"/>
               <a:ext cx="169529" cy="72786"/>
             </a:xfrm>
             <a:prstGeom prst="rect">
@@ -4391,7 +4391,7 @@
           </p:nvSpPr>
           <p:spPr>
             <a:xfrm>
-              <a:off x="1673625" y="1978655"/>
+              <a:off x="1673625" y="1978134"/>
               <a:ext cx="169529" cy="72786"/>
             </a:xfrm>
             <a:prstGeom prst="rect">
@@ -4434,7 +4434,7 @@
           </p:nvSpPr>
           <p:spPr>
             <a:xfrm>
-              <a:off x="1673625" y="1435125"/>
+              <a:off x="1673625" y="1434344"/>
               <a:ext cx="169529" cy="72786"/>
             </a:xfrm>
             <a:prstGeom prst="rect">
@@ -4517,7 +4517,7 @@
           </p:nvSpPr>
           <p:spPr>
             <a:xfrm>
-              <a:off x="1868460" y="2558578"/>
+              <a:off x="1868460" y="2558318"/>
               <a:ext cx="31631" cy="0"/>
             </a:xfrm>
             <a:custGeom>
@@ -4557,7 +4557,7 @@
           </p:nvSpPr>
           <p:spPr>
             <a:xfrm>
-              <a:off x="1868460" y="2015048"/>
+              <a:off x="1868460" y="2014527"/>
               <a:ext cx="31631" cy="0"/>
             </a:xfrm>
             <a:custGeom>
@@ -4597,7 +4597,7 @@
           </p:nvSpPr>
           <p:spPr>
             <a:xfrm>
-              <a:off x="1868460" y="1471518"/>
+              <a:off x="1868460" y="1470737"/>
               <a:ext cx="31631" cy="0"/>
             </a:xfrm>
             <a:custGeom>
@@ -4792,7 +4792,7 @@
           </p:nvSpPr>
           <p:spPr>
             <a:xfrm>
-              <a:off x="8412955" y="1163840"/>
+              <a:off x="8401919" y="1163840"/>
               <a:ext cx="0" cy="1938267"/>
             </a:xfrm>
             <a:custGeom>
@@ -4835,18 +4835,18 @@
           </p:nvSpPr>
           <p:spPr>
             <a:xfrm>
-              <a:off x="7995318" y="2914534"/>
-              <a:ext cx="618140" cy="0"/>
+              <a:off x="7987382" y="2601910"/>
+              <a:ext cx="621588" cy="0"/>
             </a:xfrm>
             <a:custGeom>
               <a:avLst/>
               <a:pathLst>
-                <a:path w="618140" h="0">
+                <a:path w="621588" h="0">
                   <a:moveTo>
                     <a:pt x="0" y="0"/>
                   </a:moveTo>
                   <a:lnTo>
-                    <a:pt x="618140" y="0"/>
+                    <a:pt x="621588" y="0"/>
                   </a:lnTo>
                 </a:path>
               </a:pathLst>
@@ -4875,18 +4875,18 @@
           </p:nvSpPr>
           <p:spPr>
             <a:xfrm>
-              <a:off x="7911324" y="2601910"/>
-              <a:ext cx="815430" cy="0"/>
+              <a:off x="7877781" y="2914534"/>
+              <a:ext cx="838327" cy="0"/>
             </a:xfrm>
             <a:custGeom>
               <a:avLst/>
               <a:pathLst>
-                <a:path w="815430" h="0">
+                <a:path w="838327" h="0">
                   <a:moveTo>
                     <a:pt x="0" y="0"/>
                   </a:moveTo>
                   <a:lnTo>
-                    <a:pt x="815430" y="0"/>
+                    <a:pt x="838327" y="0"/>
                   </a:lnTo>
                 </a:path>
               </a:pathLst>
@@ -4915,18 +4915,18 @@
           </p:nvSpPr>
           <p:spPr>
             <a:xfrm>
-              <a:off x="8432514" y="1351414"/>
-              <a:ext cx="545585" cy="0"/>
+              <a:off x="8422198" y="1351414"/>
+              <a:ext cx="551774" cy="0"/>
             </a:xfrm>
             <a:custGeom>
               <a:avLst/>
               <a:pathLst>
-                <a:path w="545585" h="0">
+                <a:path w="551774" h="0">
                   <a:moveTo>
                     <a:pt x="0" y="0"/>
                   </a:moveTo>
                   <a:lnTo>
-                    <a:pt x="545585" y="0"/>
+                    <a:pt x="551774" y="0"/>
                   </a:lnTo>
                 </a:path>
               </a:pathLst>
@@ -4955,18 +4955,18 @@
           </p:nvSpPr>
           <p:spPr>
             <a:xfrm>
-              <a:off x="8151457" y="1976662"/>
-              <a:ext cx="750029" cy="0"/>
+              <a:off x="8146594" y="1976662"/>
+              <a:ext cx="748621" cy="0"/>
             </a:xfrm>
             <a:custGeom>
               <a:avLst/>
               <a:pathLst>
-                <a:path w="750029" h="0">
+                <a:path w="748621" h="0">
                   <a:moveTo>
                     <a:pt x="0" y="0"/>
                   </a:moveTo>
                   <a:lnTo>
-                    <a:pt x="750029" y="0"/>
+                    <a:pt x="748621" y="0"/>
                   </a:lnTo>
                 </a:path>
               </a:pathLst>
@@ -4995,18 +4995,18 @@
           </p:nvSpPr>
           <p:spPr>
             <a:xfrm>
-              <a:off x="8336100" y="1664038"/>
-              <a:ext cx="549068" cy="0"/>
+              <a:off x="8324024" y="1664038"/>
+              <a:ext cx="545467" cy="0"/>
             </a:xfrm>
             <a:custGeom>
               <a:avLst/>
               <a:pathLst>
-                <a:path w="549068" h="0">
+                <a:path w="545467" h="0">
                   <a:moveTo>
                     <a:pt x="0" y="0"/>
                   </a:moveTo>
                   <a:lnTo>
-                    <a:pt x="549068" y="0"/>
+                    <a:pt x="545467" y="0"/>
                   </a:lnTo>
                 </a:path>
               </a:pathLst>
@@ -5035,18 +5035,18 @@
           </p:nvSpPr>
           <p:spPr>
             <a:xfrm>
-              <a:off x="8190153" y="2289286"/>
-              <a:ext cx="426666" cy="0"/>
+              <a:off x="8180425" y="2289286"/>
+              <a:ext cx="423805" cy="0"/>
             </a:xfrm>
             <a:custGeom>
               <a:avLst/>
               <a:pathLst>
-                <a:path w="426666" h="0">
+                <a:path w="423805" h="0">
                   <a:moveTo>
                     <a:pt x="0" y="0"/>
                   </a:moveTo>
                   <a:lnTo>
-                    <a:pt x="426666" y="0"/>
+                    <a:pt x="423805" y="0"/>
                   </a:lnTo>
                 </a:path>
               </a:pathLst>
@@ -5075,7 +5075,7 @@
           </p:nvSpPr>
           <p:spPr>
             <a:xfrm>
-              <a:off x="8273196" y="2883342"/>
+              <a:off x="8266984" y="2570718"/>
               <a:ext cx="62384" cy="62384"/>
             </a:xfrm>
             <a:prstGeom prst="ellipse">
@@ -5110,7 +5110,7 @@
           </p:nvSpPr>
           <p:spPr>
             <a:xfrm>
-              <a:off x="8287847" y="2570718"/>
+              <a:off x="8265753" y="2883342"/>
               <a:ext cx="62384" cy="62384"/>
             </a:xfrm>
             <a:prstGeom prst="ellipse">
@@ -5145,7 +5145,7 @@
           </p:nvSpPr>
           <p:spPr>
             <a:xfrm>
-              <a:off x="8674115" y="1320222"/>
+              <a:off x="8666893" y="1320222"/>
               <a:ext cx="62384" cy="62384"/>
             </a:xfrm>
             <a:prstGeom prst="ellipse">
@@ -5180,7 +5180,7 @@
           </p:nvSpPr>
           <p:spPr>
             <a:xfrm>
-              <a:off x="8495279" y="1945470"/>
+              <a:off x="8489713" y="1945470"/>
               <a:ext cx="62384" cy="62384"/>
             </a:xfrm>
             <a:prstGeom prst="ellipse">
@@ -5215,7 +5215,7 @@
           </p:nvSpPr>
           <p:spPr>
             <a:xfrm>
-              <a:off x="8579442" y="1632846"/>
+              <a:off x="8565565" y="1632846"/>
               <a:ext cx="62384" cy="62384"/>
             </a:xfrm>
             <a:prstGeom prst="ellipse">
@@ -5250,7 +5250,7 @@
           </p:nvSpPr>
           <p:spPr>
             <a:xfrm>
-              <a:off x="8372294" y="2258094"/>
+              <a:off x="8361136" y="2258094"/>
               <a:ext cx="62384" cy="62384"/>
             </a:xfrm>
             <a:prstGeom prst="ellipse">
@@ -5285,7 +5285,7 @@
           </p:nvSpPr>
           <p:spPr>
             <a:xfrm>
-              <a:off x="8227121" y="2803626"/>
+              <a:off x="8220909" y="2491002"/>
               <a:ext cx="154533" cy="56875"/>
             </a:xfrm>
             <a:prstGeom prst="rect">
@@ -5328,7 +5328,7 @@
           </p:nvSpPr>
           <p:spPr>
             <a:xfrm>
-              <a:off x="8241772" y="2491002"/>
+              <a:off x="8219678" y="2803626"/>
               <a:ext cx="154533" cy="56875"/>
             </a:xfrm>
             <a:prstGeom prst="rect">
@@ -5358,7 +5358,7 @@
                   <a:latin typeface="Arial"/>
                   <a:cs typeface="Arial"/>
                 </a:rPr>
-                <a:t>0.93</a:t>
+                <a:t>0.92</a:t>
               </a:r>
             </a:p>
           </p:txBody>
@@ -5371,7 +5371,7 @@
           </p:nvSpPr>
           <p:spPr>
             <a:xfrm>
-              <a:off x="8628040" y="1240507"/>
+              <a:off x="8620818" y="1240507"/>
               <a:ext cx="154533" cy="56875"/>
             </a:xfrm>
             <a:prstGeom prst="rect">
@@ -5414,7 +5414,7 @@
           </p:nvSpPr>
           <p:spPr>
             <a:xfrm>
-              <a:off x="8449204" y="1865755"/>
+              <a:off x="8443638" y="1865755"/>
               <a:ext cx="154533" cy="56875"/>
             </a:xfrm>
             <a:prstGeom prst="rect">
@@ -5457,7 +5457,7 @@
           </p:nvSpPr>
           <p:spPr>
             <a:xfrm>
-              <a:off x="8533368" y="1553131"/>
+              <a:off x="8519491" y="1553131"/>
               <a:ext cx="154533" cy="56875"/>
             </a:xfrm>
             <a:prstGeom prst="rect">
@@ -5500,7 +5500,7 @@
           </p:nvSpPr>
           <p:spPr>
             <a:xfrm>
-              <a:off x="8326220" y="2178378"/>
+              <a:off x="8315061" y="2178378"/>
               <a:ext cx="154533" cy="56875"/>
             </a:xfrm>
             <a:prstGeom prst="rect">
@@ -5569,7 +5569,7 @@
           </p:nvSpPr>
           <p:spPr>
             <a:xfrm>
-              <a:off x="10278570" y="1163840"/>
+              <a:off x="10267534" y="1163840"/>
               <a:ext cx="0" cy="1938267"/>
             </a:xfrm>
             <a:custGeom>
@@ -5612,18 +5612,18 @@
           </p:nvSpPr>
           <p:spPr>
             <a:xfrm>
-              <a:off x="9468884" y="2914534"/>
-              <a:ext cx="763842" cy="0"/>
+              <a:off x="9453002" y="2601910"/>
+              <a:ext cx="754210" cy="0"/>
             </a:xfrm>
             <a:custGeom>
               <a:avLst/>
               <a:pathLst>
-                <a:path w="763842" h="0">
+                <a:path w="754210" h="0">
                   <a:moveTo>
                     <a:pt x="0" y="0"/>
                   </a:moveTo>
                   <a:lnTo>
-                    <a:pt x="763842" y="0"/>
+                    <a:pt x="754210" y="0"/>
                   </a:lnTo>
                 </a:path>
               </a:pathLst>
@@ -5652,18 +5652,18 @@
           </p:nvSpPr>
           <p:spPr>
             <a:xfrm>
-              <a:off x="9772311" y="1351414"/>
-              <a:ext cx="729355" cy="0"/>
+              <a:off x="9743726" y="1351414"/>
+              <a:ext cx="720192" cy="0"/>
             </a:xfrm>
             <a:custGeom>
               <a:avLst/>
               <a:pathLst>
-                <a:path w="729355" h="0">
+                <a:path w="720192" h="0">
                   <a:moveTo>
                     <a:pt x="0" y="0"/>
                   </a:moveTo>
                   <a:lnTo>
-                    <a:pt x="729355" y="0"/>
+                    <a:pt x="720192" y="0"/>
                   </a:lnTo>
                 </a:path>
               </a:pathLst>
@@ -5693,17 +5693,17 @@
           <p:spPr>
             <a:xfrm>
               <a:off x="9264443" y="1976662"/>
-              <a:ext cx="800980" cy="0"/>
+              <a:ext cx="791220" cy="0"/>
             </a:xfrm>
             <a:custGeom>
               <a:avLst/>
               <a:pathLst>
-                <a:path w="800980" h="0">
+                <a:path w="791220" h="0">
                   <a:moveTo>
                     <a:pt x="0" y="0"/>
                   </a:moveTo>
                   <a:lnTo>
-                    <a:pt x="800980" y="0"/>
+                    <a:pt x="791220" y="0"/>
                   </a:lnTo>
                 </a:path>
               </a:pathLst>
@@ -5732,18 +5732,18 @@
           </p:nvSpPr>
           <p:spPr>
             <a:xfrm>
-              <a:off x="10113078" y="1664038"/>
-              <a:ext cx="789867" cy="0"/>
+              <a:off x="10123211" y="1664038"/>
+              <a:ext cx="779733" cy="0"/>
             </a:xfrm>
             <a:custGeom>
               <a:avLst/>
               <a:pathLst>
-                <a:path w="789867" h="0">
+                <a:path w="779733" h="0">
                   <a:moveTo>
                     <a:pt x="0" y="0"/>
                   </a:moveTo>
                   <a:lnTo>
-                    <a:pt x="789867" y="0"/>
+                    <a:pt x="779733" y="0"/>
                   </a:lnTo>
                 </a:path>
               </a:pathLst>
@@ -5772,18 +5772,18 @@
           </p:nvSpPr>
           <p:spPr>
             <a:xfrm>
-              <a:off x="10008800" y="2289286"/>
-              <a:ext cx="616868" cy="0"/>
+              <a:off x="10001880" y="2289286"/>
+              <a:ext cx="609219" cy="0"/>
             </a:xfrm>
             <a:custGeom>
               <a:avLst/>
               <a:pathLst>
-                <a:path w="616868" h="0">
+                <a:path w="609219" h="0">
                   <a:moveTo>
                     <a:pt x="0" y="0"/>
                   </a:moveTo>
                   <a:lnTo>
-                    <a:pt x="616868" y="0"/>
+                    <a:pt x="609219" y="0"/>
                   </a:lnTo>
                 </a:path>
               </a:pathLst>
@@ -5812,7 +5812,7 @@
           </p:nvSpPr>
           <p:spPr>
             <a:xfrm>
-              <a:off x="9819613" y="2883342"/>
+              <a:off x="9798915" y="2570718"/>
               <a:ext cx="62384" cy="62384"/>
             </a:xfrm>
             <a:prstGeom prst="ellipse">
@@ -5847,7 +5847,7 @@
           </p:nvSpPr>
           <p:spPr>
             <a:xfrm>
-              <a:off x="10105796" y="1320222"/>
+              <a:off x="10072630" y="1320222"/>
               <a:ext cx="62384" cy="62384"/>
             </a:xfrm>
             <a:prstGeom prst="ellipse">
@@ -5882,7 +5882,7 @@
           </p:nvSpPr>
           <p:spPr>
             <a:xfrm>
-              <a:off x="9633741" y="1945470"/>
+              <a:off x="9628861" y="1945470"/>
               <a:ext cx="62384" cy="62384"/>
             </a:xfrm>
             <a:prstGeom prst="ellipse">
@@ -5917,7 +5917,7 @@
           </p:nvSpPr>
           <p:spPr>
             <a:xfrm>
-              <a:off x="10476819" y="1632846"/>
+              <a:off x="10481886" y="1632846"/>
               <a:ext cx="62384" cy="62384"/>
             </a:xfrm>
             <a:prstGeom prst="ellipse">
@@ -5952,7 +5952,7 @@
           </p:nvSpPr>
           <p:spPr>
             <a:xfrm>
-              <a:off x="10286042" y="2258094"/>
+              <a:off x="10275298" y="2258094"/>
               <a:ext cx="62384" cy="62384"/>
             </a:xfrm>
             <a:prstGeom prst="ellipse">
@@ -5987,7 +5987,7 @@
           </p:nvSpPr>
           <p:spPr>
             <a:xfrm>
-              <a:off x="9773538" y="2803626"/>
+              <a:off x="9752841" y="2491002"/>
               <a:ext cx="154533" cy="56875"/>
             </a:xfrm>
             <a:prstGeom prst="rect">
@@ -6017,7 +6017,7 @@
                   <a:latin typeface="Arial"/>
                   <a:cs typeface="Arial"/>
                 </a:rPr>
-                <a:t>0.71</a:t>
+                <a:t>0.70</a:t>
               </a:r>
             </a:p>
           </p:txBody>
@@ -6030,7 +6030,7 @@
           </p:nvSpPr>
           <p:spPr>
             <a:xfrm>
-              <a:off x="10059722" y="1240507"/>
+              <a:off x="10026555" y="1240507"/>
               <a:ext cx="154533" cy="56875"/>
             </a:xfrm>
             <a:prstGeom prst="rect">
@@ -6060,7 +6060,7 @@
                   <a:latin typeface="Arial"/>
                   <a:cs typeface="Arial"/>
                 </a:rPr>
-                <a:t>0.89</a:t>
+                <a:t>0.88</a:t>
               </a:r>
             </a:p>
           </p:txBody>
@@ -6073,7 +6073,7 @@
           </p:nvSpPr>
           <p:spPr>
             <a:xfrm>
-              <a:off x="9587666" y="1865755"/>
+              <a:off x="9582786" y="1865755"/>
               <a:ext cx="154533" cy="56875"/>
             </a:xfrm>
             <a:prstGeom prst="rect">
@@ -6116,7 +6116,7 @@
           </p:nvSpPr>
           <p:spPr>
             <a:xfrm>
-              <a:off x="10430745" y="1553131"/>
+              <a:off x="10435811" y="1553131"/>
               <a:ext cx="154533" cy="56875"/>
             </a:xfrm>
             <a:prstGeom prst="rect">
@@ -6146,7 +6146,7 @@
                   <a:latin typeface="Arial"/>
                   <a:cs typeface="Arial"/>
                 </a:rPr>
-                <a:t>1.20</a:t>
+                <a:t>1.22</a:t>
               </a:r>
             </a:p>
           </p:txBody>
@@ -6159,7 +6159,7 @@
           </p:nvSpPr>
           <p:spPr>
             <a:xfrm>
-              <a:off x="10239967" y="2178378"/>
+              <a:off x="10229223" y="2178378"/>
               <a:ext cx="154533" cy="56875"/>
             </a:xfrm>
             <a:prstGeom prst="rect">
@@ -6328,7 +6328,7 @@
           </p:nvSpPr>
           <p:spPr>
             <a:xfrm>
-              <a:off x="7556455" y="3102108"/>
+              <a:off x="7550650" y="3102108"/>
               <a:ext cx="0" cy="31631"/>
             </a:xfrm>
             <a:custGeom>
@@ -6368,7 +6368,7 @@
           </p:nvSpPr>
           <p:spPr>
             <a:xfrm>
-              <a:off x="7972223" y="3102108"/>
+              <a:off x="7963879" y="3102108"/>
               <a:ext cx="0" cy="31631"/>
             </a:xfrm>
             <a:custGeom>
@@ -6408,7 +6408,7 @@
           </p:nvSpPr>
           <p:spPr>
             <a:xfrm>
-              <a:off x="8412955" y="3102108"/>
+              <a:off x="8401919" y="3102108"/>
               <a:ext cx="0" cy="31631"/>
             </a:xfrm>
             <a:custGeom>
@@ -6448,7 +6448,7 @@
           </p:nvSpPr>
           <p:spPr>
             <a:xfrm>
-              <a:off x="7485818" y="3159044"/>
+              <a:off x="7480013" y="3159044"/>
               <a:ext cx="141274" cy="72786"/>
             </a:xfrm>
             <a:prstGeom prst="rect">
@@ -6491,7 +6491,7 @@
           </p:nvSpPr>
           <p:spPr>
             <a:xfrm>
-              <a:off x="7901586" y="3159044"/>
+              <a:off x="7893242" y="3159044"/>
               <a:ext cx="141274" cy="72786"/>
             </a:xfrm>
             <a:prstGeom prst="rect">
@@ -6534,7 +6534,7 @@
           </p:nvSpPr>
           <p:spPr>
             <a:xfrm>
-              <a:off x="8342317" y="3159044"/>
+              <a:off x="8331282" y="3159044"/>
               <a:ext cx="141274" cy="72786"/>
             </a:xfrm>
             <a:prstGeom prst="rect">
@@ -6617,7 +6617,7 @@
           </p:nvSpPr>
           <p:spPr>
             <a:xfrm>
-              <a:off x="9422070" y="3102108"/>
+              <a:off x="9416266" y="3102108"/>
               <a:ext cx="0" cy="31631"/>
             </a:xfrm>
             <a:custGeom>
@@ -6657,7 +6657,7 @@
           </p:nvSpPr>
           <p:spPr>
             <a:xfrm>
-              <a:off x="9837838" y="3102108"/>
+              <a:off x="9829494" y="3102108"/>
               <a:ext cx="0" cy="31631"/>
             </a:xfrm>
             <a:custGeom>
@@ -6697,7 +6697,7 @@
           </p:nvSpPr>
           <p:spPr>
             <a:xfrm>
-              <a:off x="10278570" y="3102108"/>
+              <a:off x="10267534" y="3102108"/>
               <a:ext cx="0" cy="31631"/>
             </a:xfrm>
             <a:custGeom>
@@ -6737,7 +6737,7 @@
           </p:nvSpPr>
           <p:spPr>
             <a:xfrm>
-              <a:off x="9351433" y="3159044"/>
+              <a:off x="9345628" y="3159044"/>
               <a:ext cx="141274" cy="72786"/>
             </a:xfrm>
             <a:prstGeom prst="rect">
@@ -6780,7 +6780,7 @@
           </p:nvSpPr>
           <p:spPr>
             <a:xfrm>
-              <a:off x="9767201" y="3159044"/>
+              <a:off x="9758857" y="3159044"/>
               <a:ext cx="141274" cy="72786"/>
             </a:xfrm>
             <a:prstGeom prst="rect">
@@ -6823,7 +6823,7 @@
           </p:nvSpPr>
           <p:spPr>
             <a:xfrm>
-              <a:off x="10207932" y="3159044"/>
+              <a:off x="10196897" y="3159044"/>
               <a:ext cx="141274" cy="72786"/>
             </a:xfrm>
             <a:prstGeom prst="rect">
@@ -6906,7 +6906,50 @@
           </p:nvSpPr>
           <p:spPr>
             <a:xfrm>
-              <a:off x="5860934" y="2878141"/>
+              <a:off x="5770500" y="2878141"/>
+              <a:ext cx="1489466" cy="72786"/>
+            </a:xfrm>
+            <a:prstGeom prst="rect">
+              <a:avLst/>
+            </a:prstGeom>
+            <a:noFill/>
+          </p:spPr>
+          <p:txBody>
+            <a:bodyPr lIns="0" rIns="0" tIns="0" bIns="0" anchorCtr="1" anchor="ctr" wrap="none"/>
+            <a:lstStyle/>
+            <a:p>
+              <a:pPr algn="l" marL="0" marR="0" indent="0">
+                <a:spcBef>
+                  <a:spcPts val="0"/>
+                </a:spcBef>
+                <a:spcAft>
+                  <a:spcPts val="0"/>
+                </a:spcAft>
+              </a:pPr>
+              <a:r>
+                <a:rPr sz="800" i="0" b="0">
+                  <a:solidFill>
+                    <a:srgbClr val="262626">
+                      <a:alpha val="100000"/>
+                    </a:srgbClr>
+                  </a:solidFill>
+                  <a:latin typeface="Arial"/>
+                  <a:cs typeface="Arial"/>
+                </a:rPr>
+                <a:t>Recent survey effort (2009-2024)</a:t>
+              </a:r>
+            </a:p>
+          </p:txBody>
+        </p:sp>
+        <p:sp>
+          <p:nvSpPr>
+            <p:cNvPr id="122" name="tx122"/>
+            <p:cNvSpPr/>
+            <p:nvPr/>
+          </p:nvSpPr>
+          <p:spPr>
+            <a:xfrm>
+              <a:off x="5860934" y="2565517"/>
               <a:ext cx="1399032" cy="72786"/>
             </a:xfrm>
             <a:prstGeom prst="rect">
@@ -6937,49 +6980,6 @@
                   <a:cs typeface="Arial"/>
                 </a:rPr>
                 <a:t>Early survey effort (2002-2008)</a:t>
-              </a:r>
-            </a:p>
-          </p:txBody>
-        </p:sp>
-        <p:sp>
-          <p:nvSpPr>
-            <p:cNvPr id="122" name="tx122"/>
-            <p:cNvSpPr/>
-            <p:nvPr/>
-          </p:nvSpPr>
-          <p:spPr>
-            <a:xfrm>
-              <a:off x="5770500" y="2565517"/>
-              <a:ext cx="1489466" cy="72786"/>
-            </a:xfrm>
-            <a:prstGeom prst="rect">
-              <a:avLst/>
-            </a:prstGeom>
-            <a:noFill/>
-          </p:spPr>
-          <p:txBody>
-            <a:bodyPr lIns="0" rIns="0" tIns="0" bIns="0" anchorCtr="1" anchor="ctr" wrap="none"/>
-            <a:lstStyle/>
-            <a:p>
-              <a:pPr algn="l" marL="0" marR="0" indent="0">
-                <a:spcBef>
-                  <a:spcPts val="0"/>
-                </a:spcBef>
-                <a:spcAft>
-                  <a:spcPts val="0"/>
-                </a:spcAft>
-              </a:pPr>
-              <a:r>
-                <a:rPr sz="800" i="0" b="0">
-                  <a:solidFill>
-                    <a:srgbClr val="262626">
-                      <a:alpha val="100000"/>
-                    </a:srgbClr>
-                  </a:solidFill>
-                  <a:latin typeface="Arial"/>
-                  <a:cs typeface="Arial"/>
-                </a:rPr>
-                <a:t>Recent survey effort (2009-2024)</a:t>
               </a:r>
             </a:p>
           </p:txBody>
@@ -8072,7 +8072,7 @@
           </p:nvSpPr>
           <p:spPr>
             <a:xfrm>
-              <a:off x="2282714" y="4843862"/>
+              <a:off x="2314238" y="4843862"/>
               <a:ext cx="0" cy="1841354"/>
             </a:xfrm>
             <a:custGeom>
@@ -8115,7 +8115,7 @@
           </p:nvSpPr>
           <p:spPr>
             <a:xfrm>
-              <a:off x="3406096" y="4843862"/>
+              <a:off x="3426265" y="4843862"/>
               <a:ext cx="0" cy="1841354"/>
             </a:xfrm>
             <a:custGeom>
@@ -8158,7 +8158,7 @@
           </p:nvSpPr>
           <p:spPr>
             <a:xfrm>
-              <a:off x="4529478" y="4843862"/>
+              <a:off x="4538291" y="4843862"/>
               <a:ext cx="0" cy="1841354"/>
             </a:xfrm>
             <a:custGeom>
@@ -8201,7 +8201,7 @@
           </p:nvSpPr>
           <p:spPr>
             <a:xfrm>
-              <a:off x="2282714" y="4843862"/>
+              <a:off x="2314238" y="4843862"/>
               <a:ext cx="0" cy="1841354"/>
             </a:xfrm>
             <a:custGeom>
@@ -8244,8 +8244,8 @@
           </p:nvSpPr>
           <p:spPr>
             <a:xfrm>
-              <a:off x="2537005" y="4932960"/>
-              <a:ext cx="2864327" cy="178195"/>
+              <a:off x="2547934" y="4932960"/>
+              <a:ext cx="2853399" cy="178195"/>
             </a:xfrm>
             <a:prstGeom prst="rect">
               <a:avLst/>
@@ -8270,8 +8270,8 @@
           </p:nvSpPr>
           <p:spPr>
             <a:xfrm>
-              <a:off x="3311646" y="5229953"/>
-              <a:ext cx="1861055" cy="178195"/>
+              <a:off x="3338545" y="5229953"/>
+              <a:ext cx="1836467" cy="178195"/>
             </a:xfrm>
             <a:prstGeom prst="rect">
               <a:avLst/>
@@ -8296,8 +8296,8 @@
           </p:nvSpPr>
           <p:spPr>
             <a:xfrm>
-              <a:off x="2793800" y="5526945"/>
-              <a:ext cx="347327" cy="178195"/>
+              <a:off x="2814916" y="5526945"/>
+              <a:ext cx="349058" cy="178195"/>
             </a:xfrm>
             <a:prstGeom prst="rect">
               <a:avLst/>
@@ -8322,8 +8322,8 @@
           </p:nvSpPr>
           <p:spPr>
             <a:xfrm>
-              <a:off x="2282714" y="5823938"/>
-              <a:ext cx="259374" cy="178195"/>
+              <a:off x="2314238" y="5823938"/>
+              <a:ext cx="285736" cy="178195"/>
             </a:xfrm>
             <a:prstGeom prst="rect">
               <a:avLst/>
@@ -8348,8 +8348,8 @@
           </p:nvSpPr>
           <p:spPr>
             <a:xfrm>
-              <a:off x="2282714" y="6120931"/>
-              <a:ext cx="247465" cy="178195"/>
+              <a:off x="2314238" y="6120931"/>
+              <a:ext cx="239203" cy="178195"/>
             </a:xfrm>
             <a:prstGeom prst="rect">
               <a:avLst/>
@@ -8374,8 +8374,8 @@
           </p:nvSpPr>
           <p:spPr>
             <a:xfrm>
-              <a:off x="2343613" y="6417923"/>
-              <a:ext cx="13922" cy="178195"/>
+              <a:off x="2374493" y="6417923"/>
+              <a:ext cx="13809" cy="178195"/>
             </a:xfrm>
             <a:prstGeom prst="rect">
               <a:avLst/>
@@ -8400,8 +8400,8 @@
           </p:nvSpPr>
           <p:spPr>
             <a:xfrm>
-              <a:off x="2282714" y="4932960"/>
-              <a:ext cx="254291" cy="178195"/>
+              <a:off x="2314238" y="4932960"/>
+              <a:ext cx="233695" cy="178195"/>
             </a:xfrm>
             <a:prstGeom prst="rect">
               <a:avLst/>
@@ -8426,8 +8426,8 @@
           </p:nvSpPr>
           <p:spPr>
             <a:xfrm>
-              <a:off x="2282714" y="5229953"/>
-              <a:ext cx="1028932" cy="178195"/>
+              <a:off x="2314238" y="5229953"/>
+              <a:ext cx="1024307" cy="178195"/>
             </a:xfrm>
             <a:prstGeom prst="rect">
               <a:avLst/>
@@ -8452,8 +8452,8 @@
           </p:nvSpPr>
           <p:spPr>
             <a:xfrm>
-              <a:off x="2282714" y="5526945"/>
-              <a:ext cx="511086" cy="178195"/>
+              <a:off x="2314238" y="5526945"/>
+              <a:ext cx="500678" cy="178195"/>
             </a:xfrm>
             <a:prstGeom prst="rect">
               <a:avLst/>
@@ -8479,7 +8479,7 @@
           <p:spPr>
             <a:xfrm>
               <a:off x="2066817" y="5823938"/>
-              <a:ext cx="215896" cy="178195"/>
+              <a:ext cx="247420" cy="178195"/>
             </a:xfrm>
             <a:prstGeom prst="rect">
               <a:avLst/>
@@ -8504,8 +8504,8 @@
           </p:nvSpPr>
           <p:spPr>
             <a:xfrm>
-              <a:off x="2130016" y="6120931"/>
-              <a:ext cx="152697" cy="178195"/>
+              <a:off x="2168844" y="6120931"/>
+              <a:ext cx="145393" cy="178195"/>
             </a:xfrm>
             <a:prstGeom prst="rect">
               <a:avLst/>
@@ -8530,8 +8530,8 @@
           </p:nvSpPr>
           <p:spPr>
             <a:xfrm>
-              <a:off x="2282714" y="6417923"/>
-              <a:ext cx="60898" cy="178195"/>
+              <a:off x="2314238" y="6417923"/>
+              <a:ext cx="60254" cy="178195"/>
             </a:xfrm>
             <a:prstGeom prst="rect">
               <a:avLst/>
@@ -9134,7 +9134,7 @@
           </p:nvSpPr>
           <p:spPr>
             <a:xfrm>
-              <a:off x="2282714" y="6685217"/>
+              <a:off x="2314238" y="6685217"/>
               <a:ext cx="0" cy="31631"/>
             </a:xfrm>
             <a:custGeom>
@@ -9174,7 +9174,7 @@
           </p:nvSpPr>
           <p:spPr>
             <a:xfrm>
-              <a:off x="3406096" y="6685217"/>
+              <a:off x="3426265" y="6685217"/>
               <a:ext cx="0" cy="31631"/>
             </a:xfrm>
             <a:custGeom>
@@ -9214,7 +9214,7 @@
           </p:nvSpPr>
           <p:spPr>
             <a:xfrm>
-              <a:off x="4529478" y="6685217"/>
+              <a:off x="4538291" y="6685217"/>
               <a:ext cx="0" cy="31631"/>
             </a:xfrm>
             <a:custGeom>
@@ -9254,7 +9254,7 @@
           </p:nvSpPr>
           <p:spPr>
             <a:xfrm>
-              <a:off x="2254459" y="6742153"/>
+              <a:off x="2285983" y="6742153"/>
               <a:ext cx="56509" cy="72786"/>
             </a:xfrm>
             <a:prstGeom prst="rect">
@@ -9297,7 +9297,7 @@
           </p:nvSpPr>
           <p:spPr>
             <a:xfrm>
-              <a:off x="3377841" y="6742153"/>
+              <a:off x="3398010" y="6742153"/>
               <a:ext cx="56509" cy="72786"/>
             </a:xfrm>
             <a:prstGeom prst="rect">
@@ -9340,7 +9340,7 @@
           </p:nvSpPr>
           <p:spPr>
             <a:xfrm>
-              <a:off x="4501223" y="6742153"/>
+              <a:off x="4510036" y="6742153"/>
               <a:ext cx="56509" cy="72786"/>
             </a:xfrm>
             <a:prstGeom prst="rect">
@@ -10012,8 +10012,8 @@
           </p:nvSpPr>
           <p:spPr>
             <a:xfrm>
-              <a:off x="8560635" y="6417923"/>
-              <a:ext cx="333749" cy="178195"/>
+              <a:off x="8565595" y="6417923"/>
+              <a:ext cx="328789" cy="178195"/>
             </a:xfrm>
             <a:prstGeom prst="rect">
               <a:avLst/>
@@ -10038,8 +10038,8 @@
           </p:nvSpPr>
           <p:spPr>
             <a:xfrm>
-              <a:off x="8750365" y="6120931"/>
-              <a:ext cx="144019" cy="178195"/>
+              <a:off x="8751214" y="6120931"/>
+              <a:ext cx="143170" cy="178195"/>
             </a:xfrm>
             <a:prstGeom prst="rect">
               <a:avLst/>
@@ -10064,8 +10064,8 @@
           </p:nvSpPr>
           <p:spPr>
             <a:xfrm>
-              <a:off x="8769503" y="5823938"/>
-              <a:ext cx="124882" cy="178195"/>
+              <a:off x="8769234" y="5823938"/>
+              <a:ext cx="125151" cy="178195"/>
             </a:xfrm>
             <a:prstGeom prst="rect">
               <a:avLst/>
@@ -10091,7 +10091,7 @@
           <p:spPr>
             <a:xfrm>
               <a:off x="8894385" y="5526945"/>
-              <a:ext cx="195247" cy="178195"/>
+              <a:ext cx="194315" cy="178195"/>
             </a:xfrm>
             <a:prstGeom prst="rect">
               <a:avLst/>
@@ -10117,7 +10117,7 @@
           <p:spPr>
             <a:xfrm>
               <a:off x="8894385" y="5229953"/>
-              <a:ext cx="606766" cy="178195"/>
+              <a:ext cx="603522" cy="178195"/>
             </a:xfrm>
             <a:prstGeom prst="rect">
               <a:avLst/>
@@ -10143,7 +10143,7 @@
           <p:spPr>
             <a:xfrm>
               <a:off x="8894385" y="4932960"/>
-              <a:ext cx="798245" cy="178195"/>
+              <a:ext cx="789095" cy="178195"/>
             </a:xfrm>
             <a:prstGeom prst="rect">
               <a:avLst/>
@@ -10168,7 +10168,7 @@
           </p:nvSpPr>
           <p:spPr>
             <a:xfrm>
-              <a:off x="7883992" y="6478583"/>
+              <a:off x="7888952" y="6478583"/>
               <a:ext cx="638342" cy="56875"/>
             </a:xfrm>
             <a:prstGeom prst="rect">
@@ -10211,7 +10211,7 @@
           </p:nvSpPr>
           <p:spPr>
             <a:xfrm>
-              <a:off x="8073722" y="6181591"/>
+              <a:off x="8074571" y="6181591"/>
               <a:ext cx="638342" cy="56875"/>
             </a:xfrm>
             <a:prstGeom prst="rect">
@@ -10241,7 +10241,7 @@
                   <a:latin typeface="Arial"/>
                   <a:cs typeface="Arial"/>
                 </a:rPr>
-                <a:t>r = -0.06, P = 0.76</a:t>
+                <a:t>r = -0.06, P = 0.77</a:t>
               </a:r>
             </a:p>
           </p:txBody>
@@ -10254,7 +10254,7 @@
           </p:nvSpPr>
           <p:spPr>
             <a:xfrm>
-              <a:off x="8092859" y="5884598"/>
+              <a:off x="8092591" y="5884598"/>
               <a:ext cx="638342" cy="56875"/>
             </a:xfrm>
             <a:prstGeom prst="rect">
@@ -10297,7 +10297,7 @@
           </p:nvSpPr>
           <p:spPr>
             <a:xfrm>
-              <a:off x="9126348" y="5587605"/>
+              <a:off x="9125416" y="5587605"/>
               <a:ext cx="611916" cy="56875"/>
             </a:xfrm>
             <a:prstGeom prst="rect">
@@ -10327,7 +10327,7 @@
                   <a:latin typeface="Arial"/>
                   <a:cs typeface="Arial"/>
                 </a:rPr>
-                <a:t>r = 0.08, P = 0.68</a:t>
+                <a:t>r = 0.08, P = 0.69</a:t>
               </a:r>
             </a:p>
           </p:txBody>
@@ -10340,7 +10340,7 @@
           </p:nvSpPr>
           <p:spPr>
             <a:xfrm>
-              <a:off x="9537866" y="5290613"/>
+              <a:off x="9534622" y="5290613"/>
               <a:ext cx="611916" cy="56875"/>
             </a:xfrm>
             <a:prstGeom prst="rect">
@@ -10383,7 +10383,7 @@
           </p:nvSpPr>
           <p:spPr>
             <a:xfrm>
-              <a:off x="9729345" y="4993620"/>
+              <a:off x="9720196" y="4993620"/>
               <a:ext cx="611916" cy="56875"/>
             </a:xfrm>
             <a:prstGeom prst="rect">
